--- a/demo/designmd-pptx-best-v2.1.2.pptx
+++ b/demo/designmd-pptx-best-v2.1.2.pptx
@@ -5,16 +5,16 @@
     <p:sldMasterId xmlns:r="http://schemas.openxmlformats.org/officeDocument/2006/relationships" id="2147483648" r:id="rId1"/>
   </p:sldMasterIdLst>
   <p:sldIdLst>
-    <p:sldId id="256" r:id="R269e527a49884e5c"/>
-    <p:sldId id="257" r:id="R2b22566404564b19"/>
-    <p:sldId id="258" r:id="R962bf375e0a946b7"/>
-    <p:sldId id="259" r:id="R025b11492b314df4"/>
-    <p:sldId id="260" r:id="R7758b82bf54f4e1b"/>
-    <p:sldId id="261" r:id="R8dc64986fcda428b"/>
-    <p:sldId id="262" r:id="Rb64beeff4547457a"/>
-    <p:sldId id="263" r:id="R5ac571f2bc624a7b"/>
-    <p:sldId id="264" r:id="R0a81eeb369bc4425"/>
-    <p:sldId id="265" r:id="Rc53d8e01c0cd422d"/>
+    <p:sldId id="256" r:id="R6b46372f504b4d80"/>
+    <p:sldId id="257" r:id="R997e9c6f95ce4c46"/>
+    <p:sldId id="258" r:id="R684bcc2dfca94c9c"/>
+    <p:sldId id="259" r:id="R0d5be0d5002f4f1d"/>
+    <p:sldId id="260" r:id="R986857ca3c254c61"/>
+    <p:sldId id="261" r:id="R6dca5c91185a48a9"/>
+    <p:sldId id="262" r:id="Rc85c0cafdf3745db"/>
+    <p:sldId id="263" r:id="R5aac87b4b07148c9"/>
+    <p:sldId id="264" r:id="R4be03f64042e4ea7"/>
+    <p:sldId id="265" r:id="Rd3765a694baa4025"/>
   </p:sldIdLst>
   <p:sldSz cx="12192000" cy="6858000"/>
   <p:notesSz cx="6858000" cy="9144000"/>
@@ -219,7 +219,7 @@
           <a:p xmlns:a="http://schemas.openxmlformats.org/drawingml/2006/main">
             <a:r>
               <a:rPr lang="en-US"/>
-              <a:t>Pillars are non-negotiable investments, not initiatives.</a:t>
+              <a:t>Three cards max on a hero slide; cut copy first.</a:t>
             </a:r>
           </a:p>
         </p:txBody>
@@ -271,7 +271,7 @@
           <a:p xmlns:a="http://schemas.openxmlformats.org/drawingml/2006/main">
             <a:r>
               <a:rPr lang="en-US"/>
-              <a:t>Mission is timeless; vision is dated and measurable.</a:t>
+              <a:t>Pillars are non-negotiable investments, not initiatives.</a:t>
             </a:r>
           </a:p>
         </p:txBody>
@@ -323,7 +323,7 @@
           <a:p xmlns:a="http://schemas.openxmlformats.org/drawingml/2006/main">
             <a:r>
               <a:rPr lang="en-US"/>
-              <a:t>You cannot skip a stair — name the exit criteria per step.</a:t>
+              <a:t>Mission is timeless; vision is dated and measurable.</a:t>
             </a:r>
           </a:p>
         </p:txBody>
@@ -334,6 +334,58 @@
 </file>
 
 <file path=ppt/notesSlides/notesSlide7.xml><?xml version="1.0" encoding="utf-8"?>
+<p:notes xmlns:p="http://schemas.openxmlformats.org/presentationml/2006/main">
+  <p:cSld>
+    <p:spTree>
+      <p:nvGrpSpPr>
+        <p:cNvPr id="1" name=""/>
+        <p:cNvGrpSpPr/>
+        <p:nvPr/>
+      </p:nvGrpSpPr>
+      <p:grpSpPr>
+        <a:xfrm xmlns:a="http://schemas.openxmlformats.org/drawingml/2006/main"/>
+      </p:grpSpPr>
+      <p:sp>
+        <p:nvSpPr>
+          <p:cNvPr id="2" name="Slide Image Placeholder 1"/>
+          <p:cNvSpPr/>
+          <p:nvPr>
+            <p:ph type="sldImg" idx="0"/>
+          </p:nvPr>
+        </p:nvSpPr>
+        <p:spPr/>
+        <p:txBody>
+          <a:bodyPr xmlns:a="http://schemas.openxmlformats.org/drawingml/2006/main"/>
+          <a:lstStyle xmlns:a="http://schemas.openxmlformats.org/drawingml/2006/main"/>
+          <a:p xmlns:a="http://schemas.openxmlformats.org/drawingml/2006/main"/>
+        </p:txBody>
+      </p:sp>
+      <p:sp>
+        <p:nvSpPr>
+          <p:cNvPr id="3" name="Notes Placeholder 2"/>
+          <p:cNvSpPr/>
+          <p:nvPr>
+            <p:ph type="body" idx="1"/>
+          </p:nvPr>
+        </p:nvSpPr>
+        <p:spPr/>
+        <p:txBody>
+          <a:bodyPr xmlns:a="http://schemas.openxmlformats.org/drawingml/2006/main"/>
+          <a:lstStyle xmlns:a="http://schemas.openxmlformats.org/drawingml/2006/main"/>
+          <a:p xmlns:a="http://schemas.openxmlformats.org/drawingml/2006/main">
+            <a:r>
+              <a:rPr lang="en-US"/>
+              <a:t>You cannot skip a stair — name the exit criteria.</a:t>
+            </a:r>
+          </a:p>
+        </p:txBody>
+      </p:sp>
+    </p:spTree>
+  </p:cSld>
+</p:notes>
+</file>
+
+<file path=ppt/notesSlides/notesSlide8.xml><?xml version="1.0" encoding="utf-8"?>
 <p:notes xmlns:p="http://schemas.openxmlformats.org/presentationml/2006/main">
   <p:cSld>
     <p:spTree>

--- a/demo/designmd-pptx-best-v2.1.2.pptx
+++ b/demo/designmd-pptx-best-v2.1.2.pptx
@@ -5,16 +5,18 @@
     <p:sldMasterId xmlns:r="http://schemas.openxmlformats.org/officeDocument/2006/relationships" id="2147483648" r:id="rId1"/>
   </p:sldMasterIdLst>
   <p:sldIdLst>
-    <p:sldId id="256" r:id="R6b46372f504b4d80"/>
-    <p:sldId id="257" r:id="R997e9c6f95ce4c46"/>
-    <p:sldId id="258" r:id="R684bcc2dfca94c9c"/>
-    <p:sldId id="259" r:id="R0d5be0d5002f4f1d"/>
-    <p:sldId id="260" r:id="R986857ca3c254c61"/>
-    <p:sldId id="261" r:id="R6dca5c91185a48a9"/>
-    <p:sldId id="262" r:id="Rc85c0cafdf3745db"/>
-    <p:sldId id="263" r:id="R5aac87b4b07148c9"/>
-    <p:sldId id="264" r:id="R4be03f64042e4ea7"/>
-    <p:sldId id="265" r:id="Rd3765a694baa4025"/>
+    <p:sldId id="256" r:id="R8de47c23f4cd437f"/>
+    <p:sldId id="257" r:id="R4753ea1be7bf4830"/>
+    <p:sldId id="258" r:id="R2c742daa40674f2c"/>
+    <p:sldId id="259" r:id="R9c2f86182d6a4502"/>
+    <p:sldId id="260" r:id="R6f2d2bc561644c29"/>
+    <p:sldId id="261" r:id="R37934be00e2d4dbf"/>
+    <p:sldId id="262" r:id="R1e8d55fed5d54793"/>
+    <p:sldId id="263" r:id="Rc198e7811a8c44cf"/>
+    <p:sldId id="264" r:id="Ref0423f086cd4876"/>
+    <p:sldId id="265" r:id="Rc2541192e8844696"/>
+    <p:sldId id="266" r:id="R9bb0e96e7eee452b"/>
+    <p:sldId id="267" r:id="R13e9eff22d524f78"/>
   </p:sldIdLst>
   <p:sldSz cx="12192000" cy="6858000"/>
   <p:notesSz cx="6858000" cy="9144000"/>
@@ -63,7 +65,111 @@
           <a:p xmlns:a="http://schemas.openxmlformats.org/drawingml/2006/main">
             <a:r>
               <a:rPr lang="en-US"/>
-              <a:t>Everything else is a derivative of this file.</a:t>
+              <a:t>Hold the name.</a:t>
+            </a:r>
+          </a:p>
+        </p:txBody>
+      </p:sp>
+    </p:spTree>
+  </p:cSld>
+</p:notes>
+</file>
+
+<file path=ppt/notesSlides/notesSlide10.xml><?xml version="1.0" encoding="utf-8"?>
+<p:notes xmlns:p="http://schemas.openxmlformats.org/presentationml/2006/main">
+  <p:cSld>
+    <p:spTree>
+      <p:nvGrpSpPr>
+        <p:cNvPr id="1" name=""/>
+        <p:cNvGrpSpPr/>
+        <p:nvPr/>
+      </p:nvGrpSpPr>
+      <p:grpSpPr>
+        <a:xfrm xmlns:a="http://schemas.openxmlformats.org/drawingml/2006/main"/>
+      </p:grpSpPr>
+      <p:sp>
+        <p:nvSpPr>
+          <p:cNvPr id="2" name="Slide Image Placeholder 1"/>
+          <p:cNvSpPr/>
+          <p:nvPr>
+            <p:ph type="sldImg" idx="0"/>
+          </p:nvPr>
+        </p:nvSpPr>
+        <p:spPr/>
+        <p:txBody>
+          <a:bodyPr xmlns:a="http://schemas.openxmlformats.org/drawingml/2006/main"/>
+          <a:lstStyle xmlns:a="http://schemas.openxmlformats.org/drawingml/2006/main"/>
+          <a:p xmlns:a="http://schemas.openxmlformats.org/drawingml/2006/main"/>
+        </p:txBody>
+      </p:sp>
+      <p:sp>
+        <p:nvSpPr>
+          <p:cNvPr id="3" name="Notes Placeholder 2"/>
+          <p:cNvSpPr/>
+          <p:nvPr>
+            <p:ph type="body" idx="1"/>
+          </p:nvPr>
+        </p:nvSpPr>
+        <p:spPr/>
+        <p:txBody>
+          <a:bodyPr xmlns:a="http://schemas.openxmlformats.org/drawingml/2006/main"/>
+          <a:lstStyle xmlns:a="http://schemas.openxmlformats.org/drawingml/2006/main"/>
+          <a:p xmlns:a="http://schemas.openxmlformats.org/drawingml/2006/main">
+            <a:r>
+              <a:rPr lang="en-US"/>
+              <a:t>You cannot skip a stair — name the exit criteria.</a:t>
+            </a:r>
+          </a:p>
+        </p:txBody>
+      </p:sp>
+    </p:spTree>
+  </p:cSld>
+</p:notes>
+</file>
+
+<file path=ppt/notesSlides/notesSlide11.xml><?xml version="1.0" encoding="utf-8"?>
+<p:notes xmlns:p="http://schemas.openxmlformats.org/presentationml/2006/main">
+  <p:cSld>
+    <p:spTree>
+      <p:nvGrpSpPr>
+        <p:cNvPr id="1" name=""/>
+        <p:cNvGrpSpPr/>
+        <p:nvPr/>
+      </p:nvGrpSpPr>
+      <p:grpSpPr>
+        <a:xfrm xmlns:a="http://schemas.openxmlformats.org/drawingml/2006/main"/>
+      </p:grpSpPr>
+      <p:sp>
+        <p:nvSpPr>
+          <p:cNvPr id="2" name="Slide Image Placeholder 1"/>
+          <p:cNvSpPr/>
+          <p:nvPr>
+            <p:ph type="sldImg" idx="0"/>
+          </p:nvPr>
+        </p:nvSpPr>
+        <p:spPr/>
+        <p:txBody>
+          <a:bodyPr xmlns:a="http://schemas.openxmlformats.org/drawingml/2006/main"/>
+          <a:lstStyle xmlns:a="http://schemas.openxmlformats.org/drawingml/2006/main"/>
+          <a:p xmlns:a="http://schemas.openxmlformats.org/drawingml/2006/main"/>
+        </p:txBody>
+      </p:sp>
+      <p:sp>
+        <p:nvSpPr>
+          <p:cNvPr id="3" name="Notes Placeholder 2"/>
+          <p:cNvSpPr/>
+          <p:nvPr>
+            <p:ph type="body" idx="1"/>
+          </p:nvPr>
+        </p:nvSpPr>
+        <p:spPr/>
+        <p:txBody>
+          <a:bodyPr xmlns:a="http://schemas.openxmlformats.org/drawingml/2006/main"/>
+          <a:lstStyle xmlns:a="http://schemas.openxmlformats.org/drawingml/2006/main"/>
+          <a:p xmlns:a="http://schemas.openxmlformats.org/drawingml/2006/main">
+            <a:r>
+              <a:rPr lang="en-US"/>
+              <a:t>Open items need an owner before the meeting ends.</a:t>
             </a:r>
           </a:p>
         </p:txBody>
@@ -115,7 +221,7 @@
           <a:p xmlns:a="http://schemas.openxmlformats.org/drawingml/2006/main">
             <a:r>
               <a:rPr lang="en-US"/>
-              <a:t>Call the single metric that proves the after state.</a:t>
+              <a:t>Pause on the section number before the title.</a:t>
             </a:r>
           </a:p>
         </p:txBody>
@@ -167,7 +273,7 @@
           <a:p xmlns:a="http://schemas.openxmlformats.org/drawingml/2006/main">
             <a:r>
               <a:rPr lang="en-US"/>
-              <a:t>Five steps. One owner each. Gate 3 is not optional.</a:t>
+              <a:t>Walk KPIs left to right; pause on any watch metric.</a:t>
             </a:r>
           </a:p>
         </p:txBody>
@@ -219,7 +325,7 @@
           <a:p xmlns:a="http://schemas.openxmlformats.org/drawingml/2006/main">
             <a:r>
               <a:rPr lang="en-US"/>
-              <a:t>Three cards max on a hero slide; cut copy first.</a:t>
+              <a:t>The brand file is the contract.</a:t>
             </a:r>
           </a:p>
         </p:txBody>
@@ -271,7 +377,7 @@
           <a:p xmlns:a="http://schemas.openxmlformats.org/drawingml/2006/main">
             <a:r>
               <a:rPr lang="en-US"/>
-              <a:t>Pillars are non-negotiable investments, not initiatives.</a:t>
+              <a:t>Call the single metric that proves the after state.</a:t>
             </a:r>
           </a:p>
         </p:txBody>
@@ -323,7 +429,7 @@
           <a:p xmlns:a="http://schemas.openxmlformats.org/drawingml/2006/main">
             <a:r>
               <a:rPr lang="en-US"/>
-              <a:t>Mission is timeless; vision is dated and measurable.</a:t>
+              <a:t>Walk left to right; stop on the bottleneck.</a:t>
             </a:r>
           </a:p>
         </p:txBody>
@@ -375,7 +481,7 @@
           <a:p xmlns:a="http://schemas.openxmlformats.org/drawingml/2006/main">
             <a:r>
               <a:rPr lang="en-US"/>
-              <a:t>You cannot skip a stair — name the exit criteria.</a:t>
+              <a:t>Three cards max on a hero slide; cut copy first.</a:t>
             </a:r>
           </a:p>
         </p:txBody>
@@ -427,7 +533,59 @@
           <a:p xmlns:a="http://schemas.openxmlformats.org/drawingml/2006/main">
             <a:r>
               <a:rPr lang="en-US"/>
-              <a:t>Open items need an owner before the meeting ends.</a:t>
+              <a:t>Name the drop-off between the two biggest deltas.</a:t>
+            </a:r>
+          </a:p>
+        </p:txBody>
+      </p:sp>
+    </p:spTree>
+  </p:cSld>
+</p:notes>
+</file>
+
+<file path=ppt/notesSlides/notesSlide9.xml><?xml version="1.0" encoding="utf-8"?>
+<p:notes xmlns:p="http://schemas.openxmlformats.org/presentationml/2006/main">
+  <p:cSld>
+    <p:spTree>
+      <p:nvGrpSpPr>
+        <p:cNvPr id="1" name=""/>
+        <p:cNvGrpSpPr/>
+        <p:nvPr/>
+      </p:nvGrpSpPr>
+      <p:grpSpPr>
+        <a:xfrm xmlns:a="http://schemas.openxmlformats.org/drawingml/2006/main"/>
+      </p:grpSpPr>
+      <p:sp>
+        <p:nvSpPr>
+          <p:cNvPr id="2" name="Slide Image Placeholder 1"/>
+          <p:cNvSpPr/>
+          <p:nvPr>
+            <p:ph type="sldImg" idx="0"/>
+          </p:nvPr>
+        </p:nvSpPr>
+        <p:spPr/>
+        <p:txBody>
+          <a:bodyPr xmlns:a="http://schemas.openxmlformats.org/drawingml/2006/main"/>
+          <a:lstStyle xmlns:a="http://schemas.openxmlformats.org/drawingml/2006/main"/>
+          <a:p xmlns:a="http://schemas.openxmlformats.org/drawingml/2006/main"/>
+        </p:txBody>
+      </p:sp>
+      <p:sp>
+        <p:nvSpPr>
+          <p:cNvPr id="3" name="Notes Placeholder 2"/>
+          <p:cNvSpPr/>
+          <p:nvPr>
+            <p:ph type="body" idx="1"/>
+          </p:nvPr>
+        </p:nvSpPr>
+        <p:spPr/>
+        <p:txBody>
+          <a:bodyPr xmlns:a="http://schemas.openxmlformats.org/drawingml/2006/main"/>
+          <a:lstStyle xmlns:a="http://schemas.openxmlformats.org/drawingml/2006/main"/>
+          <a:p xmlns:a="http://schemas.openxmlformats.org/drawingml/2006/main">
+            <a:r>
+              <a:rPr lang="en-US"/>
+              <a:t>Name the quadrant that needs a decision this quarter.</a:t>
             </a:r>
           </a:p>
         </p:txBody>
@@ -779,8 +937,8 @@
         </p:nvSpPr>
         <p:spPr>
           <a:xfrm xmlns:a="http://schemas.openxmlformats.org/drawingml/2006/main">
-            <a:off x="792000" y="1872000"/>
-            <a:ext cx="10609200" cy="1512000"/>
+            <a:off x="792000" y="1800000"/>
+            <a:ext cx="10609200" cy="1440000"/>
           </a:xfrm>
           <a:prstGeom xmlns:a="http://schemas.openxmlformats.org/drawingml/2006/main" prst="rect">
             <a:avLst/>
@@ -813,8 +971,8 @@
         </p:nvSpPr>
         <p:spPr>
           <a:xfrm xmlns:a="http://schemas.openxmlformats.org/drawingml/2006/main">
-            <a:off x="792000" y="3420000"/>
-            <a:ext cx="1620000" cy="50400"/>
+            <a:off x="792000" y="3276000"/>
+            <a:ext cx="1728000" cy="50400"/>
           </a:xfrm>
           <a:prstGeom xmlns:a="http://schemas.openxmlformats.org/drawingml/2006/main" prst="rect">
             <a:avLst/>
@@ -840,7 +998,7 @@
         </p:nvSpPr>
         <p:spPr>
           <a:xfrm xmlns:a="http://schemas.openxmlformats.org/drawingml/2006/main">
-            <a:off x="792000" y="3564000"/>
+            <a:off x="792000" y="3420000"/>
             <a:ext cx="9360000" cy="576000"/>
           </a:xfrm>
           <a:prstGeom xmlns:a="http://schemas.openxmlformats.org/drawingml/2006/main" prst="rect">
@@ -861,7 +1019,7 @@
                 <a:latin typeface="Arial"/>
                 <a:ea typeface="Arial"/>
               </a:rPr>
-              <a:t>Brand design that becomes a real deck</a:t>
+              <a:t>Motifs from structure — original chrome, brand from DESIGN.md</a:t>
             </a:r>
           </a:p>
         </p:txBody>
@@ -874,7 +1032,7 @@
         </p:nvSpPr>
         <p:spPr>
           <a:xfrm xmlns:a="http://schemas.openxmlformats.org/drawingml/2006/main">
-            <a:off x="792000" y="6048000"/>
+            <a:off x="792000" y="5742000"/>
             <a:ext cx="10609200" cy="324000"/>
           </a:xfrm>
           <a:prstGeom xmlns:a="http://schemas.openxmlformats.org/drawingml/2006/main" prst="rect">
@@ -895,7 +1053,7 @@
                 <a:latin typeface="Arial"/>
                 <a:ea typeface="Arial"/>
               </a:rPr>
-              <a:t>v2.1.2  ·  English  ·  Precision pipeline</a:t>
+              <a:t>v2.1.2  ·  motif library  ·  English</a:t>
             </a:r>
           </a:p>
         </p:txBody>
@@ -1009,14 +1167,14 @@
       <p:grpSpPr/>
       <p:sp>
         <p:nvSpPr>
-          <p:cNvPr id="100061" name="CloseTitle"/>
+          <p:cNvPr id="100083" name="StairsTitle"/>
           <p:cNvSpPr txBox="1"/>
           <p:nvPr/>
         </p:nvSpPr>
         <p:spPr>
           <a:xfrm xmlns:a="http://schemas.openxmlformats.org/drawingml/2006/main">
-            <a:off x="792000" y="1796400"/>
-            <a:ext cx="10609200" cy="936000"/>
+            <a:off x="792000" y="435600"/>
+            <a:ext cx="10609200" cy="558000"/>
           </a:xfrm>
           <a:prstGeom xmlns:a="http://schemas.openxmlformats.org/drawingml/2006/main" prst="rect">
             <a:avLst/>
@@ -1027,64 +1185,289 @@
           <a:bodyPr xmlns:a="http://schemas.openxmlformats.org/drawingml/2006/main"/>
           <a:lstStyle xmlns:a="http://schemas.openxmlformats.org/drawingml/2006/main"/>
           <a:p xmlns:a="http://schemas.openxmlformats.org/drawingml/2006/main">
+            <a:r>
+              <a:rPr lang="en-US" sz="3600" b="1">
+                <a:solidFill>
+                  <a:srgbClr val="F5F5F7"/>
+                </a:solidFill>
+                <a:latin typeface="Arial"/>
+                <a:ea typeface="Arial"/>
+              </a:rPr>
+              <a:t>Quality staircase</a:t>
+            </a:r>
+          </a:p>
+        </p:txBody>
+      </p:sp>
+      <p:sp>
+        <p:nvSpPr>
+          <p:cNvPr id="100084" name="Stair1"/>
+          <p:cNvSpPr/>
+          <p:nvPr/>
+        </p:nvSpPr>
+        <p:spPr>
+          <a:xfrm xmlns:a="http://schemas.openxmlformats.org/drawingml/2006/main">
+            <a:off x="828000" y="3538800"/>
+            <a:ext cx="2048400" cy="1717200"/>
+          </a:xfrm>
+          <a:prstGeom xmlns:a="http://schemas.openxmlformats.org/drawingml/2006/main" prst="roundRect">
+            <a:avLst/>
+          </a:prstGeom>
+          <a:solidFill xmlns:a="http://schemas.openxmlformats.org/drawingml/2006/main">
+            <a:srgbClr val="1C1C1E"/>
+          </a:solidFill>
+          <a:ln xmlns:a="http://schemas.openxmlformats.org/drawingml/2006/main">
+            <a:noFill/>
+          </a:ln>
+        </p:spPr>
+        <p:txBody>
+          <a:bodyPr xmlns:a="http://schemas.openxmlformats.org/drawingml/2006/main" anchor="ctr"/>
+          <a:lstStyle xmlns:a="http://schemas.openxmlformats.org/drawingml/2006/main"/>
+          <a:p xmlns:a="http://schemas.openxmlformats.org/drawingml/2006/main">
             <a:pPr algn="ctr"/>
             <a:r>
-              <a:rPr lang="en-US" sz="4400" b="1">
+              <a:rPr lang="en-US" sz="1800" b="1">
                 <a:solidFill>
                   <a:srgbClr val="F5F5F7"/>
                 </a:solidFill>
                 <a:latin typeface="Arial"/>
                 <a:ea typeface="Arial"/>
               </a:rPr>
-              <a:t>Start with the brand file</a:t>
-            </a:r>
-          </a:p>
-        </p:txBody>
-      </p:sp>
-      <p:sp>
-        <p:nvSpPr>
-          <p:cNvPr id="100062" name="CloseBody"/>
-          <p:cNvSpPr txBox="1"/>
-          <p:nvPr/>
-        </p:nvSpPr>
-        <p:spPr>
-          <a:xfrm xmlns:a="http://schemas.openxmlformats.org/drawingml/2006/main">
-            <a:off x="1188000" y="2952000"/>
-            <a:ext cx="9817200" cy="720000"/>
-          </a:xfrm>
-          <a:prstGeom xmlns:a="http://schemas.openxmlformats.org/drawingml/2006/main" prst="rect">
-            <a:avLst/>
-          </a:prstGeom>
-          <a:noFill xmlns:a="http://schemas.openxmlformats.org/drawingml/2006/main"/>
-        </p:spPr>
-        <p:txBody>
-          <a:bodyPr xmlns:a="http://schemas.openxmlformats.org/drawingml/2006/main"/>
-          <a:lstStyle xmlns:a="http://schemas.openxmlformats.org/drawingml/2006/main"/>
+              <a:t>1</a:t>
+            </a:r>
+          </a:p>
           <a:p xmlns:a="http://schemas.openxmlformats.org/drawingml/2006/main">
             <a:pPr algn="ctr"/>
             <a:r>
-              <a:rPr lang="en-US" sz="1800">
-                <a:solidFill>
-                  <a:srgbClr val="A0A6B0"/>
-                </a:solidFill>
-                <a:latin typeface="Arial"/>
-                <a:ea typeface="Arial"/>
-              </a:rPr>
-              <a:t>doctor --ensure · compose · scaffold · apply --screenshot</a:t>
-            </a:r>
-          </a:p>
-        </p:txBody>
-      </p:sp>
-      <p:sp>
-        <p:nvSpPr>
-          <p:cNvPr id="100063" name="CloseCta"/>
+              <a:rPr lang="en-US" sz="1800" b="1">
+                <a:solidFill>
+                  <a:srgbClr val="F5F5F7"/>
+                </a:solidFill>
+                <a:latin typeface="Arial"/>
+                <a:ea typeface="Arial"/>
+              </a:rPr>
+              <a:t>Tokens</a:t>
+            </a:r>
+          </a:p>
+          <a:p xmlns:a="http://schemas.openxmlformats.org/drawingml/2006/main">
+            <a:pPr algn="ctr"/>
+            <a:r>
+              <a:rPr lang="en-US" sz="1800" b="1">
+                <a:solidFill>
+                  <a:srgbClr val="F5F5F7"/>
+                </a:solidFill>
+                <a:latin typeface="Arial"/>
+                <a:ea typeface="Arial"/>
+              </a:rPr>
+              <a:t>Floors</a:t>
+            </a:r>
+          </a:p>
+        </p:txBody>
+      </p:sp>
+      <p:sp>
+        <p:nvSpPr>
+          <p:cNvPr id="100085" name="Stair2"/>
           <p:cNvSpPr/>
           <p:nvPr/>
         </p:nvSpPr>
         <p:spPr>
           <a:xfrm xmlns:a="http://schemas.openxmlformats.org/drawingml/2006/main">
-            <a:off x="4294800" y="4068000"/>
-            <a:ext cx="3600000" cy="612000"/>
+            <a:off x="2948400" y="3013200"/>
+            <a:ext cx="2048400" cy="2242800"/>
+          </a:xfrm>
+          <a:prstGeom xmlns:a="http://schemas.openxmlformats.org/drawingml/2006/main" prst="roundRect">
+            <a:avLst/>
+          </a:prstGeom>
+          <a:solidFill xmlns:a="http://schemas.openxmlformats.org/drawingml/2006/main">
+            <a:srgbClr val="1C1C1E"/>
+          </a:solidFill>
+          <a:ln xmlns:a="http://schemas.openxmlformats.org/drawingml/2006/main">
+            <a:noFill/>
+          </a:ln>
+        </p:spPr>
+        <p:txBody>
+          <a:bodyPr xmlns:a="http://schemas.openxmlformats.org/drawingml/2006/main" anchor="ctr"/>
+          <a:lstStyle xmlns:a="http://schemas.openxmlformats.org/drawingml/2006/main"/>
+          <a:p xmlns:a="http://schemas.openxmlformats.org/drawingml/2006/main">
+            <a:pPr algn="ctr"/>
+            <a:r>
+              <a:rPr lang="en-US" sz="1800" b="1">
+                <a:solidFill>
+                  <a:srgbClr val="F5F5F7"/>
+                </a:solidFill>
+                <a:latin typeface="Arial"/>
+                <a:ea typeface="Arial"/>
+              </a:rPr>
+              <a:t>2</a:t>
+            </a:r>
+          </a:p>
+          <a:p xmlns:a="http://schemas.openxmlformats.org/drawingml/2006/main">
+            <a:pPr algn="ctr"/>
+            <a:r>
+              <a:rPr lang="en-US" sz="1800" b="1">
+                <a:solidFill>
+                  <a:srgbClr val="F5F5F7"/>
+                </a:solidFill>
+                <a:latin typeface="Arial"/>
+                <a:ea typeface="Arial"/>
+              </a:rPr>
+              <a:t>Motif</a:t>
+            </a:r>
+          </a:p>
+          <a:p xmlns:a="http://schemas.openxmlformats.org/drawingml/2006/main">
+            <a:pPr algn="ctr"/>
+            <a:r>
+              <a:rPr lang="en-US" sz="1800" b="1">
+                <a:solidFill>
+                  <a:srgbClr val="F5F5F7"/>
+                </a:solidFill>
+                <a:latin typeface="Arial"/>
+                <a:ea typeface="Arial"/>
+              </a:rPr>
+              <a:t>Chrome</a:t>
+            </a:r>
+          </a:p>
+        </p:txBody>
+      </p:sp>
+      <p:sp>
+        <p:nvSpPr>
+          <p:cNvPr id="100086" name="Stair3"/>
+          <p:cNvSpPr/>
+          <p:nvPr/>
+        </p:nvSpPr>
+        <p:spPr>
+          <a:xfrm xmlns:a="http://schemas.openxmlformats.org/drawingml/2006/main">
+            <a:off x="5072400" y="2487600"/>
+            <a:ext cx="2048400" cy="2768400"/>
+          </a:xfrm>
+          <a:prstGeom xmlns:a="http://schemas.openxmlformats.org/drawingml/2006/main" prst="roundRect">
+            <a:avLst/>
+          </a:prstGeom>
+          <a:solidFill xmlns:a="http://schemas.openxmlformats.org/drawingml/2006/main">
+            <a:srgbClr val="1C1C1E"/>
+          </a:solidFill>
+          <a:ln xmlns:a="http://schemas.openxmlformats.org/drawingml/2006/main">
+            <a:noFill/>
+          </a:ln>
+        </p:spPr>
+        <p:txBody>
+          <a:bodyPr xmlns:a="http://schemas.openxmlformats.org/drawingml/2006/main" anchor="ctr"/>
+          <a:lstStyle xmlns:a="http://schemas.openxmlformats.org/drawingml/2006/main"/>
+          <a:p xmlns:a="http://schemas.openxmlformats.org/drawingml/2006/main">
+            <a:pPr algn="ctr"/>
+            <a:r>
+              <a:rPr lang="en-US" sz="1800" b="1">
+                <a:solidFill>
+                  <a:srgbClr val="F5F5F7"/>
+                </a:solidFill>
+                <a:latin typeface="Arial"/>
+                <a:ea typeface="Arial"/>
+              </a:rPr>
+              <a:t>3</a:t>
+            </a:r>
+          </a:p>
+          <a:p xmlns:a="http://schemas.openxmlformats.org/drawingml/2006/main">
+            <a:pPr algn="ctr"/>
+            <a:r>
+              <a:rPr lang="en-US" sz="1800" b="1">
+                <a:solidFill>
+                  <a:srgbClr val="F5F5F7"/>
+                </a:solidFill>
+                <a:latin typeface="Arial"/>
+                <a:ea typeface="Arial"/>
+              </a:rPr>
+              <a:t>Issues</a:t>
+            </a:r>
+          </a:p>
+          <a:p xmlns:a="http://schemas.openxmlformats.org/drawingml/2006/main">
+            <a:pPr algn="ctr"/>
+            <a:r>
+              <a:rPr lang="en-US" sz="1800" b="1">
+                <a:solidFill>
+                  <a:srgbClr val="F5F5F7"/>
+                </a:solidFill>
+                <a:latin typeface="Arial"/>
+                <a:ea typeface="Arial"/>
+              </a:rPr>
+              <a:t>Gate</a:t>
+            </a:r>
+          </a:p>
+        </p:txBody>
+      </p:sp>
+      <p:sp>
+        <p:nvSpPr>
+          <p:cNvPr id="100087" name="Stair4"/>
+          <p:cNvSpPr/>
+          <p:nvPr/>
+        </p:nvSpPr>
+        <p:spPr>
+          <a:xfrm xmlns:a="http://schemas.openxmlformats.org/drawingml/2006/main">
+            <a:off x="7192800" y="1962000"/>
+            <a:ext cx="2048400" cy="3294000"/>
+          </a:xfrm>
+          <a:prstGeom xmlns:a="http://schemas.openxmlformats.org/drawingml/2006/main" prst="roundRect">
+            <a:avLst/>
+          </a:prstGeom>
+          <a:solidFill xmlns:a="http://schemas.openxmlformats.org/drawingml/2006/main">
+            <a:srgbClr val="1C1C1E"/>
+          </a:solidFill>
+          <a:ln xmlns:a="http://schemas.openxmlformats.org/drawingml/2006/main">
+            <a:noFill/>
+          </a:ln>
+        </p:spPr>
+        <p:txBody>
+          <a:bodyPr xmlns:a="http://schemas.openxmlformats.org/drawingml/2006/main" anchor="ctr"/>
+          <a:lstStyle xmlns:a="http://schemas.openxmlformats.org/drawingml/2006/main"/>
+          <a:p xmlns:a="http://schemas.openxmlformats.org/drawingml/2006/main">
+            <a:pPr algn="ctr"/>
+            <a:r>
+              <a:rPr lang="en-US" sz="1800" b="1">
+                <a:solidFill>
+                  <a:srgbClr val="F5F5F7"/>
+                </a:solidFill>
+                <a:latin typeface="Arial"/>
+                <a:ea typeface="Arial"/>
+              </a:rPr>
+              <a:t>4</a:t>
+            </a:r>
+          </a:p>
+          <a:p xmlns:a="http://schemas.openxmlformats.org/drawingml/2006/main">
+            <a:pPr algn="ctr"/>
+            <a:r>
+              <a:rPr lang="en-US" sz="1800" b="1">
+                <a:solidFill>
+                  <a:srgbClr val="F5F5F7"/>
+                </a:solidFill>
+                <a:latin typeface="Arial"/>
+                <a:ea typeface="Arial"/>
+              </a:rPr>
+              <a:t>Gate 3</a:t>
+            </a:r>
+          </a:p>
+          <a:p xmlns:a="http://schemas.openxmlformats.org/drawingml/2006/main">
+            <a:pPr algn="ctr"/>
+            <a:r>
+              <a:rPr lang="en-US" sz="1800" b="1">
+                <a:solidFill>
+                  <a:srgbClr val="F5F5F7"/>
+                </a:solidFill>
+                <a:latin typeface="Arial"/>
+                <a:ea typeface="Arial"/>
+              </a:rPr>
+              <a:t>Sheet</a:t>
+            </a:r>
+          </a:p>
+        </p:txBody>
+      </p:sp>
+      <p:sp>
+        <p:nvSpPr>
+          <p:cNvPr id="100088" name="Stair5"/>
+          <p:cNvSpPr/>
+          <p:nvPr/>
+        </p:nvSpPr>
+        <p:spPr>
+          <a:xfrm xmlns:a="http://schemas.openxmlformats.org/drawingml/2006/main">
+            <a:off x="9316800" y="1436400"/>
+            <a:ext cx="2048400" cy="3816000"/>
           </a:xfrm>
           <a:prstGeom xmlns:a="http://schemas.openxmlformats.org/drawingml/2006/main" prst="roundRect">
             <a:avLst/>
@@ -1109,7 +1492,33 @@
                 <a:latin typeface="Arial"/>
                 <a:ea typeface="Arial"/>
               </a:rPr>
-              <a:t>doctor --ensure</a:t>
+              <a:t>5</a:t>
+            </a:r>
+          </a:p>
+          <a:p xmlns:a="http://schemas.openxmlformats.org/drawingml/2006/main">
+            <a:pPr algn="ctr"/>
+            <a:r>
+              <a:rPr lang="en-US" sz="1800" b="1">
+                <a:solidFill>
+                  <a:srgbClr val="FFFFFF"/>
+                </a:solidFill>
+                <a:latin typeface="Arial"/>
+                <a:ea typeface="Arial"/>
+              </a:rPr>
+              <a:t>Ship</a:t>
+            </a:r>
+          </a:p>
+          <a:p xmlns:a="http://schemas.openxmlformats.org/drawingml/2006/main">
+            <a:pPr algn="ctr"/>
+            <a:r>
+              <a:rPr lang="en-US" sz="1800" b="1">
+                <a:solidFill>
+                  <a:srgbClr val="FFFFFF"/>
+                </a:solidFill>
+                <a:latin typeface="Arial"/>
+                <a:ea typeface="Arial"/>
+              </a:rPr>
+              <a:t>Human</a:t>
             </a:r>
           </a:p>
         </p:txBody>
@@ -1149,7 +1558,7 @@
                                       <p:cBhvr>
                                         <p:cTn id="6" dur="500"/>
                                         <p:tgtEl>
-                                          <p:spTgt spid="100061"/>
+                                          <p:spTgt spid="100083"/>
                                         </p:tgtEl>
                                       </p:cBhvr>
                                     </p:animEffect>
@@ -1166,7 +1575,7 @@
                                       <p:cBhvr>
                                         <p:cTn id="8" dur="500"/>
                                         <p:tgtEl>
-                                          <p:spTgt spid="100062"/>
+                                          <p:spTgt spid="100084"/>
                                         </p:tgtEl>
                                       </p:cBhvr>
                                     </p:animEffect>
@@ -1183,7 +1592,585 @@
                                       <p:cBhvr>
                                         <p:cTn id="10" dur="500"/>
                                         <p:tgtEl>
-                                          <p:spTgt spid="100063"/>
+                                          <p:spTgt spid="100085"/>
+                                        </p:tgtEl>
+                                      </p:cBhvr>
+                                    </p:animEffect>
+                                  </p:childTnLst>
+                                </p:cTn>
+                              </p:par>
+                            </p:childTnLst>
+                          </p:cTn>
+                        </p:par>
+                      </p:childTnLst>
+                    </p:cTn>
+                  </p:par>
+                </p:childTnLst>
+              </p:cTn>
+              <p:prevCondLst>
+                <p:cond evt="onPrev" delay="0">
+                  <p:tgtEl>
+                    <p:sldTgt/>
+                  </p:tgtEl>
+                </p:cond>
+              </p:prevCondLst>
+              <p:nextCondLst>
+                <p:cond evt="onNext" delay="0">
+                  <p:tgtEl>
+                    <p:sldTgt/>
+                  </p:tgtEl>
+                </p:cond>
+              </p:nextCondLst>
+            </p:seq>
+          </p:childTnLst>
+        </p:cTn>
+      </p:par>
+    </p:tnLst>
+  </p:timing>
+</p:sld>
+</file>
+
+<file path=ppt/slides/slide11.xml><?xml version="1.0" encoding="utf-8"?>
+<p:sld xmlns:p="http://schemas.openxmlformats.org/presentationml/2006/main">
+  <p:cSld>
+    <p:bg>
+      <p:bgPr>
+        <a:solidFill xmlns:a="http://schemas.openxmlformats.org/drawingml/2006/main">
+          <a:srgbClr val="000000"/>
+        </a:solidFill>
+      </p:bgPr>
+    </p:bg>
+    <p:spTree>
+      <p:nvGrpSpPr>
+        <p:cNvPr id="1" name=""/>
+        <p:cNvGrpSpPr/>
+        <p:nvPr/>
+      </p:nvGrpSpPr>
+      <p:grpSpPr/>
+      <p:sp>
+        <p:nvSpPr>
+          <p:cNvPr id="100089" name="CheckTitle"/>
+          <p:cNvSpPr txBox="1"/>
+          <p:nvPr/>
+        </p:nvSpPr>
+        <p:spPr>
+          <a:xfrm xmlns:a="http://schemas.openxmlformats.org/drawingml/2006/main">
+            <a:off x="792000" y="435600"/>
+            <a:ext cx="10609200" cy="558000"/>
+          </a:xfrm>
+          <a:prstGeom xmlns:a="http://schemas.openxmlformats.org/drawingml/2006/main" prst="rect">
+            <a:avLst/>
+          </a:prstGeom>
+          <a:noFill xmlns:a="http://schemas.openxmlformats.org/drawingml/2006/main"/>
+        </p:spPr>
+        <p:txBody>
+          <a:bodyPr xmlns:a="http://schemas.openxmlformats.org/drawingml/2006/main"/>
+          <a:lstStyle xmlns:a="http://schemas.openxmlformats.org/drawingml/2006/main"/>
+          <a:p xmlns:a="http://schemas.openxmlformats.org/drawingml/2006/main">
+            <a:r>
+              <a:rPr lang="en-US" sz="3600" b="1">
+                <a:solidFill>
+                  <a:srgbClr val="F5F5F7"/>
+                </a:solidFill>
+                <a:latin typeface="Arial"/>
+                <a:ea typeface="Arial"/>
+              </a:rPr>
+              <a:t>Hard rules</a:t>
+            </a:r>
+          </a:p>
+        </p:txBody>
+      </p:sp>
+      <p:sp>
+        <p:nvSpPr>
+          <p:cNvPr id="100090" name="CheckRow1"/>
+          <p:cNvSpPr/>
+          <p:nvPr/>
+        </p:nvSpPr>
+        <p:spPr>
+          <a:xfrm xmlns:a="http://schemas.openxmlformats.org/drawingml/2006/main">
+            <a:off x="792000" y="1533600"/>
+            <a:ext cx="10609200" cy="651600"/>
+          </a:xfrm>
+          <a:prstGeom xmlns:a="http://schemas.openxmlformats.org/drawingml/2006/main" prst="roundRect">
+            <a:avLst/>
+          </a:prstGeom>
+          <a:solidFill xmlns:a="http://schemas.openxmlformats.org/drawingml/2006/main">
+            <a:srgbClr val="1C1C1E"/>
+          </a:solidFill>
+          <a:ln xmlns:a="http://schemas.openxmlformats.org/drawingml/2006/main">
+            <a:noFill/>
+          </a:ln>
+        </p:spPr>
+        <p:txBody>
+          <a:bodyPr xmlns:a="http://schemas.openxmlformats.org/drawingml/2006/main" anchor="ctr"/>
+          <a:lstStyle xmlns:a="http://schemas.openxmlformats.org/drawingml/2006/main"/>
+          <a:p xmlns:a="http://schemas.openxmlformats.org/drawingml/2006/main">
+            <a:r>
+              <a:rPr lang="en-US" sz="1800" b="0">
+                <a:solidFill>
+                  <a:srgbClr val="F5F5F7"/>
+                </a:solidFill>
+                <a:latin typeface="Arial"/>
+                <a:ea typeface="Arial"/>
+              </a:rPr>
+              <a:t>✓  Title ≥ 36pt · body ≥ 18pt</a:t>
+            </a:r>
+          </a:p>
+        </p:txBody>
+      </p:sp>
+      <p:sp>
+        <p:nvSpPr>
+          <p:cNvPr id="100091" name="CheckRow2"/>
+          <p:cNvSpPr/>
+          <p:nvPr/>
+        </p:nvSpPr>
+        <p:spPr>
+          <a:xfrm xmlns:a="http://schemas.openxmlformats.org/drawingml/2006/main">
+            <a:off x="792000" y="2250000"/>
+            <a:ext cx="10609200" cy="651600"/>
+          </a:xfrm>
+          <a:prstGeom xmlns:a="http://schemas.openxmlformats.org/drawingml/2006/main" prst="roundRect">
+            <a:avLst/>
+          </a:prstGeom>
+          <a:solidFill xmlns:a="http://schemas.openxmlformats.org/drawingml/2006/main">
+            <a:srgbClr val="1C1C1E"/>
+          </a:solidFill>
+          <a:ln xmlns:a="http://schemas.openxmlformats.org/drawingml/2006/main">
+            <a:noFill/>
+          </a:ln>
+        </p:spPr>
+        <p:txBody>
+          <a:bodyPr xmlns:a="http://schemas.openxmlformats.org/drawingml/2006/main" anchor="ctr"/>
+          <a:lstStyle xmlns:a="http://schemas.openxmlformats.org/drawingml/2006/main"/>
+          <a:p xmlns:a="http://schemas.openxmlformats.org/drawingml/2006/main">
+            <a:r>
+              <a:rPr lang="en-US" sz="1800" b="0">
+                <a:solidFill>
+                  <a:srgbClr val="F5F5F7"/>
+                </a:solidFill>
+                <a:latin typeface="Arial"/>
+                <a:ea typeface="Arial"/>
+              </a:rPr>
+              <a:t>✓  Never shrink fonts to fit</a:t>
+            </a:r>
+          </a:p>
+        </p:txBody>
+      </p:sp>
+      <p:sp>
+        <p:nvSpPr>
+          <p:cNvPr id="100092" name="CheckRow3"/>
+          <p:cNvSpPr/>
+          <p:nvPr/>
+        </p:nvSpPr>
+        <p:spPr>
+          <a:xfrm xmlns:a="http://schemas.openxmlformats.org/drawingml/2006/main">
+            <a:off x="792000" y="2962800"/>
+            <a:ext cx="10609200" cy="651600"/>
+          </a:xfrm>
+          <a:prstGeom xmlns:a="http://schemas.openxmlformats.org/drawingml/2006/main" prst="roundRect">
+            <a:avLst/>
+          </a:prstGeom>
+          <a:solidFill xmlns:a="http://schemas.openxmlformats.org/drawingml/2006/main">
+            <a:srgbClr val="1C1C1E"/>
+          </a:solidFill>
+          <a:ln xmlns:a="http://schemas.openxmlformats.org/drawingml/2006/main">
+            <a:noFill/>
+          </a:ln>
+        </p:spPr>
+        <p:txBody>
+          <a:bodyPr xmlns:a="http://schemas.openxmlformats.org/drawingml/2006/main" anchor="ctr"/>
+          <a:lstStyle xmlns:a="http://schemas.openxmlformats.org/drawingml/2006/main"/>
+          <a:p xmlns:a="http://schemas.openxmlformats.org/drawingml/2006/main">
+            <a:r>
+              <a:rPr lang="en-US" sz="1800" b="0">
+                <a:solidFill>
+                  <a:srgbClr val="F5F5F7"/>
+                </a:solidFill>
+                <a:latin typeface="Arial"/>
+                <a:ea typeface="Arial"/>
+              </a:rPr>
+              <a:t>✓  Body height follows content</a:t>
+            </a:r>
+          </a:p>
+        </p:txBody>
+      </p:sp>
+      <p:sp>
+        <p:nvSpPr>
+          <p:cNvPr id="100093" name="CheckRow4"/>
+          <p:cNvSpPr/>
+          <p:nvPr/>
+        </p:nvSpPr>
+        <p:spPr>
+          <a:xfrm xmlns:a="http://schemas.openxmlformats.org/drawingml/2006/main">
+            <a:off x="792000" y="3679200"/>
+            <a:ext cx="10609200" cy="651600"/>
+          </a:xfrm>
+          <a:prstGeom xmlns:a="http://schemas.openxmlformats.org/drawingml/2006/main" prst="roundRect">
+            <a:avLst/>
+          </a:prstGeom>
+          <a:solidFill xmlns:a="http://schemas.openxmlformats.org/drawingml/2006/main">
+            <a:srgbClr val="1C1C1E"/>
+          </a:solidFill>
+          <a:ln xmlns:a="http://schemas.openxmlformats.org/drawingml/2006/main">
+            <a:noFill/>
+          </a:ln>
+        </p:spPr>
+        <p:txBody>
+          <a:bodyPr xmlns:a="http://schemas.openxmlformats.org/drawingml/2006/main" anchor="ctr"/>
+          <a:lstStyle xmlns:a="http://schemas.openxmlformats.org/drawingml/2006/main"/>
+          <a:p xmlns:a="http://schemas.openxmlformats.org/drawingml/2006/main">
+            <a:r>
+              <a:rPr lang="en-US" sz="1800" b="0">
+                <a:solidFill>
+                  <a:srgbClr val="F5F5F7"/>
+                </a:solidFill>
+                <a:latin typeface="Arial"/>
+                <a:ea typeface="Arial"/>
+              </a:rPr>
+              <a:t>✓  No vendor shapes or icons</a:t>
+            </a:r>
+          </a:p>
+        </p:txBody>
+      </p:sp>
+      <p:sp>
+        <p:nvSpPr>
+          <p:cNvPr id="100094" name="CheckRow5"/>
+          <p:cNvSpPr/>
+          <p:nvPr/>
+        </p:nvSpPr>
+        <p:spPr>
+          <a:xfrm xmlns:a="http://schemas.openxmlformats.org/drawingml/2006/main">
+            <a:off x="792000" y="4395600"/>
+            <a:ext cx="10609200" cy="651600"/>
+          </a:xfrm>
+          <a:prstGeom xmlns:a="http://schemas.openxmlformats.org/drawingml/2006/main" prst="roundRect">
+            <a:avLst/>
+          </a:prstGeom>
+          <a:solidFill xmlns:a="http://schemas.openxmlformats.org/drawingml/2006/main">
+            <a:srgbClr val="1C1C1E"/>
+          </a:solidFill>
+          <a:ln xmlns:a="http://schemas.openxmlformats.org/drawingml/2006/main">
+            <a:noFill/>
+          </a:ln>
+        </p:spPr>
+        <p:txBody>
+          <a:bodyPr xmlns:a="http://schemas.openxmlformats.org/drawingml/2006/main" anchor="ctr"/>
+          <a:lstStyle xmlns:a="http://schemas.openxmlformats.org/drawingml/2006/main"/>
+          <a:p xmlns:a="http://schemas.openxmlformats.org/drawingml/2006/main">
+            <a:r>
+              <a:rPr lang="en-US" sz="1800" b="0">
+                <a:solidFill>
+                  <a:srgbClr val="F5F5F7"/>
+                </a:solidFill>
+                <a:latin typeface="Arial"/>
+                <a:ea typeface="Arial"/>
+              </a:rPr>
+              <a:t>✓  Finish apply with --screenshot</a:t>
+            </a:r>
+          </a:p>
+        </p:txBody>
+      </p:sp>
+    </p:spTree>
+  </p:cSld>
+  <p:transition spd="med">
+    <p:fade/>
+  </p:transition>
+  <p:timing>
+    <p:tnLst>
+      <p:par>
+        <p:cTn id="1" dur="indefinite" restart="never" nodeType="tmRoot">
+          <p:childTnLst>
+            <p:seq concurrent="1" nextAc="seek">
+              <p:cTn id="2" dur="indefinite" nodeType="mainSeq">
+                <p:childTnLst>
+                  <p:par>
+                    <p:cTn id="3" fill="hold">
+                      <p:stCondLst>
+                        <p:cond delay="indefinite"/>
+                      </p:stCondLst>
+                      <p:childTnLst>
+                        <p:par>
+                          <p:cTn id="4" fill="hold">
+                            <p:stCondLst>
+                              <p:cond delay="0"/>
+                            </p:stCondLst>
+                            <p:childTnLst>
+                              <p:par>
+                                <p:cTn id="5" presetID="10" presetClass="entr" presetSubtype="0" fill="hold" grpId="0" nodeType="clickEffect">
+                                  <p:stCondLst>
+                                    <p:cond delay="0"/>
+                                  </p:stCondLst>
+                                  <p:childTnLst>
+                                    <p:animEffect transition="in" filter="fade">
+                                      <p:cBhvr>
+                                        <p:cTn id="6" dur="500"/>
+                                        <p:tgtEl>
+                                          <p:spTgt spid="100089"/>
+                                        </p:tgtEl>
+                                      </p:cBhvr>
+                                    </p:animEffect>
+                                  </p:childTnLst>
+                                </p:cTn>
+                              </p:par>
+                              <p:par>
+                                <p:cTn id="7" presetID="10" presetClass="entr" presetSubtype="0" fill="hold" grpId="0" nodeType="afterEffect">
+                                  <p:stCondLst>
+                                    <p:cond delay="150"/>
+                                  </p:stCondLst>
+                                  <p:childTnLst>
+                                    <p:animEffect transition="in" filter="fade">
+                                      <p:cBhvr>
+                                        <p:cTn id="8" dur="500"/>
+                                        <p:tgtEl>
+                                          <p:spTgt spid="100090"/>
+                                        </p:tgtEl>
+                                      </p:cBhvr>
+                                    </p:animEffect>
+                                  </p:childTnLst>
+                                </p:cTn>
+                              </p:par>
+                              <p:par>
+                                <p:cTn id="9" presetID="10" presetClass="entr" presetSubtype="0" fill="hold" grpId="0" nodeType="afterEffect">
+                                  <p:stCondLst>
+                                    <p:cond delay="300"/>
+                                  </p:stCondLst>
+                                  <p:childTnLst>
+                                    <p:animEffect transition="in" filter="fade">
+                                      <p:cBhvr>
+                                        <p:cTn id="10" dur="500"/>
+                                        <p:tgtEl>
+                                          <p:spTgt spid="100091"/>
+                                        </p:tgtEl>
+                                      </p:cBhvr>
+                                    </p:animEffect>
+                                  </p:childTnLst>
+                                </p:cTn>
+                              </p:par>
+                            </p:childTnLst>
+                          </p:cTn>
+                        </p:par>
+                      </p:childTnLst>
+                    </p:cTn>
+                  </p:par>
+                </p:childTnLst>
+              </p:cTn>
+              <p:prevCondLst>
+                <p:cond evt="onPrev" delay="0">
+                  <p:tgtEl>
+                    <p:sldTgt/>
+                  </p:tgtEl>
+                </p:cond>
+              </p:prevCondLst>
+              <p:nextCondLst>
+                <p:cond evt="onNext" delay="0">
+                  <p:tgtEl>
+                    <p:sldTgt/>
+                  </p:tgtEl>
+                </p:cond>
+              </p:nextCondLst>
+            </p:seq>
+          </p:childTnLst>
+        </p:cTn>
+      </p:par>
+    </p:tnLst>
+  </p:timing>
+</p:sld>
+</file>
+
+<file path=ppt/slides/slide12.xml><?xml version="1.0" encoding="utf-8"?>
+<p:sld xmlns:p="http://schemas.openxmlformats.org/presentationml/2006/main">
+  <p:cSld>
+    <p:bg>
+      <p:bgPr>
+        <a:solidFill xmlns:a="http://schemas.openxmlformats.org/drawingml/2006/main">
+          <a:srgbClr val="000000"/>
+        </a:solidFill>
+      </p:bgPr>
+    </p:bg>
+    <p:spTree>
+      <p:nvGrpSpPr>
+        <p:cNvPr id="1" name=""/>
+        <p:cNvGrpSpPr/>
+        <p:nvPr/>
+      </p:nvGrpSpPr>
+      <p:grpSpPr/>
+      <p:sp>
+        <p:nvSpPr>
+          <p:cNvPr id="100095" name="CloseTitle"/>
+          <p:cNvSpPr txBox="1"/>
+          <p:nvPr/>
+        </p:nvSpPr>
+        <p:spPr>
+          <a:xfrm xmlns:a="http://schemas.openxmlformats.org/drawingml/2006/main">
+            <a:off x="792000" y="1796400"/>
+            <a:ext cx="10609200" cy="936000"/>
+          </a:xfrm>
+          <a:prstGeom xmlns:a="http://schemas.openxmlformats.org/drawingml/2006/main" prst="rect">
+            <a:avLst/>
+          </a:prstGeom>
+          <a:noFill xmlns:a="http://schemas.openxmlformats.org/drawingml/2006/main"/>
+        </p:spPr>
+        <p:txBody>
+          <a:bodyPr xmlns:a="http://schemas.openxmlformats.org/drawingml/2006/main"/>
+          <a:lstStyle xmlns:a="http://schemas.openxmlformats.org/drawingml/2006/main"/>
+          <a:p xmlns:a="http://schemas.openxmlformats.org/drawingml/2006/main">
+            <a:pPr algn="ctr"/>
+            <a:r>
+              <a:rPr lang="en-US" sz="4400" b="1">
+                <a:solidFill>
+                  <a:srgbClr val="F5F5F7"/>
+                </a:solidFill>
+                <a:latin typeface="Arial"/>
+                <a:ea typeface="Arial"/>
+              </a:rPr>
+              <a:t>Start with the brand file</a:t>
+            </a:r>
+          </a:p>
+        </p:txBody>
+      </p:sp>
+      <p:sp>
+        <p:nvSpPr>
+          <p:cNvPr id="100096" name="CloseBody"/>
+          <p:cNvSpPr txBox="1"/>
+          <p:nvPr/>
+        </p:nvSpPr>
+        <p:spPr>
+          <a:xfrm xmlns:a="http://schemas.openxmlformats.org/drawingml/2006/main">
+            <a:off x="1188000" y="2952000"/>
+            <a:ext cx="9817200" cy="720000"/>
+          </a:xfrm>
+          <a:prstGeom xmlns:a="http://schemas.openxmlformats.org/drawingml/2006/main" prst="rect">
+            <a:avLst/>
+          </a:prstGeom>
+          <a:noFill xmlns:a="http://schemas.openxmlformats.org/drawingml/2006/main"/>
+        </p:spPr>
+        <p:txBody>
+          <a:bodyPr xmlns:a="http://schemas.openxmlformats.org/drawingml/2006/main"/>
+          <a:lstStyle xmlns:a="http://schemas.openxmlformats.org/drawingml/2006/main"/>
+          <a:p xmlns:a="http://schemas.openxmlformats.org/drawingml/2006/main">
+            <a:pPr algn="ctr"/>
+            <a:r>
+              <a:rPr lang="en-US" sz="1800">
+                <a:solidFill>
+                  <a:srgbClr val="A0A6B0"/>
+                </a:solidFill>
+                <a:latin typeface="Arial"/>
+                <a:ea typeface="Arial"/>
+              </a:rPr>
+              <a:t>doctor --ensure · compose · scaffold · apply --screenshot</a:t>
+            </a:r>
+          </a:p>
+        </p:txBody>
+      </p:sp>
+      <p:sp>
+        <p:nvSpPr>
+          <p:cNvPr id="100097" name="CloseCta"/>
+          <p:cNvSpPr/>
+          <p:nvPr/>
+        </p:nvSpPr>
+        <p:spPr>
+          <a:xfrm xmlns:a="http://schemas.openxmlformats.org/drawingml/2006/main">
+            <a:off x="4294800" y="4068000"/>
+            <a:ext cx="3600000" cy="612000"/>
+          </a:xfrm>
+          <a:prstGeom xmlns:a="http://schemas.openxmlformats.org/drawingml/2006/main" prst="roundRect">
+            <a:avLst/>
+          </a:prstGeom>
+          <a:solidFill xmlns:a="http://schemas.openxmlformats.org/drawingml/2006/main">
+            <a:srgbClr val="0B5FFF"/>
+          </a:solidFill>
+          <a:ln xmlns:a="http://schemas.openxmlformats.org/drawingml/2006/main">
+            <a:noFill/>
+          </a:ln>
+        </p:spPr>
+        <p:txBody>
+          <a:bodyPr xmlns:a="http://schemas.openxmlformats.org/drawingml/2006/main" anchor="ctr"/>
+          <a:lstStyle xmlns:a="http://schemas.openxmlformats.org/drawingml/2006/main"/>
+          <a:p xmlns:a="http://schemas.openxmlformats.org/drawingml/2006/main">
+            <a:pPr algn="ctr"/>
+            <a:r>
+              <a:rPr lang="en-US" sz="1800" b="1">
+                <a:solidFill>
+                  <a:srgbClr val="FFFFFF"/>
+                </a:solidFill>
+                <a:latin typeface="Arial"/>
+                <a:ea typeface="Arial"/>
+              </a:rPr>
+              <a:t>doctor --ensure</a:t>
+            </a:r>
+          </a:p>
+        </p:txBody>
+      </p:sp>
+    </p:spTree>
+  </p:cSld>
+  <p:transition spd="med">
+    <p:fade/>
+  </p:transition>
+  <p:timing>
+    <p:tnLst>
+      <p:par>
+        <p:cTn id="1" dur="indefinite" restart="never" nodeType="tmRoot">
+          <p:childTnLst>
+            <p:seq concurrent="1" nextAc="seek">
+              <p:cTn id="2" dur="indefinite" nodeType="mainSeq">
+                <p:childTnLst>
+                  <p:par>
+                    <p:cTn id="3" fill="hold">
+                      <p:stCondLst>
+                        <p:cond delay="indefinite"/>
+                      </p:stCondLst>
+                      <p:childTnLst>
+                        <p:par>
+                          <p:cTn id="4" fill="hold">
+                            <p:stCondLst>
+                              <p:cond delay="0"/>
+                            </p:stCondLst>
+                            <p:childTnLst>
+                              <p:par>
+                                <p:cTn id="5" presetID="10" presetClass="entr" presetSubtype="0" fill="hold" grpId="0" nodeType="clickEffect">
+                                  <p:stCondLst>
+                                    <p:cond delay="0"/>
+                                  </p:stCondLst>
+                                  <p:childTnLst>
+                                    <p:animEffect transition="in" filter="fade">
+                                      <p:cBhvr>
+                                        <p:cTn id="6" dur="500"/>
+                                        <p:tgtEl>
+                                          <p:spTgt spid="100095"/>
+                                        </p:tgtEl>
+                                      </p:cBhvr>
+                                    </p:animEffect>
+                                  </p:childTnLst>
+                                </p:cTn>
+                              </p:par>
+                              <p:par>
+                                <p:cTn id="7" presetID="10" presetClass="entr" presetSubtype="0" fill="hold" grpId="0" nodeType="afterEffect">
+                                  <p:stCondLst>
+                                    <p:cond delay="150"/>
+                                  </p:stCondLst>
+                                  <p:childTnLst>
+                                    <p:animEffect transition="in" filter="fade">
+                                      <p:cBhvr>
+                                        <p:cTn id="8" dur="500"/>
+                                        <p:tgtEl>
+                                          <p:spTgt spid="100096"/>
+                                        </p:tgtEl>
+                                      </p:cBhvr>
+                                    </p:animEffect>
+                                  </p:childTnLst>
+                                </p:cTn>
+                              </p:par>
+                              <p:par>
+                                <p:cTn id="9" presetID="10" presetClass="entr" presetSubtype="0" fill="hold" grpId="0" nodeType="afterEffect">
+                                  <p:stCondLst>
+                                    <p:cond delay="300"/>
+                                  </p:stCondLst>
+                                  <p:childTnLst>
+                                    <p:animEffect transition="in" filter="fade">
+                                      <p:cBhvr>
+                                        <p:cTn id="10" dur="500"/>
+                                        <p:tgtEl>
+                                          <p:spTgt spid="100097"/>
                                         </p:tgtEl>
                                       </p:cBhvr>
                                     </p:animEffect>
@@ -1240,14 +2227,41 @@
       <p:grpSpPr/>
       <p:sp>
         <p:nvSpPr>
-          <p:cNvPr id="100005" name="BigValue"/>
+          <p:cNvPr id="100005" name="OpenerAccentBar"/>
+          <p:cNvSpPr/>
+          <p:nvPr/>
+        </p:nvSpPr>
+        <p:spPr>
+          <a:xfrm xmlns:a="http://schemas.openxmlformats.org/drawingml/2006/main">
+            <a:off x="792000" y="2232000"/>
+            <a:ext cx="396000" cy="2232000"/>
+          </a:xfrm>
+          <a:prstGeom xmlns:a="http://schemas.openxmlformats.org/drawingml/2006/main" prst="rect">
+            <a:avLst/>
+          </a:prstGeom>
+          <a:solidFill xmlns:a="http://schemas.openxmlformats.org/drawingml/2006/main">
+            <a:srgbClr val="0B5FFF"/>
+          </a:solidFill>
+          <a:ln xmlns:a="http://schemas.openxmlformats.org/drawingml/2006/main">
+            <a:noFill/>
+          </a:ln>
+        </p:spPr>
+        <p:txBody>
+          <a:bodyPr xmlns:a="http://schemas.openxmlformats.org/drawingml/2006/main"/>
+          <a:lstStyle xmlns:a="http://schemas.openxmlformats.org/drawingml/2006/main"/>
+          <a:p xmlns:a="http://schemas.openxmlformats.org/drawingml/2006/main"/>
+        </p:txBody>
+      </p:sp>
+      <p:sp>
+        <p:nvSpPr>
+          <p:cNvPr id="100006" name="OpenerNumber"/>
           <p:cNvSpPr txBox="1"/>
           <p:nvPr/>
         </p:nvSpPr>
         <p:spPr>
           <a:xfrm xmlns:a="http://schemas.openxmlformats.org/drawingml/2006/main">
-            <a:off x="792000" y="1180800"/>
-            <a:ext cx="10609200" cy="2304000"/>
+            <a:off x="1368000" y="2016000"/>
+            <a:ext cx="2880000" cy="864000"/>
           </a:xfrm>
           <a:prstGeom xmlns:a="http://schemas.openxmlformats.org/drawingml/2006/main" prst="rect">
             <a:avLst/>
@@ -1255,33 +2269,32 @@
           <a:noFill xmlns:a="http://schemas.openxmlformats.org/drawingml/2006/main"/>
         </p:spPr>
         <p:txBody>
-          <a:bodyPr xmlns:a="http://schemas.openxmlformats.org/drawingml/2006/main" anchor="ctr"/>
-          <a:lstStyle xmlns:a="http://schemas.openxmlformats.org/drawingml/2006/main"/>
-          <a:p xmlns:a="http://schemas.openxmlformats.org/drawingml/2006/main">
-            <a:pPr algn="ctr"/>
-            <a:r>
-              <a:rPr lang="en-US" sz="8100" b="1">
+          <a:bodyPr xmlns:a="http://schemas.openxmlformats.org/drawingml/2006/main"/>
+          <a:lstStyle xmlns:a="http://schemas.openxmlformats.org/drawingml/2006/main"/>
+          <a:p xmlns:a="http://schemas.openxmlformats.org/drawingml/2006/main">
+            <a:r>
+              <a:rPr lang="en-US" sz="5400" b="1">
                 <a:solidFill>
                   <a:srgbClr val="0B5FFF"/>
                 </a:solidFill>
                 <a:latin typeface="Arial"/>
                 <a:ea typeface="Arial"/>
               </a:rPr>
-              <a:t>DESIGN.md</a:t>
-            </a:r>
-          </a:p>
-        </p:txBody>
-      </p:sp>
-      <p:sp>
-        <p:nvSpPr>
-          <p:cNvPr id="100006" name="BigLabel"/>
+              <a:t>01</a:t>
+            </a:r>
+          </a:p>
+        </p:txBody>
+      </p:sp>
+      <p:sp>
+        <p:nvSpPr>
+          <p:cNvPr id="100007" name="OpenerTitle"/>
           <p:cNvSpPr txBox="1"/>
           <p:nvPr/>
         </p:nvSpPr>
         <p:spPr>
           <a:xfrm xmlns:a="http://schemas.openxmlformats.org/drawingml/2006/main">
-            <a:off x="792000" y="3704400"/>
-            <a:ext cx="10609200" cy="612000"/>
+            <a:off x="1368000" y="2952000"/>
+            <a:ext cx="10033200" cy="936000"/>
           </a:xfrm>
           <a:prstGeom xmlns:a="http://schemas.openxmlformats.org/drawingml/2006/main" prst="rect">
             <a:avLst/>
@@ -1292,30 +2305,29 @@
           <a:bodyPr xmlns:a="http://schemas.openxmlformats.org/drawingml/2006/main"/>
           <a:lstStyle xmlns:a="http://schemas.openxmlformats.org/drawingml/2006/main"/>
           <a:p xmlns:a="http://schemas.openxmlformats.org/drawingml/2006/main">
-            <a:pPr algn="ctr"/>
-            <a:r>
-              <a:rPr lang="en-US" sz="2800" b="1">
+            <a:r>
+              <a:rPr lang="en-US" sz="3600" b="1">
                 <a:solidFill>
                   <a:srgbClr val="F5F5F7"/>
                 </a:solidFill>
                 <a:latin typeface="Arial"/>
                 <a:ea typeface="Arial"/>
               </a:rPr>
-              <a:t>The brand is the contract</a:t>
-            </a:r>
-          </a:p>
-        </p:txBody>
-      </p:sp>
-      <p:sp>
-        <p:nvSpPr>
-          <p:cNvPr id="100007" name="BigContext"/>
+              <a:t>The contract</a:t>
+            </a:r>
+          </a:p>
+        </p:txBody>
+      </p:sp>
+      <p:sp>
+        <p:nvSpPr>
+          <p:cNvPr id="100008" name="OpenerBlurb"/>
           <p:cNvSpPr txBox="1"/>
           <p:nvPr/>
         </p:nvSpPr>
         <p:spPr>
           <a:xfrm xmlns:a="http://schemas.openxmlformats.org/drawingml/2006/main">
-            <a:off x="1188000" y="4514400"/>
-            <a:ext cx="9817200" cy="792000"/>
+            <a:off x="1368000" y="3960000"/>
+            <a:ext cx="7920000" cy="792000"/>
           </a:xfrm>
           <a:prstGeom xmlns:a="http://schemas.openxmlformats.org/drawingml/2006/main" prst="rect">
             <a:avLst/>
@@ -1326,7 +2338,6 @@
           <a:bodyPr xmlns:a="http://schemas.openxmlformats.org/drawingml/2006/main"/>
           <a:lstStyle xmlns:a="http://schemas.openxmlformats.org/drawingml/2006/main"/>
           <a:p xmlns:a="http://schemas.openxmlformats.org/drawingml/2006/main">
-            <a:pPr algn="ctr"/>
             <a:r>
               <a:rPr lang="en-US" sz="1800">
                 <a:solidFill>
@@ -1335,7 +2346,7 @@
                 <a:latin typeface="Arial"/>
                 <a:ea typeface="Arial"/>
               </a:rPr>
-              <a:t>Tokens, recipes, staging-safe apply — not a blank slide and a prayer.</a:t>
+              <a:t>Brand lives in DESIGN.md. Motifs carry layout chrome.</a:t>
             </a:r>
           </a:p>
         </p:txBody>
@@ -1466,14 +2477,14 @@
       <p:grpSpPr/>
       <p:sp>
         <p:nvSpPr>
-          <p:cNvPr id="100008" name="BaTitle"/>
+          <p:cNvPr id="100009" name="KpiTitle"/>
           <p:cNvSpPr txBox="1"/>
           <p:nvPr/>
         </p:nvSpPr>
         <p:spPr>
           <a:xfrm xmlns:a="http://schemas.openxmlformats.org/drawingml/2006/main">
             <a:off x="792000" y="435600"/>
-            <a:ext cx="10609200" cy="558000"/>
+            <a:ext cx="10609200" cy="662400"/>
           </a:xfrm>
           <a:prstGeom xmlns:a="http://schemas.openxmlformats.org/drawingml/2006/main" prst="rect">
             <a:avLst/>
@@ -1492,21 +2503,21 @@
                 <a:latin typeface="Arial"/>
                 <a:ea typeface="Arial"/>
               </a:rPr>
-              <a:t>What changes</a:t>
-            </a:r>
-          </a:p>
-        </p:txBody>
-      </p:sp>
-      <p:sp>
-        <p:nvSpPr>
-          <p:cNvPr id="100009" name="BaPanel1"/>
+              <a:t>At a glance</a:t>
+            </a:r>
+          </a:p>
+        </p:txBody>
+      </p:sp>
+      <p:sp>
+        <p:nvSpPr>
+          <p:cNvPr id="100010" name="Kpi1Bg"/>
           <p:cNvSpPr/>
           <p:nvPr/>
         </p:nvSpPr>
         <p:spPr>
           <a:xfrm xmlns:a="http://schemas.openxmlformats.org/drawingml/2006/main">
-            <a:off x="792000" y="1980000"/>
-            <a:ext cx="5104800" cy="3020400"/>
+            <a:off x="792000" y="1414800"/>
+            <a:ext cx="2354400" cy="4651200"/>
           </a:xfrm>
           <a:prstGeom xmlns:a="http://schemas.openxmlformats.org/drawingml/2006/main" prst="roundRect">
             <a:avLst/>
@@ -1526,14 +2537,14 @@
       </p:sp>
       <p:sp>
         <p:nvSpPr>
-          <p:cNvPr id="100010" name="BaHead1"/>
+          <p:cNvPr id="100011" name="Kpi1Value"/>
           <p:cNvSpPr txBox="1"/>
           <p:nvPr/>
         </p:nvSpPr>
         <p:spPr>
           <a:xfrm xmlns:a="http://schemas.openxmlformats.org/drawingml/2006/main">
-            <a:off x="1188000" y="2376000"/>
-            <a:ext cx="4312800" cy="540000"/>
+            <a:off x="918000" y="2829600"/>
+            <a:ext cx="2102400" cy="1044000"/>
           </a:xfrm>
           <a:prstGeom xmlns:a="http://schemas.openxmlformats.org/drawingml/2006/main" prst="rect">
             <a:avLst/>
@@ -1544,29 +2555,30 @@
           <a:bodyPr xmlns:a="http://schemas.openxmlformats.org/drawingml/2006/main"/>
           <a:lstStyle xmlns:a="http://schemas.openxmlformats.org/drawingml/2006/main"/>
           <a:p xmlns:a="http://schemas.openxmlformats.org/drawingml/2006/main">
-            <a:r>
-              <a:rPr lang="en-US" sz="2800" b="1">
+            <a:pPr algn="ctr"/>
+            <a:r>
+              <a:rPr lang="en-US" sz="6000" b="1">
                 <a:solidFill>
                   <a:srgbClr val="F5F5F7"/>
                 </a:solidFill>
                 <a:latin typeface="Arial"/>
                 <a:ea typeface="Arial"/>
               </a:rPr>
-              <a:t>Before</a:t>
-            </a:r>
-          </a:p>
-        </p:txBody>
-      </p:sp>
-      <p:sp>
-        <p:nvSpPr>
-          <p:cNvPr id="100011" name="BaBody1"/>
+              <a:t>12</a:t>
+            </a:r>
+          </a:p>
+        </p:txBody>
+      </p:sp>
+      <p:sp>
+        <p:nvSpPr>
+          <p:cNvPr id="100012" name="Kpi1Label"/>
           <p:cNvSpPr txBox="1"/>
           <p:nvPr/>
         </p:nvSpPr>
         <p:spPr>
           <a:xfrm xmlns:a="http://schemas.openxmlformats.org/drawingml/2006/main">
-            <a:off x="1188000" y="3135600"/>
-            <a:ext cx="4312800" cy="1468800"/>
+            <a:off x="918000" y="3999600"/>
+            <a:ext cx="2102400" cy="306000"/>
           </a:xfrm>
           <a:prstGeom xmlns:a="http://schemas.openxmlformats.org/drawingml/2006/main" prst="rect">
             <a:avLst/>
@@ -1577,71 +2589,70 @@
           <a:bodyPr xmlns:a="http://schemas.openxmlformats.org/drawingml/2006/main"/>
           <a:lstStyle xmlns:a="http://schemas.openxmlformats.org/drawingml/2006/main"/>
           <a:p xmlns:a="http://schemas.openxmlformats.org/drawingml/2006/main">
-            <a:r>
-              <a:rPr lang="en-US" sz="1800">
+            <a:pPr algn="ctr"/>
+            <a:r>
+              <a:rPr lang="en-US" sz="1200">
                 <a:solidFill>
                   <a:srgbClr val="A0A6B0"/>
                 </a:solidFill>
                 <a:latin typeface="Arial"/>
                 <a:ea typeface="Arial"/>
               </a:rPr>
-              <a:t>• Decks drift from the brand file</a:t>
-            </a:r>
-          </a:p>
-          <a:p xmlns:a="http://schemas.openxmlformats.org/drawingml/2006/main">
-            <a:r>
-              <a:rPr lang="en-US" sz="1800">
-                <a:solidFill>
-                  <a:srgbClr val="A0A6B0"/>
-                </a:solidFill>
-                <a:latin typeface="Arial"/>
-                <a:ea typeface="Arial"/>
-              </a:rPr>
-              <a:t>• Agents invent one-off layouts</a:t>
-            </a:r>
-          </a:p>
-          <a:p xmlns:a="http://schemas.openxmlformats.org/drawingml/2006/main">
-            <a:r>
-              <a:rPr lang="en-US" sz="1800">
-                <a:solidFill>
-                  <a:srgbClr val="A0A6B0"/>
-                </a:solidFill>
-                <a:latin typeface="Arial"/>
-                <a:ea typeface="Arial"/>
-              </a:rPr>
-              <a:t>• No floors, no screenshot gate</a:t>
-            </a:r>
-          </a:p>
-          <a:p xmlns:a="http://schemas.openxmlformats.org/drawingml/2006/main">
-            <a:r>
-              <a:rPr lang="en-US" sz="1800">
-                <a:solidFill>
-                  <a:srgbClr val="A0A6B0"/>
-                </a:solidFill>
-                <a:latin typeface="Arial"/>
-                <a:ea typeface="Arial"/>
-              </a:rPr>
-              <a:t>• Overwrite risk on every save</a:t>
-            </a:r>
-          </a:p>
-        </p:txBody>
-      </p:sp>
-      <p:sp>
-        <p:nvSpPr>
-          <p:cNvPr id="100012" name="BaPanel2"/>
+              <a:t>Motifs</a:t>
+            </a:r>
+          </a:p>
+        </p:txBody>
+      </p:sp>
+      <p:sp>
+        <p:nvSpPr>
+          <p:cNvPr id="100013" name="Kpi1Chip"/>
+          <p:cNvSpPr txBox="1"/>
+          <p:nvPr/>
+        </p:nvSpPr>
+        <p:spPr>
+          <a:xfrm xmlns:a="http://schemas.openxmlformats.org/drawingml/2006/main">
+            <a:off x="918000" y="4431600"/>
+            <a:ext cx="2102400" cy="280800"/>
+          </a:xfrm>
+          <a:prstGeom xmlns:a="http://schemas.openxmlformats.org/drawingml/2006/main" prst="rect">
+            <a:avLst/>
+          </a:prstGeom>
+          <a:noFill xmlns:a="http://schemas.openxmlformats.org/drawingml/2006/main"/>
+        </p:spPr>
+        <p:txBody>
+          <a:bodyPr xmlns:a="http://schemas.openxmlformats.org/drawingml/2006/main"/>
+          <a:lstStyle xmlns:a="http://schemas.openxmlformats.org/drawingml/2006/main"/>
+          <a:p xmlns:a="http://schemas.openxmlformats.org/drawingml/2006/main">
+            <a:pPr algn="ctr"/>
+            <a:r>
+              <a:rPr lang="en-US" sz="1200" b="1">
+                <a:solidFill>
+                  <a:srgbClr val="0B5FFF"/>
+                </a:solidFill>
+                <a:latin typeface="Arial"/>
+                <a:ea typeface="Arial"/>
+              </a:rPr>
+              <a:t>v1</a:t>
+            </a:r>
+          </a:p>
+        </p:txBody>
+      </p:sp>
+      <p:sp>
+        <p:nvSpPr>
+          <p:cNvPr id="100014" name="Kpi2Bg"/>
           <p:cNvSpPr/>
           <p:nvPr/>
         </p:nvSpPr>
         <p:spPr>
           <a:xfrm xmlns:a="http://schemas.openxmlformats.org/drawingml/2006/main">
-            <a:off x="6292800" y="1980000"/>
-            <a:ext cx="5104800" cy="3020400"/>
+            <a:off x="3542400" y="1414800"/>
+            <a:ext cx="2354400" cy="4651200"/>
           </a:xfrm>
           <a:prstGeom xmlns:a="http://schemas.openxmlformats.org/drawingml/2006/main" prst="roundRect">
             <a:avLst/>
           </a:prstGeom>
           <a:solidFill xmlns:a="http://schemas.openxmlformats.org/drawingml/2006/main">
-            <a:srgbClr val="0B5FFF"/>
+            <a:srgbClr val="1C1C1E"/>
           </a:solidFill>
           <a:ln xmlns:a="http://schemas.openxmlformats.org/drawingml/2006/main">
             <a:noFill/>
@@ -1655,14 +2666,14 @@
       </p:sp>
       <p:sp>
         <p:nvSpPr>
-          <p:cNvPr id="100013" name="BaHead2"/>
+          <p:cNvPr id="100015" name="Kpi2Value"/>
           <p:cNvSpPr txBox="1"/>
           <p:nvPr/>
         </p:nvSpPr>
         <p:spPr>
           <a:xfrm xmlns:a="http://schemas.openxmlformats.org/drawingml/2006/main">
-            <a:off x="6692400" y="2376000"/>
-            <a:ext cx="4312800" cy="540000"/>
+            <a:off x="3668400" y="2829600"/>
+            <a:ext cx="2102400" cy="1044000"/>
           </a:xfrm>
           <a:prstGeom xmlns:a="http://schemas.openxmlformats.org/drawingml/2006/main" prst="rect">
             <a:avLst/>
@@ -1673,29 +2684,30 @@
           <a:bodyPr xmlns:a="http://schemas.openxmlformats.org/drawingml/2006/main"/>
           <a:lstStyle xmlns:a="http://schemas.openxmlformats.org/drawingml/2006/main"/>
           <a:p xmlns:a="http://schemas.openxmlformats.org/drawingml/2006/main">
-            <a:r>
-              <a:rPr lang="en-US" sz="2800" b="1">
-                <a:solidFill>
-                  <a:srgbClr val="FFFFFF"/>
-                </a:solidFill>
-                <a:latin typeface="Arial"/>
-                <a:ea typeface="Arial"/>
-              </a:rPr>
-              <a:t>After</a:t>
-            </a:r>
-          </a:p>
-        </p:txBody>
-      </p:sp>
-      <p:sp>
-        <p:nvSpPr>
-          <p:cNvPr id="100014" name="BaBody2"/>
+            <a:pPr algn="ctr"/>
+            <a:r>
+              <a:rPr lang="en-US" sz="6000" b="1">
+                <a:solidFill>
+                  <a:srgbClr val="F5F5F7"/>
+                </a:solidFill>
+                <a:latin typeface="Arial"/>
+                <a:ea typeface="Arial"/>
+              </a:rPr>
+              <a:t>75</a:t>
+            </a:r>
+          </a:p>
+        </p:txBody>
+      </p:sp>
+      <p:sp>
+        <p:nvSpPr>
+          <p:cNvPr id="100016" name="Kpi2Label"/>
           <p:cNvSpPr txBox="1"/>
           <p:nvPr/>
         </p:nvSpPr>
         <p:spPr>
           <a:xfrm xmlns:a="http://schemas.openxmlformats.org/drawingml/2006/main">
-            <a:off x="6692400" y="3135600"/>
-            <a:ext cx="4312800" cy="1468800"/>
+            <a:off x="3668400" y="3999600"/>
+            <a:ext cx="2102400" cy="306000"/>
           </a:xfrm>
           <a:prstGeom xmlns:a="http://schemas.openxmlformats.org/drawingml/2006/main" prst="rect">
             <a:avLst/>
@@ -1706,51 +2718,302 @@
           <a:bodyPr xmlns:a="http://schemas.openxmlformats.org/drawingml/2006/main"/>
           <a:lstStyle xmlns:a="http://schemas.openxmlformats.org/drawingml/2006/main"/>
           <a:p xmlns:a="http://schemas.openxmlformats.org/drawingml/2006/main">
-            <a:r>
-              <a:rPr lang="en-US" sz="1800">
-                <a:solidFill>
-                  <a:srgbClr val="FFFFFF"/>
-                </a:solidFill>
-                <a:latin typeface="Arial"/>
-                <a:ea typeface="Arial"/>
-              </a:rPr>
-              <a:t>• Tokens compiled from DESIGN.md</a:t>
-            </a:r>
-          </a:p>
-          <a:p xmlns:a="http://schemas.openxmlformats.org/drawingml/2006/main">
-            <a:r>
-              <a:rPr lang="en-US" sz="1800">
-                <a:solidFill>
-                  <a:srgbClr val="FFFFFF"/>
-                </a:solidFill>
-                <a:latin typeface="Arial"/>
-                <a:ea typeface="Arial"/>
-              </a:rPr>
-              <a:t>• Recipes with real text budgets</a:t>
-            </a:r>
-          </a:p>
-          <a:p xmlns:a="http://schemas.openxmlformats.org/drawingml/2006/main">
-            <a:r>
-              <a:rPr lang="en-US" sz="1800">
-                <a:solidFill>
-                  <a:srgbClr val="FFFFFF"/>
-                </a:solidFill>
-                <a:latin typeface="Arial"/>
-                <a:ea typeface="Arial"/>
-              </a:rPr>
-              <a:t>• Gate 3 contact sheet before ship</a:t>
-            </a:r>
-          </a:p>
-          <a:p xmlns:a="http://schemas.openxmlformats.org/drawingml/2006/main">
-            <a:r>
-              <a:rPr lang="en-US" sz="1800">
-                <a:solidFill>
-                  <a:srgbClr val="FFFFFF"/>
-                </a:solidFill>
-                <a:latin typeface="Arial"/>
-                <a:ea typeface="Arial"/>
-              </a:rPr>
-              <a:t>• Staging-safe apply with --force</a:t>
+            <a:pPr algn="ctr"/>
+            <a:r>
+              <a:rPr lang="en-US" sz="1200">
+                <a:solidFill>
+                  <a:srgbClr val="A0A6B0"/>
+                </a:solidFill>
+                <a:latin typeface="Arial"/>
+                <a:ea typeface="Arial"/>
+              </a:rPr>
+              <a:t>Recipes</a:t>
+            </a:r>
+          </a:p>
+        </p:txBody>
+      </p:sp>
+      <p:sp>
+        <p:nvSpPr>
+          <p:cNvPr id="100017" name="Kpi2Chip"/>
+          <p:cNvSpPr txBox="1"/>
+          <p:nvPr/>
+        </p:nvSpPr>
+        <p:spPr>
+          <a:xfrm xmlns:a="http://schemas.openxmlformats.org/drawingml/2006/main">
+            <a:off x="3668400" y="4431600"/>
+            <a:ext cx="2102400" cy="280800"/>
+          </a:xfrm>
+          <a:prstGeom xmlns:a="http://schemas.openxmlformats.org/drawingml/2006/main" prst="rect">
+            <a:avLst/>
+          </a:prstGeom>
+          <a:noFill xmlns:a="http://schemas.openxmlformats.org/drawingml/2006/main"/>
+        </p:spPr>
+        <p:txBody>
+          <a:bodyPr xmlns:a="http://schemas.openxmlformats.org/drawingml/2006/main"/>
+          <a:lstStyle xmlns:a="http://schemas.openxmlformats.org/drawingml/2006/main"/>
+          <a:p xmlns:a="http://schemas.openxmlformats.org/drawingml/2006/main">
+            <a:pPr algn="ctr"/>
+            <a:endParaRPr lang="en-US" sz="1200" b="1">
+              <a:solidFill>
+                <a:srgbClr val="0B5FFF"/>
+              </a:solidFill>
+              <a:latin typeface="Arial"/>
+              <a:ea typeface="Arial"/>
+            </a:endParaRPr>
+          </a:p>
+        </p:txBody>
+      </p:sp>
+      <p:sp>
+        <p:nvSpPr>
+          <p:cNvPr id="100018" name="Kpi3Bg"/>
+          <p:cNvSpPr/>
+          <p:nvPr/>
+        </p:nvSpPr>
+        <p:spPr>
+          <a:xfrm xmlns:a="http://schemas.openxmlformats.org/drawingml/2006/main">
+            <a:off x="6292800" y="1414800"/>
+            <a:ext cx="2354400" cy="4651200"/>
+          </a:xfrm>
+          <a:prstGeom xmlns:a="http://schemas.openxmlformats.org/drawingml/2006/main" prst="roundRect">
+            <a:avLst/>
+          </a:prstGeom>
+          <a:solidFill xmlns:a="http://schemas.openxmlformats.org/drawingml/2006/main">
+            <a:srgbClr val="1C1C1E"/>
+          </a:solidFill>
+          <a:ln xmlns:a="http://schemas.openxmlformats.org/drawingml/2006/main">
+            <a:noFill/>
+          </a:ln>
+        </p:spPr>
+        <p:txBody>
+          <a:bodyPr xmlns:a="http://schemas.openxmlformats.org/drawingml/2006/main"/>
+          <a:lstStyle xmlns:a="http://schemas.openxmlformats.org/drawingml/2006/main"/>
+          <a:p xmlns:a="http://schemas.openxmlformats.org/drawingml/2006/main"/>
+        </p:txBody>
+      </p:sp>
+      <p:sp>
+        <p:nvSpPr>
+          <p:cNvPr id="100019" name="Kpi3Value"/>
+          <p:cNvSpPr txBox="1"/>
+          <p:nvPr/>
+        </p:nvSpPr>
+        <p:spPr>
+          <a:xfrm xmlns:a="http://schemas.openxmlformats.org/drawingml/2006/main">
+            <a:off x="6422400" y="2829600"/>
+            <a:ext cx="2102400" cy="1044000"/>
+          </a:xfrm>
+          <a:prstGeom xmlns:a="http://schemas.openxmlformats.org/drawingml/2006/main" prst="rect">
+            <a:avLst/>
+          </a:prstGeom>
+          <a:noFill xmlns:a="http://schemas.openxmlformats.org/drawingml/2006/main"/>
+        </p:spPr>
+        <p:txBody>
+          <a:bodyPr xmlns:a="http://schemas.openxmlformats.org/drawingml/2006/main"/>
+          <a:lstStyle xmlns:a="http://schemas.openxmlformats.org/drawingml/2006/main"/>
+          <a:p xmlns:a="http://schemas.openxmlformats.org/drawingml/2006/main">
+            <a:pPr algn="ctr"/>
+            <a:r>
+              <a:rPr lang="en-US" sz="6000" b="1">
+                <a:solidFill>
+                  <a:srgbClr val="F5F5F7"/>
+                </a:solidFill>
+                <a:latin typeface="Arial"/>
+                <a:ea typeface="Arial"/>
+              </a:rPr>
+              <a:t>2</a:t>
+            </a:r>
+          </a:p>
+        </p:txBody>
+      </p:sp>
+      <p:sp>
+        <p:nvSpPr>
+          <p:cNvPr id="100020" name="Kpi3Label"/>
+          <p:cNvSpPr txBox="1"/>
+          <p:nvPr/>
+        </p:nvSpPr>
+        <p:spPr>
+          <a:xfrm xmlns:a="http://schemas.openxmlformats.org/drawingml/2006/main">
+            <a:off x="6422400" y="3999600"/>
+            <a:ext cx="2102400" cy="306000"/>
+          </a:xfrm>
+          <a:prstGeom xmlns:a="http://schemas.openxmlformats.org/drawingml/2006/main" prst="rect">
+            <a:avLst/>
+          </a:prstGeom>
+          <a:noFill xmlns:a="http://schemas.openxmlformats.org/drawingml/2006/main"/>
+        </p:spPr>
+        <p:txBody>
+          <a:bodyPr xmlns:a="http://schemas.openxmlformats.org/drawingml/2006/main"/>
+          <a:lstStyle xmlns:a="http://schemas.openxmlformats.org/drawingml/2006/main"/>
+          <a:p xmlns:a="http://schemas.openxmlformats.org/drawingml/2006/main">
+            <a:pPr algn="ctr"/>
+            <a:r>
+              <a:rPr lang="en-US" sz="1200">
+                <a:solidFill>
+                  <a:srgbClr val="A0A6B0"/>
+                </a:solidFill>
+                <a:latin typeface="Arial"/>
+                <a:ea typeface="Arial"/>
+              </a:rPr>
+              <a:t>Backends</a:t>
+            </a:r>
+          </a:p>
+        </p:txBody>
+      </p:sp>
+      <p:sp>
+        <p:nvSpPr>
+          <p:cNvPr id="100021" name="Kpi3Chip"/>
+          <p:cNvSpPr txBox="1"/>
+          <p:nvPr/>
+        </p:nvSpPr>
+        <p:spPr>
+          <a:xfrm xmlns:a="http://schemas.openxmlformats.org/drawingml/2006/main">
+            <a:off x="6422400" y="4431600"/>
+            <a:ext cx="2102400" cy="280800"/>
+          </a:xfrm>
+          <a:prstGeom xmlns:a="http://schemas.openxmlformats.org/drawingml/2006/main" prst="rect">
+            <a:avLst/>
+          </a:prstGeom>
+          <a:noFill xmlns:a="http://schemas.openxmlformats.org/drawingml/2006/main"/>
+        </p:spPr>
+        <p:txBody>
+          <a:bodyPr xmlns:a="http://schemas.openxmlformats.org/drawingml/2006/main"/>
+          <a:lstStyle xmlns:a="http://schemas.openxmlformats.org/drawingml/2006/main"/>
+          <a:p xmlns:a="http://schemas.openxmlformats.org/drawingml/2006/main">
+            <a:pPr algn="ctr"/>
+            <a:endParaRPr lang="en-US" sz="1200" b="1">
+              <a:solidFill>
+                <a:srgbClr val="0B5FFF"/>
+              </a:solidFill>
+              <a:latin typeface="Arial"/>
+              <a:ea typeface="Arial"/>
+            </a:endParaRPr>
+          </a:p>
+        </p:txBody>
+      </p:sp>
+      <p:sp>
+        <p:nvSpPr>
+          <p:cNvPr id="100022" name="Kpi4Bg"/>
+          <p:cNvSpPr/>
+          <p:nvPr/>
+        </p:nvSpPr>
+        <p:spPr>
+          <a:xfrm xmlns:a="http://schemas.openxmlformats.org/drawingml/2006/main">
+            <a:off x="9046800" y="1414800"/>
+            <a:ext cx="2354400" cy="4651200"/>
+          </a:xfrm>
+          <a:prstGeom xmlns:a="http://schemas.openxmlformats.org/drawingml/2006/main" prst="roundRect">
+            <a:avLst/>
+          </a:prstGeom>
+          <a:solidFill xmlns:a="http://schemas.openxmlformats.org/drawingml/2006/main">
+            <a:srgbClr val="1C1C1E"/>
+          </a:solidFill>
+          <a:ln xmlns:a="http://schemas.openxmlformats.org/drawingml/2006/main">
+            <a:noFill/>
+          </a:ln>
+        </p:spPr>
+        <p:txBody>
+          <a:bodyPr xmlns:a="http://schemas.openxmlformats.org/drawingml/2006/main"/>
+          <a:lstStyle xmlns:a="http://schemas.openxmlformats.org/drawingml/2006/main"/>
+          <a:p xmlns:a="http://schemas.openxmlformats.org/drawingml/2006/main"/>
+        </p:txBody>
+      </p:sp>
+      <p:sp>
+        <p:nvSpPr>
+          <p:cNvPr id="100023" name="Kpi4Value"/>
+          <p:cNvSpPr txBox="1"/>
+          <p:nvPr/>
+        </p:nvSpPr>
+        <p:spPr>
+          <a:xfrm xmlns:a="http://schemas.openxmlformats.org/drawingml/2006/main">
+            <a:off x="9172800" y="2829600"/>
+            <a:ext cx="2102400" cy="1044000"/>
+          </a:xfrm>
+          <a:prstGeom xmlns:a="http://schemas.openxmlformats.org/drawingml/2006/main" prst="rect">
+            <a:avLst/>
+          </a:prstGeom>
+          <a:noFill xmlns:a="http://schemas.openxmlformats.org/drawingml/2006/main"/>
+        </p:spPr>
+        <p:txBody>
+          <a:bodyPr xmlns:a="http://schemas.openxmlformats.org/drawingml/2006/main"/>
+          <a:lstStyle xmlns:a="http://schemas.openxmlformats.org/drawingml/2006/main"/>
+          <a:p xmlns:a="http://schemas.openxmlformats.org/drawingml/2006/main">
+            <a:pPr algn="ctr"/>
+            <a:r>
+              <a:rPr lang="en-US" sz="6000" b="1">
+                <a:solidFill>
+                  <a:srgbClr val="F5F5F7"/>
+                </a:solidFill>
+                <a:latin typeface="Arial"/>
+                <a:ea typeface="Arial"/>
+              </a:rPr>
+              <a:t>0</a:t>
+            </a:r>
+          </a:p>
+        </p:txBody>
+      </p:sp>
+      <p:sp>
+        <p:nvSpPr>
+          <p:cNvPr id="100024" name="Kpi4Label"/>
+          <p:cNvSpPr txBox="1"/>
+          <p:nvPr/>
+        </p:nvSpPr>
+        <p:spPr>
+          <a:xfrm xmlns:a="http://schemas.openxmlformats.org/drawingml/2006/main">
+            <a:off x="9172800" y="3999600"/>
+            <a:ext cx="2102400" cy="306000"/>
+          </a:xfrm>
+          <a:prstGeom xmlns:a="http://schemas.openxmlformats.org/drawingml/2006/main" prst="rect">
+            <a:avLst/>
+          </a:prstGeom>
+          <a:noFill xmlns:a="http://schemas.openxmlformats.org/drawingml/2006/main"/>
+        </p:spPr>
+        <p:txBody>
+          <a:bodyPr xmlns:a="http://schemas.openxmlformats.org/drawingml/2006/main"/>
+          <a:lstStyle xmlns:a="http://schemas.openxmlformats.org/drawingml/2006/main"/>
+          <a:p xmlns:a="http://schemas.openxmlformats.org/drawingml/2006/main">
+            <a:pPr algn="ctr"/>
+            <a:r>
+              <a:rPr lang="en-US" sz="1200">
+                <a:solidFill>
+                  <a:srgbClr val="A0A6B0"/>
+                </a:solidFill>
+                <a:latin typeface="Arial"/>
+                <a:ea typeface="Arial"/>
+              </a:rPr>
+              <a:t>Vendor bytes</a:t>
+            </a:r>
+          </a:p>
+        </p:txBody>
+      </p:sp>
+      <p:sp>
+        <p:nvSpPr>
+          <p:cNvPr id="100025" name="Kpi4Chip"/>
+          <p:cNvSpPr txBox="1"/>
+          <p:nvPr/>
+        </p:nvSpPr>
+        <p:spPr>
+          <a:xfrm xmlns:a="http://schemas.openxmlformats.org/drawingml/2006/main">
+            <a:off x="9172800" y="4431600"/>
+            <a:ext cx="2102400" cy="280800"/>
+          </a:xfrm>
+          <a:prstGeom xmlns:a="http://schemas.openxmlformats.org/drawingml/2006/main" prst="rect">
+            <a:avLst/>
+          </a:prstGeom>
+          <a:noFill xmlns:a="http://schemas.openxmlformats.org/drawingml/2006/main"/>
+        </p:spPr>
+        <p:txBody>
+          <a:bodyPr xmlns:a="http://schemas.openxmlformats.org/drawingml/2006/main"/>
+          <a:lstStyle xmlns:a="http://schemas.openxmlformats.org/drawingml/2006/main"/>
+          <a:p xmlns:a="http://schemas.openxmlformats.org/drawingml/2006/main">
+            <a:pPr algn="ctr"/>
+            <a:r>
+              <a:rPr lang="en-US" sz="1200" b="1">
+                <a:solidFill>
+                  <a:srgbClr val="0B5FFF"/>
+                </a:solidFill>
+                <a:latin typeface="Arial"/>
+                <a:ea typeface="Arial"/>
+              </a:rPr>
+              <a:t>safe</a:t>
             </a:r>
           </a:p>
         </p:txBody>
@@ -1790,7 +3053,7 @@
                                       <p:cBhvr>
                                         <p:cTn id="6" dur="500"/>
                                         <p:tgtEl>
-                                          <p:spTgt spid="100008"/>
+                                          <p:spTgt spid="100009"/>
                                         </p:tgtEl>
                                       </p:cBhvr>
                                     </p:animEffect>
@@ -1807,7 +3070,7 @@
                                       <p:cBhvr>
                                         <p:cTn id="8" dur="500"/>
                                         <p:tgtEl>
-                                          <p:spTgt spid="100009"/>
+                                          <p:spTgt spid="100010"/>
                                         </p:tgtEl>
                                       </p:cBhvr>
                                     </p:animEffect>
@@ -1824,7 +3087,7 @@
                                       <p:cBhvr>
                                         <p:cTn id="10" dur="500"/>
                                         <p:tgtEl>
-                                          <p:spTgt spid="100010"/>
+                                          <p:spTgt spid="100011"/>
                                         </p:tgtEl>
                                       </p:cBhvr>
                                     </p:animEffect>
@@ -1881,14 +3144,14 @@
       <p:grpSpPr/>
       <p:sp>
         <p:nvSpPr>
-          <p:cNvPr id="100015" name="ProcTitle"/>
+          <p:cNvPr id="100026" name="BigValue"/>
           <p:cNvSpPr txBox="1"/>
           <p:nvPr/>
         </p:nvSpPr>
         <p:spPr>
           <a:xfrm xmlns:a="http://schemas.openxmlformats.org/drawingml/2006/main">
-            <a:off x="792000" y="435600"/>
-            <a:ext cx="10609200" cy="558000"/>
+            <a:off x="792000" y="1180800"/>
+            <a:ext cx="10609200" cy="2304000"/>
           </a:xfrm>
           <a:prstGeom xmlns:a="http://schemas.openxmlformats.org/drawingml/2006/main" prst="rect">
             <a:avLst/>
@@ -1896,447 +3159,91 @@
           <a:noFill xmlns:a="http://schemas.openxmlformats.org/drawingml/2006/main"/>
         </p:spPr>
         <p:txBody>
-          <a:bodyPr xmlns:a="http://schemas.openxmlformats.org/drawingml/2006/main"/>
-          <a:lstStyle xmlns:a="http://schemas.openxmlformats.org/drawingml/2006/main"/>
-          <a:p xmlns:a="http://schemas.openxmlformats.org/drawingml/2006/main">
-            <a:r>
-              <a:rPr lang="en-US" sz="3600" b="1">
+          <a:bodyPr xmlns:a="http://schemas.openxmlformats.org/drawingml/2006/main" anchor="ctr"/>
+          <a:lstStyle xmlns:a="http://schemas.openxmlformats.org/drawingml/2006/main"/>
+          <a:p xmlns:a="http://schemas.openxmlformats.org/drawingml/2006/main">
+            <a:pPr algn="ctr"/>
+            <a:r>
+              <a:rPr lang="en-US" sz="8100" b="1">
+                <a:solidFill>
+                  <a:srgbClr val="0B5FFF"/>
+                </a:solidFill>
+                <a:latin typeface="Arial"/>
+                <a:ea typeface="Arial"/>
+              </a:rPr>
+              <a:t>DESIGN.md</a:t>
+            </a:r>
+          </a:p>
+        </p:txBody>
+      </p:sp>
+      <p:sp>
+        <p:nvSpPr>
+          <p:cNvPr id="100027" name="BigLabel"/>
+          <p:cNvSpPr txBox="1"/>
+          <p:nvPr/>
+        </p:nvSpPr>
+        <p:spPr>
+          <a:xfrm xmlns:a="http://schemas.openxmlformats.org/drawingml/2006/main">
+            <a:off x="792000" y="3704400"/>
+            <a:ext cx="10609200" cy="612000"/>
+          </a:xfrm>
+          <a:prstGeom xmlns:a="http://schemas.openxmlformats.org/drawingml/2006/main" prst="rect">
+            <a:avLst/>
+          </a:prstGeom>
+          <a:noFill xmlns:a="http://schemas.openxmlformats.org/drawingml/2006/main"/>
+        </p:spPr>
+        <p:txBody>
+          <a:bodyPr xmlns:a="http://schemas.openxmlformats.org/drawingml/2006/main"/>
+          <a:lstStyle xmlns:a="http://schemas.openxmlformats.org/drawingml/2006/main"/>
+          <a:p xmlns:a="http://schemas.openxmlformats.org/drawingml/2006/main">
+            <a:pPr algn="ctr"/>
+            <a:r>
+              <a:rPr lang="en-US" sz="2800" b="1">
                 <a:solidFill>
                   <a:srgbClr val="F5F5F7"/>
                 </a:solidFill>
                 <a:latin typeface="Arial"/>
                 <a:ea typeface="Arial"/>
               </a:rPr>
-              <a:t>One pipeline</a:t>
-            </a:r>
-          </a:p>
-        </p:txBody>
-      </p:sp>
-      <p:sp>
-        <p:nvSpPr>
-          <p:cNvPr id="100016" name="Proc1"/>
-          <p:cNvSpPr/>
-          <p:nvPr/>
-        </p:nvSpPr>
-        <p:spPr>
-          <a:xfrm xmlns:a="http://schemas.openxmlformats.org/drawingml/2006/main">
-            <a:off x="792000" y="2332800"/>
-            <a:ext cx="1803600" cy="1800000"/>
-          </a:xfrm>
-          <a:prstGeom xmlns:a="http://schemas.openxmlformats.org/drawingml/2006/main" prst="roundRect">
-            <a:avLst/>
-          </a:prstGeom>
-          <a:solidFill xmlns:a="http://schemas.openxmlformats.org/drawingml/2006/main">
-            <a:srgbClr val="0B5FFF"/>
-          </a:solidFill>
-          <a:ln xmlns:a="http://schemas.openxmlformats.org/drawingml/2006/main">
-            <a:noFill/>
-          </a:ln>
-        </p:spPr>
-        <p:txBody>
-          <a:bodyPr xmlns:a="http://schemas.openxmlformats.org/drawingml/2006/main" anchor="ctr"/>
+              <a:t>One brand source of truth</a:t>
+            </a:r>
+          </a:p>
+        </p:txBody>
+      </p:sp>
+      <p:sp>
+        <p:nvSpPr>
+          <p:cNvPr id="100028" name="BigContext"/>
+          <p:cNvSpPr txBox="1"/>
+          <p:nvPr/>
+        </p:nvSpPr>
+        <p:spPr>
+          <a:xfrm xmlns:a="http://schemas.openxmlformats.org/drawingml/2006/main">
+            <a:off x="1188000" y="4514400"/>
+            <a:ext cx="9817200" cy="792000"/>
+          </a:xfrm>
+          <a:prstGeom xmlns:a="http://schemas.openxmlformats.org/drawingml/2006/main" prst="rect">
+            <a:avLst/>
+          </a:prstGeom>
+          <a:noFill xmlns:a="http://schemas.openxmlformats.org/drawingml/2006/main"/>
+        </p:spPr>
+        <p:txBody>
+          <a:bodyPr xmlns:a="http://schemas.openxmlformats.org/drawingml/2006/main"/>
           <a:lstStyle xmlns:a="http://schemas.openxmlformats.org/drawingml/2006/main"/>
           <a:p xmlns:a="http://schemas.openxmlformats.org/drawingml/2006/main">
             <a:pPr algn="ctr"/>
             <a:r>
-              <a:rPr lang="en-US" sz="1800" b="1">
-                <a:solidFill>
-                  <a:srgbClr val="FFFFFF"/>
-                </a:solidFill>
-                <a:latin typeface="Arial"/>
-                <a:ea typeface="Arial"/>
-              </a:rPr>
-              <a:t>1</a:t>
-            </a:r>
-          </a:p>
-          <a:p xmlns:a="http://schemas.openxmlformats.org/drawingml/2006/main">
-            <a:pPr algn="ctr"/>
-            <a:r>
-              <a:rPr lang="en-US" sz="1800" b="1">
-                <a:solidFill>
-                  <a:srgbClr val="FFFFFF"/>
-                </a:solidFill>
-                <a:latin typeface="Arial"/>
-                <a:ea typeface="Arial"/>
-              </a:rPr>
-              <a:t>Brief</a:t>
-            </a:r>
-          </a:p>
-          <a:p xmlns:a="http://schemas.openxmlformats.org/drawingml/2006/main">
-            <a:pPr algn="ctr"/>
-            <a:r>
-              <a:rPr lang="en-US" sz="1800" b="1">
-                <a:solidFill>
-                  <a:srgbClr val="FFFFFF"/>
-                </a:solidFill>
-                <a:latin typeface="Arial"/>
-                <a:ea typeface="Arial"/>
-              </a:rPr>
-              <a:t>Markdown</a:t>
-            </a:r>
-          </a:p>
-        </p:txBody>
-      </p:sp>
-      <p:sp>
-        <p:nvSpPr>
-          <p:cNvPr id="100017" name="Proc2"/>
-          <p:cNvSpPr/>
-          <p:nvPr/>
-        </p:nvSpPr>
-        <p:spPr>
-          <a:xfrm xmlns:a="http://schemas.openxmlformats.org/drawingml/2006/main">
-            <a:off x="2991600" y="2332800"/>
-            <a:ext cx="1803600" cy="1800000"/>
-          </a:xfrm>
-          <a:prstGeom xmlns:a="http://schemas.openxmlformats.org/drawingml/2006/main" prst="roundRect">
-            <a:avLst/>
-          </a:prstGeom>
-          <a:solidFill xmlns:a="http://schemas.openxmlformats.org/drawingml/2006/main">
-            <a:srgbClr val="1C1C1E"/>
-          </a:solidFill>
-          <a:ln xmlns:a="http://schemas.openxmlformats.org/drawingml/2006/main">
-            <a:noFill/>
-          </a:ln>
-        </p:spPr>
-        <p:txBody>
-          <a:bodyPr xmlns:a="http://schemas.openxmlformats.org/drawingml/2006/main" anchor="ctr"/>
-          <a:lstStyle xmlns:a="http://schemas.openxmlformats.org/drawingml/2006/main"/>
-          <a:p xmlns:a="http://schemas.openxmlformats.org/drawingml/2006/main">
-            <a:pPr algn="ctr"/>
-            <a:r>
-              <a:rPr lang="en-US" sz="1800" b="1">
-                <a:solidFill>
-                  <a:srgbClr val="F5F5F7"/>
-                </a:solidFill>
-                <a:latin typeface="Arial"/>
-                <a:ea typeface="Arial"/>
-              </a:rPr>
-              <a:t>2</a:t>
-            </a:r>
-          </a:p>
-          <a:p xmlns:a="http://schemas.openxmlformats.org/drawingml/2006/main">
-            <a:pPr algn="ctr"/>
-            <a:r>
-              <a:rPr lang="en-US" sz="1800" b="1">
-                <a:solidFill>
-                  <a:srgbClr val="F5F5F7"/>
-                </a:solidFill>
-                <a:latin typeface="Arial"/>
-                <a:ea typeface="Arial"/>
-              </a:rPr>
-              <a:t>Compose</a:t>
-            </a:r>
-          </a:p>
-          <a:p xmlns:a="http://schemas.openxmlformats.org/drawingml/2006/main">
-            <a:pPr algn="ctr"/>
-            <a:r>
-              <a:rPr lang="en-US" sz="1800" b="1">
-                <a:solidFill>
-                  <a:srgbClr val="F5F5F7"/>
-                </a:solidFill>
-                <a:latin typeface="Arial"/>
-                <a:ea typeface="Arial"/>
-              </a:rPr>
-              <a:t>Deck-spec</a:t>
-            </a:r>
-          </a:p>
-        </p:txBody>
-      </p:sp>
-      <p:sp>
-        <p:nvSpPr>
-          <p:cNvPr id="100018" name="Proc3"/>
-          <p:cNvSpPr/>
-          <p:nvPr/>
-        </p:nvSpPr>
-        <p:spPr>
-          <a:xfrm xmlns:a="http://schemas.openxmlformats.org/drawingml/2006/main">
-            <a:off x="5194800" y="2332800"/>
-            <a:ext cx="1803600" cy="1800000"/>
-          </a:xfrm>
-          <a:prstGeom xmlns:a="http://schemas.openxmlformats.org/drawingml/2006/main" prst="roundRect">
-            <a:avLst/>
-          </a:prstGeom>
-          <a:solidFill xmlns:a="http://schemas.openxmlformats.org/drawingml/2006/main">
-            <a:srgbClr val="1C1C1E"/>
-          </a:solidFill>
-          <a:ln xmlns:a="http://schemas.openxmlformats.org/drawingml/2006/main">
-            <a:noFill/>
-          </a:ln>
-        </p:spPr>
-        <p:txBody>
-          <a:bodyPr xmlns:a="http://schemas.openxmlformats.org/drawingml/2006/main" anchor="ctr"/>
-          <a:lstStyle xmlns:a="http://schemas.openxmlformats.org/drawingml/2006/main"/>
-          <a:p xmlns:a="http://schemas.openxmlformats.org/drawingml/2006/main">
-            <a:pPr algn="ctr"/>
-            <a:r>
-              <a:rPr lang="en-US" sz="1800" b="1">
-                <a:solidFill>
-                  <a:srgbClr val="F5F5F7"/>
-                </a:solidFill>
-                <a:latin typeface="Arial"/>
-                <a:ea typeface="Arial"/>
-              </a:rPr>
-              <a:t>3</a:t>
-            </a:r>
-          </a:p>
-          <a:p xmlns:a="http://schemas.openxmlformats.org/drawingml/2006/main">
-            <a:pPr algn="ctr"/>
-            <a:r>
-              <a:rPr lang="en-US" sz="1800" b="1">
-                <a:solidFill>
-                  <a:srgbClr val="F5F5F7"/>
-                </a:solidFill>
-                <a:latin typeface="Arial"/>
-                <a:ea typeface="Arial"/>
-              </a:rPr>
-              <a:t>Scaffold</a:t>
-            </a:r>
-          </a:p>
-          <a:p xmlns:a="http://schemas.openxmlformats.org/drawingml/2006/main">
-            <a:pPr algn="ctr"/>
-            <a:r>
-              <a:rPr lang="en-US" sz="1800" b="1">
-                <a:solidFill>
-                  <a:srgbClr val="F5F5F7"/>
-                </a:solidFill>
-                <a:latin typeface="Arial"/>
-                <a:ea typeface="Arial"/>
-              </a:rPr>
-              <a:t>Tokens</a:t>
-            </a:r>
-          </a:p>
-        </p:txBody>
-      </p:sp>
-      <p:sp>
-        <p:nvSpPr>
-          <p:cNvPr id="100019" name="Proc4"/>
-          <p:cNvSpPr/>
-          <p:nvPr/>
-        </p:nvSpPr>
-        <p:spPr>
-          <a:xfrm xmlns:a="http://schemas.openxmlformats.org/drawingml/2006/main">
-            <a:off x="7394400" y="2332800"/>
-            <a:ext cx="1803600" cy="1800000"/>
-          </a:xfrm>
-          <a:prstGeom xmlns:a="http://schemas.openxmlformats.org/drawingml/2006/main" prst="roundRect">
-            <a:avLst/>
-          </a:prstGeom>
-          <a:solidFill xmlns:a="http://schemas.openxmlformats.org/drawingml/2006/main">
-            <a:srgbClr val="1C1C1E"/>
-          </a:solidFill>
-          <a:ln xmlns:a="http://schemas.openxmlformats.org/drawingml/2006/main">
-            <a:noFill/>
-          </a:ln>
-        </p:spPr>
-        <p:txBody>
-          <a:bodyPr xmlns:a="http://schemas.openxmlformats.org/drawingml/2006/main" anchor="ctr"/>
-          <a:lstStyle xmlns:a="http://schemas.openxmlformats.org/drawingml/2006/main"/>
-          <a:p xmlns:a="http://schemas.openxmlformats.org/drawingml/2006/main">
-            <a:pPr algn="ctr"/>
-            <a:r>
-              <a:rPr lang="en-US" sz="1800" b="1">
-                <a:solidFill>
-                  <a:srgbClr val="F5F5F7"/>
-                </a:solidFill>
-                <a:latin typeface="Arial"/>
-                <a:ea typeface="Arial"/>
-              </a:rPr>
-              <a:t>4</a:t>
-            </a:r>
-          </a:p>
-          <a:p xmlns:a="http://schemas.openxmlformats.org/drawingml/2006/main">
-            <a:pPr algn="ctr"/>
-            <a:r>
-              <a:rPr lang="en-US" sz="1800" b="1">
-                <a:solidFill>
-                  <a:srgbClr val="F5F5F7"/>
-                </a:solidFill>
-                <a:latin typeface="Arial"/>
-                <a:ea typeface="Arial"/>
-              </a:rPr>
-              <a:t>Apply</a:t>
-            </a:r>
-          </a:p>
-          <a:p xmlns:a="http://schemas.openxmlformats.org/drawingml/2006/main">
-            <a:pPr algn="ctr"/>
-            <a:r>
-              <a:rPr lang="en-US" sz="1800" b="1">
-                <a:solidFill>
-                  <a:srgbClr val="F5F5F7"/>
-                </a:solidFill>
-                <a:latin typeface="Arial"/>
-                <a:ea typeface="Arial"/>
-              </a:rPr>
-              <a:t>Legacy</a:t>
-            </a:r>
-          </a:p>
-        </p:txBody>
-      </p:sp>
-      <p:sp>
-        <p:nvSpPr>
-          <p:cNvPr id="100020" name="Proc5"/>
-          <p:cNvSpPr/>
-          <p:nvPr/>
-        </p:nvSpPr>
-        <p:spPr>
-          <a:xfrm xmlns:a="http://schemas.openxmlformats.org/drawingml/2006/main">
-            <a:off x="9597600" y="2332800"/>
-            <a:ext cx="1803600" cy="1800000"/>
-          </a:xfrm>
-          <a:prstGeom xmlns:a="http://schemas.openxmlformats.org/drawingml/2006/main" prst="roundRect">
-            <a:avLst/>
-          </a:prstGeom>
-          <a:solidFill xmlns:a="http://schemas.openxmlformats.org/drawingml/2006/main">
-            <a:srgbClr val="0B5FFF"/>
-          </a:solidFill>
-          <a:ln xmlns:a="http://schemas.openxmlformats.org/drawingml/2006/main">
-            <a:noFill/>
-          </a:ln>
-        </p:spPr>
-        <p:txBody>
-          <a:bodyPr xmlns:a="http://schemas.openxmlformats.org/drawingml/2006/main" anchor="ctr"/>
-          <a:lstStyle xmlns:a="http://schemas.openxmlformats.org/drawingml/2006/main"/>
-          <a:p xmlns:a="http://schemas.openxmlformats.org/drawingml/2006/main">
-            <a:pPr algn="ctr"/>
-            <a:r>
-              <a:rPr lang="en-US" sz="1800" b="1">
-                <a:solidFill>
-                  <a:srgbClr val="FFFFFF"/>
-                </a:solidFill>
-                <a:latin typeface="Arial"/>
-                <a:ea typeface="Arial"/>
-              </a:rPr>
-              <a:t>5</a:t>
-            </a:r>
-          </a:p>
-          <a:p xmlns:a="http://schemas.openxmlformats.org/drawingml/2006/main">
-            <a:pPr algn="ctr"/>
-            <a:r>
-              <a:rPr lang="en-US" sz="1800" b="1">
-                <a:solidFill>
-                  <a:srgbClr val="FFFFFF"/>
-                </a:solidFill>
-                <a:latin typeface="Arial"/>
-                <a:ea typeface="Arial"/>
-              </a:rPr>
-              <a:t>Gate 3</a:t>
-            </a:r>
-          </a:p>
-          <a:p xmlns:a="http://schemas.openxmlformats.org/drawingml/2006/main">
-            <a:pPr algn="ctr"/>
-            <a:r>
-              <a:rPr lang="en-US" sz="1800" b="1">
-                <a:solidFill>
-                  <a:srgbClr val="FFFFFF"/>
-                </a:solidFill>
-                <a:latin typeface="Arial"/>
-                <a:ea typeface="Arial"/>
-              </a:rPr>
-              <a:t>QA</a:t>
-            </a:r>
-          </a:p>
-        </p:txBody>
-      </p:sp>
-      <p:cxnSp>
-        <p:nvCxnSpPr>
-          <p:cNvPr id="100021" name="Connector 1"/>
-          <p:cNvCxnSpPr>
-            <a:stCxn xmlns:a="http://schemas.openxmlformats.org/drawingml/2006/main" id="100016" idx="0"/>
-            <a:endCxn xmlns:a="http://schemas.openxmlformats.org/drawingml/2006/main" id="100017" idx="0"/>
-          </p:cNvCxnSpPr>
-          <p:nvPr/>
-        </p:nvCxnSpPr>
-        <p:spPr>
-          <a:xfrm xmlns:a="http://schemas.openxmlformats.org/drawingml/2006/main">
-            <a:off x="2595600" y="3232800"/>
-            <a:ext cx="396000" cy="0"/>
-          </a:xfrm>
-          <a:prstGeom xmlns:a="http://schemas.openxmlformats.org/drawingml/2006/main" prst="straightConnector1">
-            <a:avLst/>
-          </a:prstGeom>
-          <a:ln xmlns:a="http://schemas.openxmlformats.org/drawingml/2006/main" w="12700">
-            <a:solidFill>
-              <a:srgbClr val="A0A6B0"/>
-            </a:solidFill>
-            <a:tailEnd type="triangle"/>
-          </a:ln>
-        </p:spPr>
-      </p:cxnSp>
-      <p:cxnSp>
-        <p:nvCxnSpPr>
-          <p:cNvPr id="100022" name="Connector 2"/>
-          <p:cNvCxnSpPr>
-            <a:stCxn xmlns:a="http://schemas.openxmlformats.org/drawingml/2006/main" id="100017" idx="0"/>
-            <a:endCxn xmlns:a="http://schemas.openxmlformats.org/drawingml/2006/main" id="100018" idx="0"/>
-          </p:cNvCxnSpPr>
-          <p:nvPr/>
-        </p:nvCxnSpPr>
-        <p:spPr>
-          <a:xfrm xmlns:a="http://schemas.openxmlformats.org/drawingml/2006/main">
-            <a:off x="4795200" y="3232800"/>
-            <a:ext cx="399600" cy="0"/>
-          </a:xfrm>
-          <a:prstGeom xmlns:a="http://schemas.openxmlformats.org/drawingml/2006/main" prst="straightConnector1">
-            <a:avLst/>
-          </a:prstGeom>
-          <a:ln xmlns:a="http://schemas.openxmlformats.org/drawingml/2006/main" w="12700">
-            <a:solidFill>
-              <a:srgbClr val="A0A6B0"/>
-            </a:solidFill>
-            <a:tailEnd type="triangle"/>
-          </a:ln>
-        </p:spPr>
-      </p:cxnSp>
-      <p:cxnSp>
-        <p:nvCxnSpPr>
-          <p:cNvPr id="100023" name="Connector 3"/>
-          <p:cNvCxnSpPr>
-            <a:stCxn xmlns:a="http://schemas.openxmlformats.org/drawingml/2006/main" id="100018" idx="0"/>
-            <a:endCxn xmlns:a="http://schemas.openxmlformats.org/drawingml/2006/main" id="100019" idx="0"/>
-          </p:cNvCxnSpPr>
-          <p:nvPr/>
-        </p:nvCxnSpPr>
-        <p:spPr>
-          <a:xfrm xmlns:a="http://schemas.openxmlformats.org/drawingml/2006/main">
-            <a:off x="6998400" y="3232800"/>
-            <a:ext cx="396000" cy="0"/>
-          </a:xfrm>
-          <a:prstGeom xmlns:a="http://schemas.openxmlformats.org/drawingml/2006/main" prst="straightConnector1">
-            <a:avLst/>
-          </a:prstGeom>
-          <a:ln xmlns:a="http://schemas.openxmlformats.org/drawingml/2006/main" w="12700">
-            <a:solidFill>
-              <a:srgbClr val="A0A6B0"/>
-            </a:solidFill>
-            <a:tailEnd type="triangle"/>
-          </a:ln>
-        </p:spPr>
-      </p:cxnSp>
-      <p:cxnSp>
-        <p:nvCxnSpPr>
-          <p:cNvPr id="100024" name="Connector 4"/>
-          <p:cNvCxnSpPr>
-            <a:stCxn xmlns:a="http://schemas.openxmlformats.org/drawingml/2006/main" id="100019" idx="0"/>
-            <a:endCxn xmlns:a="http://schemas.openxmlformats.org/drawingml/2006/main" id="100020" idx="0"/>
-          </p:cNvCxnSpPr>
-          <p:nvPr/>
-        </p:nvCxnSpPr>
-        <p:spPr>
-          <a:xfrm xmlns:a="http://schemas.openxmlformats.org/drawingml/2006/main">
-            <a:off x="9198000" y="3232800"/>
-            <a:ext cx="399600" cy="0"/>
-          </a:xfrm>
-          <a:prstGeom xmlns:a="http://schemas.openxmlformats.org/drawingml/2006/main" prst="straightConnector1">
-            <a:avLst/>
-          </a:prstGeom>
-          <a:ln xmlns:a="http://schemas.openxmlformats.org/drawingml/2006/main" w="12700">
-            <a:solidFill>
-              <a:srgbClr val="A0A6B0"/>
-            </a:solidFill>
-            <a:tailEnd type="triangle"/>
-          </a:ln>
-        </p:spPr>
-      </p:cxnSp>
+              <a:rPr lang="en-US" sz="1800">
+                <a:solidFill>
+                  <a:srgbClr val="A0A6B0"/>
+                </a:solidFill>
+                <a:latin typeface="Arial"/>
+                <a:ea typeface="Arial"/>
+              </a:rPr>
+              <a:t>Tokens and floors compile once — decks inherit the contract.</a:t>
+            </a:r>
+          </a:p>
+        </p:txBody>
+      </p:sp>
     </p:spTree>
   </p:cSld>
   <p:transition spd="med">
@@ -2372,7 +3279,7 @@
                                       <p:cBhvr>
                                         <p:cTn id="6" dur="500"/>
                                         <p:tgtEl>
-                                          <p:spTgt spid="100015"/>
+                                          <p:spTgt spid="100026"/>
                                         </p:tgtEl>
                                       </p:cBhvr>
                                     </p:animEffect>
@@ -2389,7 +3296,7 @@
                                       <p:cBhvr>
                                         <p:cTn id="8" dur="500"/>
                                         <p:tgtEl>
-                                          <p:spTgt spid="100016"/>
+                                          <p:spTgt spid="100027"/>
                                         </p:tgtEl>
                                       </p:cBhvr>
                                     </p:animEffect>
@@ -2406,7 +3313,7 @@
                                       <p:cBhvr>
                                         <p:cTn id="10" dur="500"/>
                                         <p:tgtEl>
-                                          <p:spTgt spid="100017"/>
+                                          <p:spTgt spid="100028"/>
                                         </p:tgtEl>
                                       </p:cBhvr>
                                     </p:animEffect>
@@ -2463,14 +3370,14 @@
       <p:grpSpPr/>
       <p:sp>
         <p:nvSpPr>
-          <p:cNvPr id="100025" name="FeatTitle"/>
+          <p:cNvPr id="100029" name="BaTitle"/>
           <p:cNvSpPr txBox="1"/>
           <p:nvPr/>
         </p:nvSpPr>
         <p:spPr>
           <a:xfrm xmlns:a="http://schemas.openxmlformats.org/drawingml/2006/main">
             <a:off x="792000" y="435600"/>
-            <a:ext cx="10609200" cy="662400"/>
+            <a:ext cx="10609200" cy="558000"/>
           </a:xfrm>
           <a:prstGeom xmlns:a="http://schemas.openxmlformats.org/drawingml/2006/main" prst="rect">
             <a:avLst/>
@@ -2489,21 +3396,21 @@
                 <a:latin typeface="Arial"/>
                 <a:ea typeface="Arial"/>
               </a:rPr>
-              <a:t>Three promises</a:t>
-            </a:r>
-          </a:p>
-        </p:txBody>
-      </p:sp>
-      <p:sp>
-        <p:nvSpPr>
-          <p:cNvPr id="100026" name="Card1Bg"/>
+              <a:t>What changes</a:t>
+            </a:r>
+          </a:p>
+        </p:txBody>
+      </p:sp>
+      <p:sp>
+        <p:nvSpPr>
+          <p:cNvPr id="100030" name="BaPanel1"/>
           <p:cNvSpPr/>
           <p:nvPr/>
         </p:nvSpPr>
         <p:spPr>
           <a:xfrm xmlns:a="http://schemas.openxmlformats.org/drawingml/2006/main">
-            <a:off x="792000" y="1414800"/>
-            <a:ext cx="3272400" cy="4651200"/>
+            <a:off x="792000" y="1980000"/>
+            <a:ext cx="5104800" cy="3020400"/>
           </a:xfrm>
           <a:prstGeom xmlns:a="http://schemas.openxmlformats.org/drawingml/2006/main" prst="roundRect">
             <a:avLst/>
@@ -2523,14 +3430,14 @@
       </p:sp>
       <p:sp>
         <p:nvSpPr>
-          <p:cNvPr id="100027" name="Card1Num"/>
+          <p:cNvPr id="100031" name="BaHead1"/>
           <p:cNvSpPr txBox="1"/>
           <p:nvPr/>
         </p:nvSpPr>
         <p:spPr>
           <a:xfrm xmlns:a="http://schemas.openxmlformats.org/drawingml/2006/main">
-            <a:off x="1188000" y="1810800"/>
-            <a:ext cx="2480400" cy="666000"/>
+            <a:off x="1188000" y="2376000"/>
+            <a:ext cx="4312800" cy="540000"/>
           </a:xfrm>
           <a:prstGeom xmlns:a="http://schemas.openxmlformats.org/drawingml/2006/main" prst="rect">
             <a:avLst/>
@@ -2542,28 +3449,28 @@
           <a:lstStyle xmlns:a="http://schemas.openxmlformats.org/drawingml/2006/main"/>
           <a:p xmlns:a="http://schemas.openxmlformats.org/drawingml/2006/main">
             <a:r>
-              <a:rPr lang="en-US" sz="3400" b="1">
-                <a:solidFill>
-                  <a:srgbClr val="0B5FFF"/>
-                </a:solidFill>
-                <a:latin typeface="Arial"/>
-                <a:ea typeface="Arial"/>
-              </a:rPr>
-              <a:t>01</a:t>
-            </a:r>
-          </a:p>
-        </p:txBody>
-      </p:sp>
-      <p:sp>
-        <p:nvSpPr>
-          <p:cNvPr id="100028" name="Card1Title"/>
+              <a:rPr lang="en-US" sz="2800" b="1">
+                <a:solidFill>
+                  <a:srgbClr val="F5F5F7"/>
+                </a:solidFill>
+                <a:latin typeface="Arial"/>
+                <a:ea typeface="Arial"/>
+              </a:rPr>
+              <a:t>Before</a:t>
+            </a:r>
+          </a:p>
+        </p:txBody>
+      </p:sp>
+      <p:sp>
+        <p:nvSpPr>
+          <p:cNvPr id="100032" name="BaBody1"/>
           <p:cNvSpPr txBox="1"/>
           <p:nvPr/>
         </p:nvSpPr>
         <p:spPr>
           <a:xfrm xmlns:a="http://schemas.openxmlformats.org/drawingml/2006/main">
-            <a:off x="1188000" y="2696400"/>
-            <a:ext cx="2480400" cy="774000"/>
+            <a:off x="1188000" y="3135600"/>
+            <a:ext cx="4312800" cy="1468800"/>
           </a:xfrm>
           <a:prstGeom xmlns:a="http://schemas.openxmlformats.org/drawingml/2006/main" prst="rect">
             <a:avLst/>
@@ -2575,67 +3482,70 @@
           <a:lstStyle xmlns:a="http://schemas.openxmlformats.org/drawingml/2006/main"/>
           <a:p xmlns:a="http://schemas.openxmlformats.org/drawingml/2006/main">
             <a:r>
-              <a:rPr lang="en-US" sz="2600" b="1">
-                <a:solidFill>
-                  <a:srgbClr val="F5F5F7"/>
-                </a:solidFill>
-                <a:latin typeface="Arial"/>
-                <a:ea typeface="Arial"/>
-              </a:rPr>
-              <a:t>Exact geometry</a:t>
-            </a:r>
-          </a:p>
-        </p:txBody>
-      </p:sp>
-      <p:sp>
-        <p:nvSpPr>
-          <p:cNvPr id="100029" name="Card1Body"/>
-          <p:cNvSpPr txBox="1"/>
-          <p:nvPr/>
-        </p:nvSpPr>
-        <p:spPr>
-          <a:xfrm xmlns:a="http://schemas.openxmlformats.org/drawingml/2006/main">
-            <a:off x="1188000" y="3693600"/>
-            <a:ext cx="2480400" cy="946800"/>
-          </a:xfrm>
-          <a:prstGeom xmlns:a="http://schemas.openxmlformats.org/drawingml/2006/main" prst="rect">
-            <a:avLst/>
-          </a:prstGeom>
-          <a:noFill xmlns:a="http://schemas.openxmlformats.org/drawingml/2006/main"/>
-        </p:spPr>
-        <p:txBody>
-          <a:bodyPr xmlns:a="http://schemas.openxmlformats.org/drawingml/2006/main"/>
-          <a:lstStyle xmlns:a="http://schemas.openxmlformats.org/drawingml/2006/main"/>
-          <a:p xmlns:a="http://schemas.openxmlformats.org/drawingml/2006/main">
-            <a:r>
-              <a:rPr lang="en-US" sz="1800" b="0">
+              <a:rPr lang="en-US" sz="1800">
                 <a:solidFill>
                   <a:srgbClr val="A0A6B0"/>
                 </a:solidFill>
                 <a:latin typeface="Arial"/>
                 <a:ea typeface="Arial"/>
               </a:rPr>
-              <a:t>Centimeters. Glued connectors. Type floors that hold.</a:t>
-            </a:r>
-          </a:p>
-        </p:txBody>
-      </p:sp>
-      <p:sp>
-        <p:nvSpPr>
-          <p:cNvPr id="100030" name="Card2Bg"/>
+              <a:t>• Decks drift from brand</a:t>
+            </a:r>
+          </a:p>
+          <a:p xmlns:a="http://schemas.openxmlformats.org/drawingml/2006/main">
+            <a:r>
+              <a:rPr lang="en-US" sz="1800">
+                <a:solidFill>
+                  <a:srgbClr val="A0A6B0"/>
+                </a:solidFill>
+                <a:latin typeface="Arial"/>
+                <a:ea typeface="Arial"/>
+              </a:rPr>
+              <a:t>• Agents invent layouts</a:t>
+            </a:r>
+          </a:p>
+          <a:p xmlns:a="http://schemas.openxmlformats.org/drawingml/2006/main">
+            <a:r>
+              <a:rPr lang="en-US" sz="1800">
+                <a:solidFill>
+                  <a:srgbClr val="A0A6B0"/>
+                </a:solidFill>
+                <a:latin typeface="Arial"/>
+                <a:ea typeface="Arial"/>
+              </a:rPr>
+              <a:t>• No screenshot gate</a:t>
+            </a:r>
+          </a:p>
+          <a:p xmlns:a="http://schemas.openxmlformats.org/drawingml/2006/main">
+            <a:r>
+              <a:rPr lang="en-US" sz="1800">
+                <a:solidFill>
+                  <a:srgbClr val="A0A6B0"/>
+                </a:solidFill>
+                <a:latin typeface="Arial"/>
+                <a:ea typeface="Arial"/>
+              </a:rPr>
+              <a:t>• Overwrite risk</a:t>
+            </a:r>
+          </a:p>
+        </p:txBody>
+      </p:sp>
+      <p:sp>
+        <p:nvSpPr>
+          <p:cNvPr id="100033" name="BaPanel2"/>
           <p:cNvSpPr/>
           <p:nvPr/>
         </p:nvSpPr>
         <p:spPr>
           <a:xfrm xmlns:a="http://schemas.openxmlformats.org/drawingml/2006/main">
-            <a:off x="4460400" y="1414800"/>
-            <a:ext cx="3272400" cy="4651200"/>
+            <a:off x="6292800" y="1980000"/>
+            <a:ext cx="5104800" cy="3020400"/>
           </a:xfrm>
           <a:prstGeom xmlns:a="http://schemas.openxmlformats.org/drawingml/2006/main" prst="roundRect">
             <a:avLst/>
           </a:prstGeom>
           <a:solidFill xmlns:a="http://schemas.openxmlformats.org/drawingml/2006/main">
-            <a:srgbClr val="1C1C1E"/>
+            <a:srgbClr val="0B5FFF"/>
           </a:solidFill>
           <a:ln xmlns:a="http://schemas.openxmlformats.org/drawingml/2006/main">
             <a:noFill/>
@@ -2649,14 +3559,14 @@
       </p:sp>
       <p:sp>
         <p:nvSpPr>
-          <p:cNvPr id="100031" name="Card2Num"/>
+          <p:cNvPr id="100034" name="BaHead2"/>
           <p:cNvSpPr txBox="1"/>
           <p:nvPr/>
         </p:nvSpPr>
         <p:spPr>
           <a:xfrm xmlns:a="http://schemas.openxmlformats.org/drawingml/2006/main">
-            <a:off x="4856400" y="1810800"/>
-            <a:ext cx="2480400" cy="666000"/>
+            <a:off x="6692400" y="2376000"/>
+            <a:ext cx="4312800" cy="540000"/>
           </a:xfrm>
           <a:prstGeom xmlns:a="http://schemas.openxmlformats.org/drawingml/2006/main" prst="rect">
             <a:avLst/>
@@ -2668,28 +3578,28 @@
           <a:lstStyle xmlns:a="http://schemas.openxmlformats.org/drawingml/2006/main"/>
           <a:p xmlns:a="http://schemas.openxmlformats.org/drawingml/2006/main">
             <a:r>
-              <a:rPr lang="en-US" sz="3400" b="1">
-                <a:solidFill>
-                  <a:srgbClr val="0B5FFF"/>
-                </a:solidFill>
-                <a:latin typeface="Arial"/>
-                <a:ea typeface="Arial"/>
-              </a:rPr>
-              <a:t>02</a:t>
-            </a:r>
-          </a:p>
-        </p:txBody>
-      </p:sp>
-      <p:sp>
-        <p:nvSpPr>
-          <p:cNvPr id="100032" name="Card2Title"/>
+              <a:rPr lang="en-US" sz="2800" b="1">
+                <a:solidFill>
+                  <a:srgbClr val="FFFFFF"/>
+                </a:solidFill>
+                <a:latin typeface="Arial"/>
+                <a:ea typeface="Arial"/>
+              </a:rPr>
+              <a:t>After</a:t>
+            </a:r>
+          </a:p>
+        </p:txBody>
+      </p:sp>
+      <p:sp>
+        <p:nvSpPr>
+          <p:cNvPr id="100035" name="BaBody2"/>
           <p:cNvSpPr txBox="1"/>
           <p:nvPr/>
         </p:nvSpPr>
         <p:spPr>
           <a:xfrm xmlns:a="http://schemas.openxmlformats.org/drawingml/2006/main">
-            <a:off x="4856400" y="2696400"/>
-            <a:ext cx="2480400" cy="774000"/>
+            <a:off x="6692400" y="3135600"/>
+            <a:ext cx="4312800" cy="1468800"/>
           </a:xfrm>
           <a:prstGeom xmlns:a="http://schemas.openxmlformats.org/drawingml/2006/main" prst="rect">
             <a:avLst/>
@@ -2701,173 +3611,50 @@
           <a:lstStyle xmlns:a="http://schemas.openxmlformats.org/drawingml/2006/main"/>
           <a:p xmlns:a="http://schemas.openxmlformats.org/drawingml/2006/main">
             <a:r>
-              <a:rPr lang="en-US" sz="2600" b="1">
-                <a:solidFill>
-                  <a:srgbClr val="F5F5F7"/>
-                </a:solidFill>
-                <a:latin typeface="Arial"/>
-                <a:ea typeface="Arial"/>
-              </a:rPr>
-              <a:t>Hard gates</a:t>
-            </a:r>
-          </a:p>
-        </p:txBody>
-      </p:sp>
-      <p:sp>
-        <p:nvSpPr>
-          <p:cNvPr id="100033" name="Card2Body"/>
-          <p:cNvSpPr txBox="1"/>
-          <p:nvPr/>
-        </p:nvSpPr>
-        <p:spPr>
-          <a:xfrm xmlns:a="http://schemas.openxmlformats.org/drawingml/2006/main">
-            <a:off x="4856400" y="3693600"/>
-            <a:ext cx="2480400" cy="946800"/>
-          </a:xfrm>
-          <a:prstGeom xmlns:a="http://schemas.openxmlformats.org/drawingml/2006/main" prst="rect">
-            <a:avLst/>
-          </a:prstGeom>
-          <a:noFill xmlns:a="http://schemas.openxmlformats.org/drawingml/2006/main"/>
-        </p:spPr>
-        <p:txBody>
-          <a:bodyPr xmlns:a="http://schemas.openxmlformats.org/drawingml/2006/main"/>
-          <a:lstStyle xmlns:a="http://schemas.openxmlformats.org/drawingml/2006/main"/>
-          <a:p xmlns:a="http://schemas.openxmlformats.org/drawingml/2006/main">
-            <a:r>
-              <a:rPr lang="en-US" sz="1800" b="0">
-                <a:solidFill>
-                  <a:srgbClr val="A0A6B0"/>
-                </a:solidFill>
-                <a:latin typeface="Arial"/>
-                <a:ea typeface="Arial"/>
-              </a:rPr>
-              <a:t>Budgets, contrast, issues — then a contact sheet.</a:t>
-            </a:r>
-          </a:p>
-        </p:txBody>
-      </p:sp>
-      <p:sp>
-        <p:nvSpPr>
-          <p:cNvPr id="100034" name="Card3Bg"/>
-          <p:cNvSpPr/>
-          <p:nvPr/>
-        </p:nvSpPr>
-        <p:spPr>
-          <a:xfrm xmlns:a="http://schemas.openxmlformats.org/drawingml/2006/main">
-            <a:off x="8128800" y="1414800"/>
-            <a:ext cx="3272400" cy="4651200"/>
-          </a:xfrm>
-          <a:prstGeom xmlns:a="http://schemas.openxmlformats.org/drawingml/2006/main" prst="roundRect">
-            <a:avLst/>
-          </a:prstGeom>
-          <a:solidFill xmlns:a="http://schemas.openxmlformats.org/drawingml/2006/main">
-            <a:srgbClr val="1C1C1E"/>
-          </a:solidFill>
-          <a:ln xmlns:a="http://schemas.openxmlformats.org/drawingml/2006/main">
-            <a:noFill/>
-          </a:ln>
-        </p:spPr>
-        <p:txBody>
-          <a:bodyPr xmlns:a="http://schemas.openxmlformats.org/drawingml/2006/main"/>
-          <a:lstStyle xmlns:a="http://schemas.openxmlformats.org/drawingml/2006/main"/>
-          <a:p xmlns:a="http://schemas.openxmlformats.org/drawingml/2006/main"/>
-        </p:txBody>
-      </p:sp>
-      <p:sp>
-        <p:nvSpPr>
-          <p:cNvPr id="100035" name="Card3Num"/>
-          <p:cNvSpPr txBox="1"/>
-          <p:nvPr/>
-        </p:nvSpPr>
-        <p:spPr>
-          <a:xfrm xmlns:a="http://schemas.openxmlformats.org/drawingml/2006/main">
-            <a:off x="8524800" y="1810800"/>
-            <a:ext cx="2480400" cy="666000"/>
-          </a:xfrm>
-          <a:prstGeom xmlns:a="http://schemas.openxmlformats.org/drawingml/2006/main" prst="rect">
-            <a:avLst/>
-          </a:prstGeom>
-          <a:noFill xmlns:a="http://schemas.openxmlformats.org/drawingml/2006/main"/>
-        </p:spPr>
-        <p:txBody>
-          <a:bodyPr xmlns:a="http://schemas.openxmlformats.org/drawingml/2006/main"/>
-          <a:lstStyle xmlns:a="http://schemas.openxmlformats.org/drawingml/2006/main"/>
-          <a:p xmlns:a="http://schemas.openxmlformats.org/drawingml/2006/main">
-            <a:r>
-              <a:rPr lang="en-US" sz="3400" b="1">
-                <a:solidFill>
-                  <a:srgbClr val="0B5FFF"/>
-                </a:solidFill>
-                <a:latin typeface="Arial"/>
-                <a:ea typeface="Arial"/>
-              </a:rPr>
-              <a:t>03</a:t>
-            </a:r>
-          </a:p>
-        </p:txBody>
-      </p:sp>
-      <p:sp>
-        <p:nvSpPr>
-          <p:cNvPr id="100036" name="Card3Title"/>
-          <p:cNvSpPr txBox="1"/>
-          <p:nvPr/>
-        </p:nvSpPr>
-        <p:spPr>
-          <a:xfrm xmlns:a="http://schemas.openxmlformats.org/drawingml/2006/main">
-            <a:off x="8524800" y="2696400"/>
-            <a:ext cx="2480400" cy="774000"/>
-          </a:xfrm>
-          <a:prstGeom xmlns:a="http://schemas.openxmlformats.org/drawingml/2006/main" prst="rect">
-            <a:avLst/>
-          </a:prstGeom>
-          <a:noFill xmlns:a="http://schemas.openxmlformats.org/drawingml/2006/main"/>
-        </p:spPr>
-        <p:txBody>
-          <a:bodyPr xmlns:a="http://schemas.openxmlformats.org/drawingml/2006/main"/>
-          <a:lstStyle xmlns:a="http://schemas.openxmlformats.org/drawingml/2006/main"/>
-          <a:p xmlns:a="http://schemas.openxmlformats.org/drawingml/2006/main">
-            <a:r>
-              <a:rPr lang="en-US" sz="2600" b="1">
-                <a:solidFill>
-                  <a:srgbClr val="F5F5F7"/>
-                </a:solidFill>
-                <a:latin typeface="Arial"/>
-                <a:ea typeface="Arial"/>
-              </a:rPr>
-              <a:t>Agent-safe</a:t>
-            </a:r>
-          </a:p>
-        </p:txBody>
-      </p:sp>
-      <p:sp>
-        <p:nvSpPr>
-          <p:cNvPr id="100037" name="Card3Body"/>
-          <p:cNvSpPr txBox="1"/>
-          <p:nvPr/>
-        </p:nvSpPr>
-        <p:spPr>
-          <a:xfrm xmlns:a="http://schemas.openxmlformats.org/drawingml/2006/main">
-            <a:off x="8524800" y="3693600"/>
-            <a:ext cx="2480400" cy="946800"/>
-          </a:xfrm>
-          <a:prstGeom xmlns:a="http://schemas.openxmlformats.org/drawingml/2006/main" prst="rect">
-            <a:avLst/>
-          </a:prstGeom>
-          <a:noFill xmlns:a="http://schemas.openxmlformats.org/drawingml/2006/main"/>
-        </p:spPr>
-        <p:txBody>
-          <a:bodyPr xmlns:a="http://schemas.openxmlformats.org/drawingml/2006/main"/>
-          <a:lstStyle xmlns:a="http://schemas.openxmlformats.org/drawingml/2006/main"/>
-          <a:p xmlns:a="http://schemas.openxmlformats.org/drawingml/2006/main">
-            <a:r>
-              <a:rPr lang="en-US" sz="1800" b="0">
-                <a:solidFill>
-                  <a:srgbClr val="A0A6B0"/>
-                </a:solidFill>
-                <a:latin typeface="Arial"/>
-                <a:ea typeface="Arial"/>
-              </a:rPr>
-              <a:t>Claude, Codex, Grok. Install only after you say yes.</a:t>
+              <a:rPr lang="en-US" sz="1800">
+                <a:solidFill>
+                  <a:srgbClr val="FFFFFF"/>
+                </a:solidFill>
+                <a:latin typeface="Arial"/>
+                <a:ea typeface="Arial"/>
+              </a:rPr>
+              <a:t>• Tokens from DESIGN.md</a:t>
+            </a:r>
+          </a:p>
+          <a:p xmlns:a="http://schemas.openxmlformats.org/drawingml/2006/main">
+            <a:r>
+              <a:rPr lang="en-US" sz="1800">
+                <a:solidFill>
+                  <a:srgbClr val="FFFFFF"/>
+                </a:solidFill>
+                <a:latin typeface="Arial"/>
+                <a:ea typeface="Arial"/>
+              </a:rPr>
+              <a:t>• Motif chrome + budgets</a:t>
+            </a:r>
+          </a:p>
+          <a:p xmlns:a="http://schemas.openxmlformats.org/drawingml/2006/main">
+            <a:r>
+              <a:rPr lang="en-US" sz="1800">
+                <a:solidFill>
+                  <a:srgbClr val="FFFFFF"/>
+                </a:solidFill>
+                <a:latin typeface="Arial"/>
+                <a:ea typeface="Arial"/>
+              </a:rPr>
+              <a:t>• Gate 3 contact sheet</a:t>
+            </a:r>
+          </a:p>
+          <a:p xmlns:a="http://schemas.openxmlformats.org/drawingml/2006/main">
+            <a:r>
+              <a:rPr lang="en-US" sz="1800">
+                <a:solidFill>
+                  <a:srgbClr val="FFFFFF"/>
+                </a:solidFill>
+                <a:latin typeface="Arial"/>
+                <a:ea typeface="Arial"/>
+              </a:rPr>
+              <a:t>• Staging-safe --force</a:t>
             </a:r>
           </a:p>
         </p:txBody>
@@ -2907,7 +3694,7 @@
                                       <p:cBhvr>
                                         <p:cTn id="6" dur="500"/>
                                         <p:tgtEl>
-                                          <p:spTgt spid="100025"/>
+                                          <p:spTgt spid="100029"/>
                                         </p:tgtEl>
                                       </p:cBhvr>
                                     </p:animEffect>
@@ -2924,7 +3711,7 @@
                                       <p:cBhvr>
                                         <p:cTn id="8" dur="500"/>
                                         <p:tgtEl>
-                                          <p:spTgt spid="100026"/>
+                                          <p:spTgt spid="100030"/>
                                         </p:tgtEl>
                                       </p:cBhvr>
                                     </p:animEffect>
@@ -2941,7 +3728,7 @@
                                       <p:cBhvr>
                                         <p:cTn id="10" dur="500"/>
                                         <p:tgtEl>
-                                          <p:spTgt spid="100027"/>
+                                          <p:spTgt spid="100031"/>
                                         </p:tgtEl>
                                       </p:cBhvr>
                                     </p:animEffect>
@@ -2998,7 +3785,7 @@
       <p:grpSpPr/>
       <p:sp>
         <p:nvSpPr>
-          <p:cNvPr id="100038" name="PillarTitle"/>
+          <p:cNvPr id="100036" name="ProcTitle"/>
           <p:cNvSpPr txBox="1"/>
           <p:nvPr/>
         </p:nvSpPr>
@@ -3024,21 +3811,21 @@
                 <a:latin typeface="Arial"/>
                 <a:ea typeface="Arial"/>
               </a:rPr>
-              <a:t>Two backends, one contract</a:t>
-            </a:r>
-          </a:p>
-        </p:txBody>
-      </p:sp>
-      <p:sp>
-        <p:nvSpPr>
-          <p:cNvPr id="100039" name="Pillar1"/>
+              <a:t>Authoring pipeline</a:t>
+            </a:r>
+          </a:p>
+        </p:txBody>
+      </p:sp>
+      <p:sp>
+        <p:nvSpPr>
+          <p:cNvPr id="100037" name="Proc1"/>
           <p:cNvSpPr/>
           <p:nvPr/>
         </p:nvSpPr>
         <p:spPr>
           <a:xfrm xmlns:a="http://schemas.openxmlformats.org/drawingml/2006/main">
-            <a:off x="792000" y="2545200"/>
-            <a:ext cx="3272400" cy="2678400"/>
+            <a:off x="792000" y="2332800"/>
+            <a:ext cx="1803600" cy="1800000"/>
           </a:xfrm>
           <a:prstGeom xmlns:a="http://schemas.openxmlformats.org/drawingml/2006/main" prst="roundRect">
             <a:avLst/>
@@ -3056,54 +3843,54 @@
           <a:p xmlns:a="http://schemas.openxmlformats.org/drawingml/2006/main">
             <a:pPr algn="ctr"/>
             <a:r>
-              <a:rPr lang="en-US" sz="2400" b="1">
+              <a:rPr lang="en-US" sz="1800" b="1">
                 <a:solidFill>
                   <a:srgbClr val="FFFFFF"/>
                 </a:solidFill>
                 <a:latin typeface="Arial"/>
                 <a:ea typeface="Arial"/>
               </a:rPr>
-              <a:t>Legacy</a:t>
+              <a:t>1</a:t>
             </a:r>
           </a:p>
           <a:p xmlns:a="http://schemas.openxmlformats.org/drawingml/2006/main">
             <a:pPr algn="ctr"/>
             <a:r>
-              <a:rPr lang="en-US" sz="2400" b="1">
+              <a:rPr lang="en-US" sz="1800" b="1">
                 <a:solidFill>
                   <a:srgbClr val="FFFFFF"/>
                 </a:solidFill>
                 <a:latin typeface="Arial"/>
                 <a:ea typeface="Arial"/>
               </a:rPr>
-              <a:t/>
+              <a:t>Brief</a:t>
             </a:r>
           </a:p>
           <a:p xmlns:a="http://schemas.openxmlformats.org/drawingml/2006/main">
             <a:pPr algn="ctr"/>
             <a:r>
-              <a:rPr lang="en-US" sz="2400" b="1">
+              <a:rPr lang="en-US" sz="1800" b="1">
                 <a:solidFill>
                   <a:srgbClr val="FFFFFF"/>
                 </a:solidFill>
                 <a:latin typeface="Arial"/>
                 <a:ea typeface="Arial"/>
               </a:rPr>
-              <a:t>Shape-level precision for DESIGN.md decks</a:t>
-            </a:r>
-          </a:p>
-        </p:txBody>
-      </p:sp>
-      <p:sp>
-        <p:nvSpPr>
-          <p:cNvPr id="100040" name="Pillar2"/>
+              <a:t>Markdown</a:t>
+            </a:r>
+          </a:p>
+        </p:txBody>
+      </p:sp>
+      <p:sp>
+        <p:nvSpPr>
+          <p:cNvPr id="100038" name="Proc2"/>
           <p:cNvSpPr/>
           <p:nvPr/>
         </p:nvSpPr>
         <p:spPr>
           <a:xfrm xmlns:a="http://schemas.openxmlformats.org/drawingml/2006/main">
-            <a:off x="4460400" y="2026800"/>
-            <a:ext cx="3272400" cy="3200400"/>
+            <a:off x="2991600" y="2332800"/>
+            <a:ext cx="1803600" cy="1800000"/>
           </a:xfrm>
           <a:prstGeom xmlns:a="http://schemas.openxmlformats.org/drawingml/2006/main" prst="roundRect">
             <a:avLst/>
@@ -3121,54 +3908,54 @@
           <a:p xmlns:a="http://schemas.openxmlformats.org/drawingml/2006/main">
             <a:pPr algn="ctr"/>
             <a:r>
-              <a:rPr lang="en-US" sz="2400" b="1">
+              <a:rPr lang="en-US" sz="1800" b="1">
                 <a:solidFill>
                   <a:srgbClr val="F5F5F7"/>
                 </a:solidFill>
                 <a:latin typeface="Arial"/>
                 <a:ea typeface="Arial"/>
               </a:rPr>
-              <a:t>Official</a:t>
+              <a:t>2</a:t>
             </a:r>
           </a:p>
           <a:p xmlns:a="http://schemas.openxmlformats.org/drawingml/2006/main">
             <a:pPr algn="ctr"/>
             <a:r>
-              <a:rPr lang="en-US" sz="2400" b="1">
+              <a:rPr lang="en-US" sz="1800" b="1">
                 <a:solidFill>
                   <a:srgbClr val="F5F5F7"/>
                 </a:solidFill>
                 <a:latin typeface="Arial"/>
                 <a:ea typeface="Arial"/>
               </a:rPr>
-              <a:t/>
+              <a:t>Compose</a:t>
             </a:r>
           </a:p>
           <a:p xmlns:a="http://schemas.openxmlformats.org/drawingml/2006/main">
             <a:pPr algn="ctr"/>
             <a:r>
-              <a:rPr lang="en-US" sz="2400" b="1">
+              <a:rPr lang="en-US" sz="1800" b="1">
                 <a:solidFill>
                   <a:srgbClr val="F5F5F7"/>
                 </a:solidFill>
                 <a:latin typeface="Arial"/>
                 <a:ea typeface="Arial"/>
               </a:rPr>
-              <a:t>Agent-bridge drafts via office.render</a:t>
-            </a:r>
-          </a:p>
-        </p:txBody>
-      </p:sp>
-      <p:sp>
-        <p:nvSpPr>
-          <p:cNvPr id="100041" name="Pillar3"/>
+              <a:t>Deck-spec</a:t>
+            </a:r>
+          </a:p>
+        </p:txBody>
+      </p:sp>
+      <p:sp>
+        <p:nvSpPr>
+          <p:cNvPr id="100039" name="Proc3"/>
           <p:cNvSpPr/>
           <p:nvPr/>
         </p:nvSpPr>
         <p:spPr>
           <a:xfrm xmlns:a="http://schemas.openxmlformats.org/drawingml/2006/main">
-            <a:off x="8128800" y="1504800"/>
-            <a:ext cx="3272400" cy="3722400"/>
+            <a:off x="5194800" y="2332800"/>
+            <a:ext cx="1803600" cy="1800000"/>
           </a:xfrm>
           <a:prstGeom xmlns:a="http://schemas.openxmlformats.org/drawingml/2006/main" prst="roundRect">
             <a:avLst/>
@@ -3186,44 +3973,274 @@
           <a:p xmlns:a="http://schemas.openxmlformats.org/drawingml/2006/main">
             <a:pPr algn="ctr"/>
             <a:r>
-              <a:rPr lang="en-US" sz="2400" b="1">
+              <a:rPr lang="en-US" sz="1800" b="1">
                 <a:solidFill>
                   <a:srgbClr val="F5F5F7"/>
                 </a:solidFill>
                 <a:latin typeface="Arial"/>
                 <a:ea typeface="Arial"/>
               </a:rPr>
-              <a:t>Offline</a:t>
+              <a:t>3</a:t>
             </a:r>
           </a:p>
           <a:p xmlns:a="http://schemas.openxmlformats.org/drawingml/2006/main">
             <a:pPr algn="ctr"/>
             <a:r>
-              <a:rPr lang="en-US" sz="2400" b="1">
+              <a:rPr lang="en-US" sz="1800" b="1">
                 <a:solidFill>
                   <a:srgbClr val="F5F5F7"/>
                 </a:solidFill>
                 <a:latin typeface="Arial"/>
                 <a:ea typeface="Arial"/>
               </a:rPr>
-              <a:t/>
+              <a:t>Scaffold</a:t>
             </a:r>
           </a:p>
           <a:p xmlns:a="http://schemas.openxmlformats.org/drawingml/2006/main">
             <a:pPr algn="ctr"/>
             <a:r>
-              <a:rPr lang="en-US" sz="2400" b="1">
+              <a:rPr lang="en-US" sz="1800" b="1">
                 <a:solidFill>
                   <a:srgbClr val="F5F5F7"/>
                 </a:solidFill>
                 <a:latin typeface="Arial"/>
                 <a:ea typeface="Arial"/>
               </a:rPr>
-              <a:t>Compose, a11y, refine, animate without a binary</a:t>
-            </a:r>
-          </a:p>
-        </p:txBody>
-      </p:sp>
+              <a:t>Motifs</a:t>
+            </a:r>
+          </a:p>
+        </p:txBody>
+      </p:sp>
+      <p:sp>
+        <p:nvSpPr>
+          <p:cNvPr id="100040" name="Proc4"/>
+          <p:cNvSpPr/>
+          <p:nvPr/>
+        </p:nvSpPr>
+        <p:spPr>
+          <a:xfrm xmlns:a="http://schemas.openxmlformats.org/drawingml/2006/main">
+            <a:off x="7394400" y="2332800"/>
+            <a:ext cx="1803600" cy="1800000"/>
+          </a:xfrm>
+          <a:prstGeom xmlns:a="http://schemas.openxmlformats.org/drawingml/2006/main" prst="roundRect">
+            <a:avLst/>
+          </a:prstGeom>
+          <a:solidFill xmlns:a="http://schemas.openxmlformats.org/drawingml/2006/main">
+            <a:srgbClr val="1C1C1E"/>
+          </a:solidFill>
+          <a:ln xmlns:a="http://schemas.openxmlformats.org/drawingml/2006/main">
+            <a:noFill/>
+          </a:ln>
+        </p:spPr>
+        <p:txBody>
+          <a:bodyPr xmlns:a="http://schemas.openxmlformats.org/drawingml/2006/main" anchor="ctr"/>
+          <a:lstStyle xmlns:a="http://schemas.openxmlformats.org/drawingml/2006/main"/>
+          <a:p xmlns:a="http://schemas.openxmlformats.org/drawingml/2006/main">
+            <a:pPr algn="ctr"/>
+            <a:r>
+              <a:rPr lang="en-US" sz="1800" b="1">
+                <a:solidFill>
+                  <a:srgbClr val="F5F5F7"/>
+                </a:solidFill>
+                <a:latin typeface="Arial"/>
+                <a:ea typeface="Arial"/>
+              </a:rPr>
+              <a:t>4</a:t>
+            </a:r>
+          </a:p>
+          <a:p xmlns:a="http://schemas.openxmlformats.org/drawingml/2006/main">
+            <a:pPr algn="ctr"/>
+            <a:r>
+              <a:rPr lang="en-US" sz="1800" b="1">
+                <a:solidFill>
+                  <a:srgbClr val="F5F5F7"/>
+                </a:solidFill>
+                <a:latin typeface="Arial"/>
+                <a:ea typeface="Arial"/>
+              </a:rPr>
+              <a:t>Apply</a:t>
+            </a:r>
+          </a:p>
+          <a:p xmlns:a="http://schemas.openxmlformats.org/drawingml/2006/main">
+            <a:pPr algn="ctr"/>
+            <a:r>
+              <a:rPr lang="en-US" sz="1800" b="1">
+                <a:solidFill>
+                  <a:srgbClr val="F5F5F7"/>
+                </a:solidFill>
+                <a:latin typeface="Arial"/>
+                <a:ea typeface="Arial"/>
+              </a:rPr>
+              <a:t>Legacy</a:t>
+            </a:r>
+          </a:p>
+        </p:txBody>
+      </p:sp>
+      <p:sp>
+        <p:nvSpPr>
+          <p:cNvPr id="100041" name="Proc5"/>
+          <p:cNvSpPr/>
+          <p:nvPr/>
+        </p:nvSpPr>
+        <p:spPr>
+          <a:xfrm xmlns:a="http://schemas.openxmlformats.org/drawingml/2006/main">
+            <a:off x="9597600" y="2332800"/>
+            <a:ext cx="1803600" cy="1800000"/>
+          </a:xfrm>
+          <a:prstGeom xmlns:a="http://schemas.openxmlformats.org/drawingml/2006/main" prst="roundRect">
+            <a:avLst/>
+          </a:prstGeom>
+          <a:solidFill xmlns:a="http://schemas.openxmlformats.org/drawingml/2006/main">
+            <a:srgbClr val="0B5FFF"/>
+          </a:solidFill>
+          <a:ln xmlns:a="http://schemas.openxmlformats.org/drawingml/2006/main">
+            <a:noFill/>
+          </a:ln>
+        </p:spPr>
+        <p:txBody>
+          <a:bodyPr xmlns:a="http://schemas.openxmlformats.org/drawingml/2006/main" anchor="ctr"/>
+          <a:lstStyle xmlns:a="http://schemas.openxmlformats.org/drawingml/2006/main"/>
+          <a:p xmlns:a="http://schemas.openxmlformats.org/drawingml/2006/main">
+            <a:pPr algn="ctr"/>
+            <a:r>
+              <a:rPr lang="en-US" sz="1800" b="1">
+                <a:solidFill>
+                  <a:srgbClr val="FFFFFF"/>
+                </a:solidFill>
+                <a:latin typeface="Arial"/>
+                <a:ea typeface="Arial"/>
+              </a:rPr>
+              <a:t>5</a:t>
+            </a:r>
+          </a:p>
+          <a:p xmlns:a="http://schemas.openxmlformats.org/drawingml/2006/main">
+            <a:pPr algn="ctr"/>
+            <a:r>
+              <a:rPr lang="en-US" sz="1800" b="1">
+                <a:solidFill>
+                  <a:srgbClr val="FFFFFF"/>
+                </a:solidFill>
+                <a:latin typeface="Arial"/>
+                <a:ea typeface="Arial"/>
+              </a:rPr>
+              <a:t>Gate 3</a:t>
+            </a:r>
+          </a:p>
+          <a:p xmlns:a="http://schemas.openxmlformats.org/drawingml/2006/main">
+            <a:pPr algn="ctr"/>
+            <a:r>
+              <a:rPr lang="en-US" sz="1800" b="1">
+                <a:solidFill>
+                  <a:srgbClr val="FFFFFF"/>
+                </a:solidFill>
+                <a:latin typeface="Arial"/>
+                <a:ea typeface="Arial"/>
+              </a:rPr>
+              <a:t>QA</a:t>
+            </a:r>
+          </a:p>
+        </p:txBody>
+      </p:sp>
+      <p:cxnSp>
+        <p:nvCxnSpPr>
+          <p:cNvPr id="100042" name="Connector 1"/>
+          <p:cNvCxnSpPr>
+            <a:stCxn xmlns:a="http://schemas.openxmlformats.org/drawingml/2006/main" id="100037" idx="0"/>
+            <a:endCxn xmlns:a="http://schemas.openxmlformats.org/drawingml/2006/main" id="100038" idx="0"/>
+          </p:cNvCxnSpPr>
+          <p:nvPr/>
+        </p:nvCxnSpPr>
+        <p:spPr>
+          <a:xfrm xmlns:a="http://schemas.openxmlformats.org/drawingml/2006/main">
+            <a:off x="2595600" y="3232800"/>
+            <a:ext cx="396000" cy="0"/>
+          </a:xfrm>
+          <a:prstGeom xmlns:a="http://schemas.openxmlformats.org/drawingml/2006/main" prst="straightConnector1">
+            <a:avLst/>
+          </a:prstGeom>
+          <a:ln xmlns:a="http://schemas.openxmlformats.org/drawingml/2006/main" w="12700">
+            <a:solidFill>
+              <a:srgbClr val="A0A6B0"/>
+            </a:solidFill>
+            <a:tailEnd type="triangle"/>
+          </a:ln>
+        </p:spPr>
+      </p:cxnSp>
+      <p:cxnSp>
+        <p:nvCxnSpPr>
+          <p:cNvPr id="100043" name="Connector 2"/>
+          <p:cNvCxnSpPr>
+            <a:stCxn xmlns:a="http://schemas.openxmlformats.org/drawingml/2006/main" id="100038" idx="0"/>
+            <a:endCxn xmlns:a="http://schemas.openxmlformats.org/drawingml/2006/main" id="100039" idx="0"/>
+          </p:cNvCxnSpPr>
+          <p:nvPr/>
+        </p:nvCxnSpPr>
+        <p:spPr>
+          <a:xfrm xmlns:a="http://schemas.openxmlformats.org/drawingml/2006/main">
+            <a:off x="4795200" y="3232800"/>
+            <a:ext cx="399600" cy="0"/>
+          </a:xfrm>
+          <a:prstGeom xmlns:a="http://schemas.openxmlformats.org/drawingml/2006/main" prst="straightConnector1">
+            <a:avLst/>
+          </a:prstGeom>
+          <a:ln xmlns:a="http://schemas.openxmlformats.org/drawingml/2006/main" w="12700">
+            <a:solidFill>
+              <a:srgbClr val="A0A6B0"/>
+            </a:solidFill>
+            <a:tailEnd type="triangle"/>
+          </a:ln>
+        </p:spPr>
+      </p:cxnSp>
+      <p:cxnSp>
+        <p:nvCxnSpPr>
+          <p:cNvPr id="100044" name="Connector 3"/>
+          <p:cNvCxnSpPr>
+            <a:stCxn xmlns:a="http://schemas.openxmlformats.org/drawingml/2006/main" id="100039" idx="0"/>
+            <a:endCxn xmlns:a="http://schemas.openxmlformats.org/drawingml/2006/main" id="100040" idx="0"/>
+          </p:cNvCxnSpPr>
+          <p:nvPr/>
+        </p:nvCxnSpPr>
+        <p:spPr>
+          <a:xfrm xmlns:a="http://schemas.openxmlformats.org/drawingml/2006/main">
+            <a:off x="6998400" y="3232800"/>
+            <a:ext cx="396000" cy="0"/>
+          </a:xfrm>
+          <a:prstGeom xmlns:a="http://schemas.openxmlformats.org/drawingml/2006/main" prst="straightConnector1">
+            <a:avLst/>
+          </a:prstGeom>
+          <a:ln xmlns:a="http://schemas.openxmlformats.org/drawingml/2006/main" w="12700">
+            <a:solidFill>
+              <a:srgbClr val="A0A6B0"/>
+            </a:solidFill>
+            <a:tailEnd type="triangle"/>
+          </a:ln>
+        </p:spPr>
+      </p:cxnSp>
+      <p:cxnSp>
+        <p:nvCxnSpPr>
+          <p:cNvPr id="100045" name="Connector 4"/>
+          <p:cNvCxnSpPr>
+            <a:stCxn xmlns:a="http://schemas.openxmlformats.org/drawingml/2006/main" id="100040" idx="0"/>
+            <a:endCxn xmlns:a="http://schemas.openxmlformats.org/drawingml/2006/main" id="100041" idx="0"/>
+          </p:cNvCxnSpPr>
+          <p:nvPr/>
+        </p:nvCxnSpPr>
+        <p:spPr>
+          <a:xfrm xmlns:a="http://schemas.openxmlformats.org/drawingml/2006/main">
+            <a:off x="9198000" y="3232800"/>
+            <a:ext cx="399600" cy="0"/>
+          </a:xfrm>
+          <a:prstGeom xmlns:a="http://schemas.openxmlformats.org/drawingml/2006/main" prst="straightConnector1">
+            <a:avLst/>
+          </a:prstGeom>
+          <a:ln xmlns:a="http://schemas.openxmlformats.org/drawingml/2006/main" w="12700">
+            <a:solidFill>
+              <a:srgbClr val="A0A6B0"/>
+            </a:solidFill>
+            <a:tailEnd type="triangle"/>
+          </a:ln>
+        </p:spPr>
+      </p:cxnSp>
     </p:spTree>
   </p:cSld>
   <p:transition spd="med">
@@ -3259,7 +4276,7 @@
                                       <p:cBhvr>
                                         <p:cTn id="6" dur="500"/>
                                         <p:tgtEl>
-                                          <p:spTgt spid="100038"/>
+                                          <p:spTgt spid="100036"/>
                                         </p:tgtEl>
                                       </p:cBhvr>
                                     </p:animEffect>
@@ -3276,7 +4293,7 @@
                                       <p:cBhvr>
                                         <p:cTn id="8" dur="500"/>
                                         <p:tgtEl>
-                                          <p:spTgt spid="100039"/>
+                                          <p:spTgt spid="100037"/>
                                         </p:tgtEl>
                                       </p:cBhvr>
                                     </p:animEffect>
@@ -3293,7 +4310,7 @@
                                       <p:cBhvr>
                                         <p:cTn id="10" dur="500"/>
                                         <p:tgtEl>
-                                          <p:spTgt spid="100040"/>
+                                          <p:spTgt spid="100038"/>
                                         </p:tgtEl>
                                       </p:cBhvr>
                                     </p:animEffect>
@@ -3350,14 +4367,14 @@
       <p:grpSpPr/>
       <p:sp>
         <p:nvSpPr>
-          <p:cNvPr id="100042" name="MVTitle"/>
+          <p:cNvPr id="100046" name="FeatTitle"/>
           <p:cNvSpPr txBox="1"/>
           <p:nvPr/>
         </p:nvSpPr>
         <p:spPr>
           <a:xfrm xmlns:a="http://schemas.openxmlformats.org/drawingml/2006/main">
             <a:off x="792000" y="435600"/>
-            <a:ext cx="10609200" cy="558000"/>
+            <a:ext cx="10609200" cy="662400"/>
           </a:xfrm>
           <a:prstGeom xmlns:a="http://schemas.openxmlformats.org/drawingml/2006/main" prst="rect">
             <a:avLst/>
@@ -3376,21 +4393,21 @@
                 <a:latin typeface="Arial"/>
                 <a:ea typeface="Arial"/>
               </a:rPr>
-              <a:t>North star</a:t>
-            </a:r>
-          </a:p>
-        </p:txBody>
-      </p:sp>
-      <p:sp>
-        <p:nvSpPr>
-          <p:cNvPr id="100043" name="MVPanel1"/>
+              <a:t>Three promises</a:t>
+            </a:r>
+          </a:p>
+        </p:txBody>
+      </p:sp>
+      <p:sp>
+        <p:nvSpPr>
+          <p:cNvPr id="100047" name="Card1Bg"/>
           <p:cNvSpPr/>
           <p:nvPr/>
         </p:nvSpPr>
         <p:spPr>
           <a:xfrm xmlns:a="http://schemas.openxmlformats.org/drawingml/2006/main">
-            <a:off x="792000" y="2196000"/>
-            <a:ext cx="5104800" cy="2448000"/>
+            <a:off x="792000" y="1414800"/>
+            <a:ext cx="3272400" cy="4651200"/>
           </a:xfrm>
           <a:prstGeom xmlns:a="http://schemas.openxmlformats.org/drawingml/2006/main" prst="roundRect">
             <a:avLst/>
@@ -3410,14 +4427,14 @@
       </p:sp>
       <p:sp>
         <p:nvSpPr>
-          <p:cNvPr id="100044" name="MVLab1"/>
+          <p:cNvPr id="100048" name="Card1Num"/>
           <p:cNvSpPr txBox="1"/>
           <p:nvPr/>
         </p:nvSpPr>
         <p:spPr>
           <a:xfrm xmlns:a="http://schemas.openxmlformats.org/drawingml/2006/main">
-            <a:off x="1188000" y="2592000"/>
-            <a:ext cx="4312800" cy="540000"/>
+            <a:off x="1188000" y="1810800"/>
+            <a:ext cx="2480400" cy="666000"/>
           </a:xfrm>
           <a:prstGeom xmlns:a="http://schemas.openxmlformats.org/drawingml/2006/main" prst="rect">
             <a:avLst/>
@@ -3429,28 +4446,61 @@
           <a:lstStyle xmlns:a="http://schemas.openxmlformats.org/drawingml/2006/main"/>
           <a:p xmlns:a="http://schemas.openxmlformats.org/drawingml/2006/main">
             <a:r>
-              <a:rPr lang="en-US" sz="2800" b="1">
+              <a:rPr lang="en-US" sz="3400" b="1">
+                <a:solidFill>
+                  <a:srgbClr val="0B5FFF"/>
+                </a:solidFill>
+                <a:latin typeface="Arial"/>
+                <a:ea typeface="Arial"/>
+              </a:rPr>
+              <a:t>01</a:t>
+            </a:r>
+          </a:p>
+        </p:txBody>
+      </p:sp>
+      <p:sp>
+        <p:nvSpPr>
+          <p:cNvPr id="100049" name="Card1Title"/>
+          <p:cNvSpPr txBox="1"/>
+          <p:nvPr/>
+        </p:nvSpPr>
+        <p:spPr>
+          <a:xfrm xmlns:a="http://schemas.openxmlformats.org/drawingml/2006/main">
+            <a:off x="1188000" y="2696400"/>
+            <a:ext cx="2480400" cy="774000"/>
+          </a:xfrm>
+          <a:prstGeom xmlns:a="http://schemas.openxmlformats.org/drawingml/2006/main" prst="rect">
+            <a:avLst/>
+          </a:prstGeom>
+          <a:noFill xmlns:a="http://schemas.openxmlformats.org/drawingml/2006/main"/>
+        </p:spPr>
+        <p:txBody>
+          <a:bodyPr xmlns:a="http://schemas.openxmlformats.org/drawingml/2006/main"/>
+          <a:lstStyle xmlns:a="http://schemas.openxmlformats.org/drawingml/2006/main"/>
+          <a:p xmlns:a="http://schemas.openxmlformats.org/drawingml/2006/main">
+            <a:r>
+              <a:rPr lang="en-US" sz="2600" b="1">
                 <a:solidFill>
                   <a:srgbClr val="F5F5F7"/>
                 </a:solidFill>
                 <a:latin typeface="Arial"/>
                 <a:ea typeface="Arial"/>
               </a:rPr>
-              <a:t>Mission</a:t>
-            </a:r>
-          </a:p>
-        </p:txBody>
-      </p:sp>
-      <p:sp>
-        <p:nvSpPr>
-          <p:cNvPr id="100045" name="MVBody1"/>
+              <a:t>Exact geometry</a:t>
+            </a:r>
+          </a:p>
+        </p:txBody>
+      </p:sp>
+      <p:sp>
+        <p:nvSpPr>
+          <p:cNvPr id="100050" name="Card1Body"/>
           <p:cNvSpPr txBox="1"/>
           <p:nvPr/>
         </p:nvSpPr>
         <p:spPr>
           <a:xfrm xmlns:a="http://schemas.openxmlformats.org/drawingml/2006/main">
-            <a:off x="1188000" y="3355200"/>
-            <a:ext cx="4312800" cy="896400"/>
+            <a:off x="1188000" y="3693600"/>
+            <a:ext cx="2480400" cy="946800"/>
           </a:xfrm>
           <a:prstGeom xmlns:a="http://schemas.openxmlformats.org/drawingml/2006/main" prst="rect">
             <a:avLst/>
@@ -3462,34 +4512,34 @@
           <a:lstStyle xmlns:a="http://schemas.openxmlformats.org/drawingml/2006/main"/>
           <a:p xmlns:a="http://schemas.openxmlformats.org/drawingml/2006/main">
             <a:r>
-              <a:rPr lang="en-US" sz="1800">
+              <a:rPr lang="en-US" sz="1800" b="0">
                 <a:solidFill>
                   <a:srgbClr val="A0A6B0"/>
                 </a:solidFill>
                 <a:latin typeface="Arial"/>
                 <a:ea typeface="Arial"/>
               </a:rPr>
-              <a:t>Make every brand deck as sharp as the product it sells.</a:t>
-            </a:r>
-          </a:p>
-        </p:txBody>
-      </p:sp>
-      <p:sp>
-        <p:nvSpPr>
-          <p:cNvPr id="100046" name="MVPanel2"/>
+              <a:t>Centimeters. Connectors. Type floors that hold.</a:t>
+            </a:r>
+          </a:p>
+        </p:txBody>
+      </p:sp>
+      <p:sp>
+        <p:nvSpPr>
+          <p:cNvPr id="100051" name="Card2Bg"/>
           <p:cNvSpPr/>
           <p:nvPr/>
         </p:nvSpPr>
         <p:spPr>
           <a:xfrm xmlns:a="http://schemas.openxmlformats.org/drawingml/2006/main">
-            <a:off x="6292800" y="2196000"/>
-            <a:ext cx="5104800" cy="2448000"/>
+            <a:off x="4460400" y="1414800"/>
+            <a:ext cx="3272400" cy="4651200"/>
           </a:xfrm>
           <a:prstGeom xmlns:a="http://schemas.openxmlformats.org/drawingml/2006/main" prst="roundRect">
             <a:avLst/>
           </a:prstGeom>
           <a:solidFill xmlns:a="http://schemas.openxmlformats.org/drawingml/2006/main">
-            <a:srgbClr val="0B5FFF"/>
+            <a:srgbClr val="1C1C1E"/>
           </a:solidFill>
           <a:ln xmlns:a="http://schemas.openxmlformats.org/drawingml/2006/main">
             <a:noFill/>
@@ -3503,14 +4553,14 @@
       </p:sp>
       <p:sp>
         <p:nvSpPr>
-          <p:cNvPr id="100047" name="MVLab2"/>
+          <p:cNvPr id="100052" name="Card2Num"/>
           <p:cNvSpPr txBox="1"/>
           <p:nvPr/>
         </p:nvSpPr>
         <p:spPr>
           <a:xfrm xmlns:a="http://schemas.openxmlformats.org/drawingml/2006/main">
-            <a:off x="6692400" y="2592000"/>
-            <a:ext cx="4312800" cy="540000"/>
+            <a:off x="4856400" y="1810800"/>
+            <a:ext cx="2480400" cy="666000"/>
           </a:xfrm>
           <a:prstGeom xmlns:a="http://schemas.openxmlformats.org/drawingml/2006/main" prst="rect">
             <a:avLst/>
@@ -3522,28 +4572,28 @@
           <a:lstStyle xmlns:a="http://schemas.openxmlformats.org/drawingml/2006/main"/>
           <a:p xmlns:a="http://schemas.openxmlformats.org/drawingml/2006/main">
             <a:r>
-              <a:rPr lang="en-US" sz="2800" b="1">
-                <a:solidFill>
-                  <a:srgbClr val="FFFFFF"/>
-                </a:solidFill>
-                <a:latin typeface="Arial"/>
-                <a:ea typeface="Arial"/>
-              </a:rPr>
-              <a:t>Vision</a:t>
-            </a:r>
-          </a:p>
-        </p:txBody>
-      </p:sp>
-      <p:sp>
-        <p:nvSpPr>
-          <p:cNvPr id="100048" name="MVBody2"/>
+              <a:rPr lang="en-US" sz="3400" b="1">
+                <a:solidFill>
+                  <a:srgbClr val="0B5FFF"/>
+                </a:solidFill>
+                <a:latin typeface="Arial"/>
+                <a:ea typeface="Arial"/>
+              </a:rPr>
+              <a:t>02</a:t>
+            </a:r>
+          </a:p>
+        </p:txBody>
+      </p:sp>
+      <p:sp>
+        <p:nvSpPr>
+          <p:cNvPr id="100053" name="Card2Title"/>
           <p:cNvSpPr txBox="1"/>
           <p:nvPr/>
         </p:nvSpPr>
         <p:spPr>
           <a:xfrm xmlns:a="http://schemas.openxmlformats.org/drawingml/2006/main">
-            <a:off x="6692400" y="3355200"/>
-            <a:ext cx="4312800" cy="896400"/>
+            <a:off x="4856400" y="2696400"/>
+            <a:ext cx="2480400" cy="774000"/>
           </a:xfrm>
           <a:prstGeom xmlns:a="http://schemas.openxmlformats.org/drawingml/2006/main" prst="rect">
             <a:avLst/>
@@ -3555,14 +4605,173 @@
           <a:lstStyle xmlns:a="http://schemas.openxmlformats.org/drawingml/2006/main"/>
           <a:p xmlns:a="http://schemas.openxmlformats.org/drawingml/2006/main">
             <a:r>
-              <a:rPr lang="en-US" sz="1800">
-                <a:solidFill>
-                  <a:srgbClr val="FFFFFF"/>
-                </a:solidFill>
-                <a:latin typeface="Arial"/>
-                <a:ea typeface="Arial"/>
-              </a:rPr>
-              <a:t>Ship DESIGN.md-native slides without designers in the pixel loop.</a:t>
+              <a:rPr lang="en-US" sz="2600" b="1">
+                <a:solidFill>
+                  <a:srgbClr val="F5F5F7"/>
+                </a:solidFill>
+                <a:latin typeface="Arial"/>
+                <a:ea typeface="Arial"/>
+              </a:rPr>
+              <a:t>Hard gates</a:t>
+            </a:r>
+          </a:p>
+        </p:txBody>
+      </p:sp>
+      <p:sp>
+        <p:nvSpPr>
+          <p:cNvPr id="100054" name="Card2Body"/>
+          <p:cNvSpPr txBox="1"/>
+          <p:nvPr/>
+        </p:nvSpPr>
+        <p:spPr>
+          <a:xfrm xmlns:a="http://schemas.openxmlformats.org/drawingml/2006/main">
+            <a:off x="4856400" y="3693600"/>
+            <a:ext cx="2480400" cy="946800"/>
+          </a:xfrm>
+          <a:prstGeom xmlns:a="http://schemas.openxmlformats.org/drawingml/2006/main" prst="rect">
+            <a:avLst/>
+          </a:prstGeom>
+          <a:noFill xmlns:a="http://schemas.openxmlformats.org/drawingml/2006/main"/>
+        </p:spPr>
+        <p:txBody>
+          <a:bodyPr xmlns:a="http://schemas.openxmlformats.org/drawingml/2006/main"/>
+          <a:lstStyle xmlns:a="http://schemas.openxmlformats.org/drawingml/2006/main"/>
+          <a:p xmlns:a="http://schemas.openxmlformats.org/drawingml/2006/main">
+            <a:r>
+              <a:rPr lang="en-US" sz="1800" b="0">
+                <a:solidFill>
+                  <a:srgbClr val="A0A6B0"/>
+                </a:solidFill>
+                <a:latin typeface="Arial"/>
+                <a:ea typeface="Arial"/>
+              </a:rPr>
+              <a:t>Budgets, contrast, issues — then a contact sheet.</a:t>
+            </a:r>
+          </a:p>
+        </p:txBody>
+      </p:sp>
+      <p:sp>
+        <p:nvSpPr>
+          <p:cNvPr id="100055" name="Card3Bg"/>
+          <p:cNvSpPr/>
+          <p:nvPr/>
+        </p:nvSpPr>
+        <p:spPr>
+          <a:xfrm xmlns:a="http://schemas.openxmlformats.org/drawingml/2006/main">
+            <a:off x="8128800" y="1414800"/>
+            <a:ext cx="3272400" cy="4651200"/>
+          </a:xfrm>
+          <a:prstGeom xmlns:a="http://schemas.openxmlformats.org/drawingml/2006/main" prst="roundRect">
+            <a:avLst/>
+          </a:prstGeom>
+          <a:solidFill xmlns:a="http://schemas.openxmlformats.org/drawingml/2006/main">
+            <a:srgbClr val="1C1C1E"/>
+          </a:solidFill>
+          <a:ln xmlns:a="http://schemas.openxmlformats.org/drawingml/2006/main">
+            <a:noFill/>
+          </a:ln>
+        </p:spPr>
+        <p:txBody>
+          <a:bodyPr xmlns:a="http://schemas.openxmlformats.org/drawingml/2006/main"/>
+          <a:lstStyle xmlns:a="http://schemas.openxmlformats.org/drawingml/2006/main"/>
+          <a:p xmlns:a="http://schemas.openxmlformats.org/drawingml/2006/main"/>
+        </p:txBody>
+      </p:sp>
+      <p:sp>
+        <p:nvSpPr>
+          <p:cNvPr id="100056" name="Card3Num"/>
+          <p:cNvSpPr txBox="1"/>
+          <p:nvPr/>
+        </p:nvSpPr>
+        <p:spPr>
+          <a:xfrm xmlns:a="http://schemas.openxmlformats.org/drawingml/2006/main">
+            <a:off x="8524800" y="1810800"/>
+            <a:ext cx="2480400" cy="666000"/>
+          </a:xfrm>
+          <a:prstGeom xmlns:a="http://schemas.openxmlformats.org/drawingml/2006/main" prst="rect">
+            <a:avLst/>
+          </a:prstGeom>
+          <a:noFill xmlns:a="http://schemas.openxmlformats.org/drawingml/2006/main"/>
+        </p:spPr>
+        <p:txBody>
+          <a:bodyPr xmlns:a="http://schemas.openxmlformats.org/drawingml/2006/main"/>
+          <a:lstStyle xmlns:a="http://schemas.openxmlformats.org/drawingml/2006/main"/>
+          <a:p xmlns:a="http://schemas.openxmlformats.org/drawingml/2006/main">
+            <a:r>
+              <a:rPr lang="en-US" sz="3400" b="1">
+                <a:solidFill>
+                  <a:srgbClr val="0B5FFF"/>
+                </a:solidFill>
+                <a:latin typeface="Arial"/>
+                <a:ea typeface="Arial"/>
+              </a:rPr>
+              <a:t>03</a:t>
+            </a:r>
+          </a:p>
+        </p:txBody>
+      </p:sp>
+      <p:sp>
+        <p:nvSpPr>
+          <p:cNvPr id="100057" name="Card3Title"/>
+          <p:cNvSpPr txBox="1"/>
+          <p:nvPr/>
+        </p:nvSpPr>
+        <p:spPr>
+          <a:xfrm xmlns:a="http://schemas.openxmlformats.org/drawingml/2006/main">
+            <a:off x="8524800" y="2696400"/>
+            <a:ext cx="2480400" cy="774000"/>
+          </a:xfrm>
+          <a:prstGeom xmlns:a="http://schemas.openxmlformats.org/drawingml/2006/main" prst="rect">
+            <a:avLst/>
+          </a:prstGeom>
+          <a:noFill xmlns:a="http://schemas.openxmlformats.org/drawingml/2006/main"/>
+        </p:spPr>
+        <p:txBody>
+          <a:bodyPr xmlns:a="http://schemas.openxmlformats.org/drawingml/2006/main"/>
+          <a:lstStyle xmlns:a="http://schemas.openxmlformats.org/drawingml/2006/main"/>
+          <a:p xmlns:a="http://schemas.openxmlformats.org/drawingml/2006/main">
+            <a:r>
+              <a:rPr lang="en-US" sz="2600" b="1">
+                <a:solidFill>
+                  <a:srgbClr val="F5F5F7"/>
+                </a:solidFill>
+                <a:latin typeface="Arial"/>
+                <a:ea typeface="Arial"/>
+              </a:rPr>
+              <a:t>License-safe</a:t>
+            </a:r>
+          </a:p>
+        </p:txBody>
+      </p:sp>
+      <p:sp>
+        <p:nvSpPr>
+          <p:cNvPr id="100058" name="Card3Body"/>
+          <p:cNvSpPr txBox="1"/>
+          <p:nvPr/>
+        </p:nvSpPr>
+        <p:spPr>
+          <a:xfrm xmlns:a="http://schemas.openxmlformats.org/drawingml/2006/main">
+            <a:off x="8524800" y="3693600"/>
+            <a:ext cx="2480400" cy="946800"/>
+          </a:xfrm>
+          <a:prstGeom xmlns:a="http://schemas.openxmlformats.org/drawingml/2006/main" prst="rect">
+            <a:avLst/>
+          </a:prstGeom>
+          <a:noFill xmlns:a="http://schemas.openxmlformats.org/drawingml/2006/main"/>
+        </p:spPr>
+        <p:txBody>
+          <a:bodyPr xmlns:a="http://schemas.openxmlformats.org/drawingml/2006/main"/>
+          <a:lstStyle xmlns:a="http://schemas.openxmlformats.org/drawingml/2006/main"/>
+          <a:p xmlns:a="http://schemas.openxmlformats.org/drawingml/2006/main">
+            <a:r>
+              <a:rPr lang="en-US" sz="1800" b="0">
+                <a:solidFill>
+                  <a:srgbClr val="A0A6B0"/>
+                </a:solidFill>
+                <a:latin typeface="Arial"/>
+                <a:ea typeface="Arial"/>
+              </a:rPr>
+              <a:t>Infograpify is reference only. Motifs are original.</a:t>
             </a:r>
           </a:p>
         </p:txBody>
@@ -3602,7 +4811,7 @@
                                       <p:cBhvr>
                                         <p:cTn id="6" dur="500"/>
                                         <p:tgtEl>
-                                          <p:spTgt spid="100042"/>
+                                          <p:spTgt spid="100046"/>
                                         </p:tgtEl>
                                       </p:cBhvr>
                                     </p:animEffect>
@@ -3619,7 +4828,7 @@
                                       <p:cBhvr>
                                         <p:cTn id="8" dur="500"/>
                                         <p:tgtEl>
-                                          <p:spTgt spid="100043"/>
+                                          <p:spTgt spid="100047"/>
                                         </p:tgtEl>
                                       </p:cBhvr>
                                     </p:animEffect>
@@ -3636,7 +4845,7 @@
                                       <p:cBhvr>
                                         <p:cTn id="10" dur="500"/>
                                         <p:tgtEl>
-                                          <p:spTgt spid="100044"/>
+                                          <p:spTgt spid="100048"/>
                                         </p:tgtEl>
                                       </p:cBhvr>
                                     </p:animEffect>
@@ -3693,7 +4902,7 @@
       <p:grpSpPr/>
       <p:sp>
         <p:nvSpPr>
-          <p:cNvPr id="100049" name="StairsTitle"/>
+          <p:cNvPr id="100059" name="FunnelTitle"/>
           <p:cNvSpPr txBox="1"/>
           <p:nvPr/>
         </p:nvSpPr>
@@ -3719,21 +4928,21 @@
                 <a:latin typeface="Arial"/>
                 <a:ea typeface="Arial"/>
               </a:rPr>
-              <a:t>Quality is a staircase</a:t>
-            </a:r>
-          </a:p>
-        </p:txBody>
-      </p:sp>
-      <p:sp>
-        <p:nvSpPr>
-          <p:cNvPr id="100050" name="Stair1"/>
+              <a:t>Adoption funnel</a:t>
+            </a:r>
+          </a:p>
+        </p:txBody>
+      </p:sp>
+      <p:sp>
+        <p:nvSpPr>
+          <p:cNvPr id="100060" name="FunnelBand1"/>
           <p:cNvSpPr/>
           <p:nvPr/>
         </p:nvSpPr>
         <p:spPr>
           <a:xfrm xmlns:a="http://schemas.openxmlformats.org/drawingml/2006/main">
-            <a:off x="828000" y="3538800"/>
-            <a:ext cx="2048400" cy="1717200"/>
+            <a:off x="792000" y="1396800"/>
+            <a:ext cx="10609200" cy="903600"/>
           </a:xfrm>
           <a:prstGeom xmlns:a="http://schemas.openxmlformats.org/drawingml/2006/main" prst="roundRect">
             <a:avLst/>
@@ -3746,59 +4955,55 @@
           </a:ln>
         </p:spPr>
         <p:txBody>
-          <a:bodyPr xmlns:a="http://schemas.openxmlformats.org/drawingml/2006/main" anchor="ctr"/>
+          <a:bodyPr xmlns:a="http://schemas.openxmlformats.org/drawingml/2006/main"/>
+          <a:lstStyle xmlns:a="http://schemas.openxmlformats.org/drawingml/2006/main"/>
+          <a:p xmlns:a="http://schemas.openxmlformats.org/drawingml/2006/main"/>
+        </p:txBody>
+      </p:sp>
+      <p:sp>
+        <p:nvSpPr>
+          <p:cNvPr id="100061" name="FunnelLabel1"/>
+          <p:cNvSpPr txBox="1"/>
+          <p:nvPr/>
+        </p:nvSpPr>
+        <p:spPr>
+          <a:xfrm xmlns:a="http://schemas.openxmlformats.org/drawingml/2006/main">
+            <a:off x="990000" y="1594800"/>
+            <a:ext cx="10213200" cy="496800"/>
+          </a:xfrm>
+          <a:prstGeom xmlns:a="http://schemas.openxmlformats.org/drawingml/2006/main" prst="rect">
+            <a:avLst/>
+          </a:prstGeom>
+          <a:noFill xmlns:a="http://schemas.openxmlformats.org/drawingml/2006/main"/>
+        </p:spPr>
+        <p:txBody>
+          <a:bodyPr xmlns:a="http://schemas.openxmlformats.org/drawingml/2006/main"/>
           <a:lstStyle xmlns:a="http://schemas.openxmlformats.org/drawingml/2006/main"/>
           <a:p xmlns:a="http://schemas.openxmlformats.org/drawingml/2006/main">
             <a:pPr algn="ctr"/>
             <a:r>
-              <a:rPr lang="en-US" sz="1800" b="1">
+              <a:rPr lang="en-US" sz="2200" b="1">
                 <a:solidFill>
                   <a:srgbClr val="F5F5F7"/>
                 </a:solidFill>
                 <a:latin typeface="Arial"/>
                 <a:ea typeface="Arial"/>
               </a:rPr>
-              <a:t>1</a:t>
-            </a:r>
-          </a:p>
-          <a:p xmlns:a="http://schemas.openxmlformats.org/drawingml/2006/main">
-            <a:pPr algn="ctr"/>
-            <a:r>
-              <a:rPr lang="en-US" sz="1800" b="1">
-                <a:solidFill>
-                  <a:srgbClr val="F5F5F7"/>
-                </a:solidFill>
-                <a:latin typeface="Arial"/>
-                <a:ea typeface="Arial"/>
-              </a:rPr>
-              <a:t>Tokens</a:t>
-            </a:r>
-          </a:p>
-          <a:p xmlns:a="http://schemas.openxmlformats.org/drawingml/2006/main">
-            <a:pPr algn="ctr"/>
-            <a:r>
-              <a:rPr lang="en-US" sz="1800" b="1">
-                <a:solidFill>
-                  <a:srgbClr val="F5F5F7"/>
-                </a:solidFill>
-                <a:latin typeface="Arial"/>
-                <a:ea typeface="Arial"/>
-              </a:rPr>
-              <a:t>Brand floors</a:t>
-            </a:r>
-          </a:p>
-        </p:txBody>
-      </p:sp>
-      <p:sp>
-        <p:nvSpPr>
-          <p:cNvPr id="100051" name="Stair2"/>
+              <a:t>Discover  ·  100%</a:t>
+            </a:r>
+          </a:p>
+        </p:txBody>
+      </p:sp>
+      <p:sp>
+        <p:nvSpPr>
+          <p:cNvPr id="100062" name="FunnelBand2"/>
           <p:cNvSpPr/>
           <p:nvPr/>
         </p:nvSpPr>
         <p:spPr>
           <a:xfrm xmlns:a="http://schemas.openxmlformats.org/drawingml/2006/main">
-            <a:off x="2948400" y="3013200"/>
-            <a:ext cx="2048400" cy="2242800"/>
+            <a:off x="1764000" y="2401200"/>
+            <a:ext cx="8665200" cy="903600"/>
           </a:xfrm>
           <a:prstGeom xmlns:a="http://schemas.openxmlformats.org/drawingml/2006/main" prst="roundRect">
             <a:avLst/>
@@ -3811,59 +5016,55 @@
           </a:ln>
         </p:spPr>
         <p:txBody>
-          <a:bodyPr xmlns:a="http://schemas.openxmlformats.org/drawingml/2006/main" anchor="ctr"/>
+          <a:bodyPr xmlns:a="http://schemas.openxmlformats.org/drawingml/2006/main"/>
+          <a:lstStyle xmlns:a="http://schemas.openxmlformats.org/drawingml/2006/main"/>
+          <a:p xmlns:a="http://schemas.openxmlformats.org/drawingml/2006/main"/>
+        </p:txBody>
+      </p:sp>
+      <p:sp>
+        <p:nvSpPr>
+          <p:cNvPr id="100063" name="FunnelLabel2"/>
+          <p:cNvSpPr txBox="1"/>
+          <p:nvPr/>
+        </p:nvSpPr>
+        <p:spPr>
+          <a:xfrm xmlns:a="http://schemas.openxmlformats.org/drawingml/2006/main">
+            <a:off x="1962000" y="2599200"/>
+            <a:ext cx="8269200" cy="496800"/>
+          </a:xfrm>
+          <a:prstGeom xmlns:a="http://schemas.openxmlformats.org/drawingml/2006/main" prst="rect">
+            <a:avLst/>
+          </a:prstGeom>
+          <a:noFill xmlns:a="http://schemas.openxmlformats.org/drawingml/2006/main"/>
+        </p:spPr>
+        <p:txBody>
+          <a:bodyPr xmlns:a="http://schemas.openxmlformats.org/drawingml/2006/main"/>
           <a:lstStyle xmlns:a="http://schemas.openxmlformats.org/drawingml/2006/main"/>
           <a:p xmlns:a="http://schemas.openxmlformats.org/drawingml/2006/main">
             <a:pPr algn="ctr"/>
             <a:r>
-              <a:rPr lang="en-US" sz="1800" b="1">
+              <a:rPr lang="en-US" sz="2200" b="1">
                 <a:solidFill>
                   <a:srgbClr val="F5F5F7"/>
                 </a:solidFill>
                 <a:latin typeface="Arial"/>
                 <a:ea typeface="Arial"/>
               </a:rPr>
-              <a:t>2</a:t>
-            </a:r>
-          </a:p>
-          <a:p xmlns:a="http://schemas.openxmlformats.org/drawingml/2006/main">
-            <a:pPr algn="ctr"/>
-            <a:r>
-              <a:rPr lang="en-US" sz="1800" b="1">
-                <a:solidFill>
-                  <a:srgbClr val="F5F5F7"/>
-                </a:solidFill>
-                <a:latin typeface="Arial"/>
-                <a:ea typeface="Arial"/>
-              </a:rPr>
-              <a:t>Fit</a:t>
-            </a:r>
-          </a:p>
-          <a:p xmlns:a="http://schemas.openxmlformats.org/drawingml/2006/main">
-            <a:pPr algn="ctr"/>
-            <a:r>
-              <a:rPr lang="en-US" sz="1800" b="1">
-                <a:solidFill>
-                  <a:srgbClr val="F5F5F7"/>
-                </a:solidFill>
-                <a:latin typeface="Arial"/>
-                <a:ea typeface="Arial"/>
-              </a:rPr>
-              <a:t>CJK budgets</a:t>
-            </a:r>
-          </a:p>
-        </p:txBody>
-      </p:sp>
-      <p:sp>
-        <p:nvSpPr>
-          <p:cNvPr id="100052" name="Stair3"/>
+              <a:t>Try doctor  ·  42%</a:t>
+            </a:r>
+          </a:p>
+        </p:txBody>
+      </p:sp>
+      <p:sp>
+        <p:nvSpPr>
+          <p:cNvPr id="100064" name="FunnelBand3"/>
           <p:cNvSpPr/>
           <p:nvPr/>
         </p:nvSpPr>
         <p:spPr>
           <a:xfrm xmlns:a="http://schemas.openxmlformats.org/drawingml/2006/main">
-            <a:off x="5072400" y="2487600"/>
-            <a:ext cx="2048400" cy="2768400"/>
+            <a:off x="2736000" y="3402000"/>
+            <a:ext cx="6717600" cy="903600"/>
           </a:xfrm>
           <a:prstGeom xmlns:a="http://schemas.openxmlformats.org/drawingml/2006/main" prst="roundRect">
             <a:avLst/>
@@ -3876,124 +5077,55 @@
           </a:ln>
         </p:spPr>
         <p:txBody>
-          <a:bodyPr xmlns:a="http://schemas.openxmlformats.org/drawingml/2006/main" anchor="ctr"/>
+          <a:bodyPr xmlns:a="http://schemas.openxmlformats.org/drawingml/2006/main"/>
+          <a:lstStyle xmlns:a="http://schemas.openxmlformats.org/drawingml/2006/main"/>
+          <a:p xmlns:a="http://schemas.openxmlformats.org/drawingml/2006/main"/>
+        </p:txBody>
+      </p:sp>
+      <p:sp>
+        <p:nvSpPr>
+          <p:cNvPr id="100065" name="FunnelLabel3"/>
+          <p:cNvSpPr txBox="1"/>
+          <p:nvPr/>
+        </p:nvSpPr>
+        <p:spPr>
+          <a:xfrm xmlns:a="http://schemas.openxmlformats.org/drawingml/2006/main">
+            <a:off x="2934000" y="3603600"/>
+            <a:ext cx="6321600" cy="496800"/>
+          </a:xfrm>
+          <a:prstGeom xmlns:a="http://schemas.openxmlformats.org/drawingml/2006/main" prst="rect">
+            <a:avLst/>
+          </a:prstGeom>
+          <a:noFill xmlns:a="http://schemas.openxmlformats.org/drawingml/2006/main"/>
+        </p:spPr>
+        <p:txBody>
+          <a:bodyPr xmlns:a="http://schemas.openxmlformats.org/drawingml/2006/main"/>
           <a:lstStyle xmlns:a="http://schemas.openxmlformats.org/drawingml/2006/main"/>
           <a:p xmlns:a="http://schemas.openxmlformats.org/drawingml/2006/main">
             <a:pPr algn="ctr"/>
             <a:r>
-              <a:rPr lang="en-US" sz="1800" b="1">
+              <a:rPr lang="en-US" sz="2200" b="1">
                 <a:solidFill>
                   <a:srgbClr val="F5F5F7"/>
                 </a:solidFill>
                 <a:latin typeface="Arial"/>
                 <a:ea typeface="Arial"/>
               </a:rPr>
-              <a:t>3</a:t>
-            </a:r>
-          </a:p>
-          <a:p xmlns:a="http://schemas.openxmlformats.org/drawingml/2006/main">
-            <a:pPr algn="ctr"/>
-            <a:r>
-              <a:rPr lang="en-US" sz="1800" b="1">
-                <a:solidFill>
-                  <a:srgbClr val="F5F5F7"/>
-                </a:solidFill>
-                <a:latin typeface="Arial"/>
-                <a:ea typeface="Arial"/>
-              </a:rPr>
-              <a:t>Issues</a:t>
-            </a:r>
-          </a:p>
-          <a:p xmlns:a="http://schemas.openxmlformats.org/drawingml/2006/main">
-            <a:pPr algn="ctr"/>
-            <a:r>
-              <a:rPr lang="en-US" sz="1800" b="1">
-                <a:solidFill>
-                  <a:srgbClr val="F5F5F7"/>
-                </a:solidFill>
-                <a:latin typeface="Arial"/>
-                <a:ea typeface="Arial"/>
-              </a:rPr>
-              <a:t>Overlap gate</a:t>
-            </a:r>
-          </a:p>
-        </p:txBody>
-      </p:sp>
-      <p:sp>
-        <p:nvSpPr>
-          <p:cNvPr id="100053" name="Stair4"/>
+              <a:t>Scaffold  ·  19%</a:t>
+            </a:r>
+          </a:p>
+        </p:txBody>
+      </p:sp>
+      <p:sp>
+        <p:nvSpPr>
+          <p:cNvPr id="100066" name="FunnelBand4"/>
           <p:cNvSpPr/>
           <p:nvPr/>
         </p:nvSpPr>
         <p:spPr>
           <a:xfrm xmlns:a="http://schemas.openxmlformats.org/drawingml/2006/main">
-            <a:off x="7192800" y="1962000"/>
-            <a:ext cx="2048400" cy="3294000"/>
-          </a:xfrm>
-          <a:prstGeom xmlns:a="http://schemas.openxmlformats.org/drawingml/2006/main" prst="roundRect">
-            <a:avLst/>
-          </a:prstGeom>
-          <a:solidFill xmlns:a="http://schemas.openxmlformats.org/drawingml/2006/main">
-            <a:srgbClr val="1C1C1E"/>
-          </a:solidFill>
-          <a:ln xmlns:a="http://schemas.openxmlformats.org/drawingml/2006/main">
-            <a:noFill/>
-          </a:ln>
-        </p:spPr>
-        <p:txBody>
-          <a:bodyPr xmlns:a="http://schemas.openxmlformats.org/drawingml/2006/main" anchor="ctr"/>
-          <a:lstStyle xmlns:a="http://schemas.openxmlformats.org/drawingml/2006/main"/>
-          <a:p xmlns:a="http://schemas.openxmlformats.org/drawingml/2006/main">
-            <a:pPr algn="ctr"/>
-            <a:r>
-              <a:rPr lang="en-US" sz="1800" b="1">
-                <a:solidFill>
-                  <a:srgbClr val="F5F5F7"/>
-                </a:solidFill>
-                <a:latin typeface="Arial"/>
-                <a:ea typeface="Arial"/>
-              </a:rPr>
-              <a:t>4</a:t>
-            </a:r>
-          </a:p>
-          <a:p xmlns:a="http://schemas.openxmlformats.org/drawingml/2006/main">
-            <a:pPr algn="ctr"/>
-            <a:r>
-              <a:rPr lang="en-US" sz="1800" b="1">
-                <a:solidFill>
-                  <a:srgbClr val="F5F5F7"/>
-                </a:solidFill>
-                <a:latin typeface="Arial"/>
-                <a:ea typeface="Arial"/>
-              </a:rPr>
-              <a:t>Gate 3</a:t>
-            </a:r>
-          </a:p>
-          <a:p xmlns:a="http://schemas.openxmlformats.org/drawingml/2006/main">
-            <a:pPr algn="ctr"/>
-            <a:r>
-              <a:rPr lang="en-US" sz="1800" b="1">
-                <a:solidFill>
-                  <a:srgbClr val="F5F5F7"/>
-                </a:solidFill>
-                <a:latin typeface="Arial"/>
-                <a:ea typeface="Arial"/>
-              </a:rPr>
-              <a:t>Contact sheet</a:t>
-            </a:r>
-          </a:p>
-        </p:txBody>
-      </p:sp>
-      <p:sp>
-        <p:nvSpPr>
-          <p:cNvPr id="100054" name="Stair5"/>
-          <p:cNvSpPr/>
-          <p:nvPr/>
-        </p:nvSpPr>
-        <p:spPr>
-          <a:xfrm xmlns:a="http://schemas.openxmlformats.org/drawingml/2006/main">
-            <a:off x="9316800" y="1436400"/>
-            <a:ext cx="2048400" cy="3816000"/>
+            <a:off x="3708000" y="4406400"/>
+            <a:ext cx="4773600" cy="903600"/>
           </a:xfrm>
           <a:prstGeom xmlns:a="http://schemas.openxmlformats.org/drawingml/2006/main" prst="roundRect">
             <a:avLst/>
@@ -4006,45 +5138,41 @@
           </a:ln>
         </p:spPr>
         <p:txBody>
-          <a:bodyPr xmlns:a="http://schemas.openxmlformats.org/drawingml/2006/main" anchor="ctr"/>
+          <a:bodyPr xmlns:a="http://schemas.openxmlformats.org/drawingml/2006/main"/>
+          <a:lstStyle xmlns:a="http://schemas.openxmlformats.org/drawingml/2006/main"/>
+          <a:p xmlns:a="http://schemas.openxmlformats.org/drawingml/2006/main"/>
+        </p:txBody>
+      </p:sp>
+      <p:sp>
+        <p:nvSpPr>
+          <p:cNvPr id="100067" name="FunnelLabel4"/>
+          <p:cNvSpPr txBox="1"/>
+          <p:nvPr/>
+        </p:nvSpPr>
+        <p:spPr>
+          <a:xfrm xmlns:a="http://schemas.openxmlformats.org/drawingml/2006/main">
+            <a:off x="3906000" y="4604400"/>
+            <a:ext cx="4377600" cy="496800"/>
+          </a:xfrm>
+          <a:prstGeom xmlns:a="http://schemas.openxmlformats.org/drawingml/2006/main" prst="rect">
+            <a:avLst/>
+          </a:prstGeom>
+          <a:noFill xmlns:a="http://schemas.openxmlformats.org/drawingml/2006/main"/>
+        </p:spPr>
+        <p:txBody>
+          <a:bodyPr xmlns:a="http://schemas.openxmlformats.org/drawingml/2006/main"/>
           <a:lstStyle xmlns:a="http://schemas.openxmlformats.org/drawingml/2006/main"/>
           <a:p xmlns:a="http://schemas.openxmlformats.org/drawingml/2006/main">
             <a:pPr algn="ctr"/>
             <a:r>
-              <a:rPr lang="en-US" sz="1800" b="1">
+              <a:rPr lang="en-US" sz="2200" b="1">
                 <a:solidFill>
                   <a:srgbClr val="FFFFFF"/>
                 </a:solidFill>
                 <a:latin typeface="Arial"/>
                 <a:ea typeface="Arial"/>
               </a:rPr>
-              <a:t>5</a:t>
-            </a:r>
-          </a:p>
-          <a:p xmlns:a="http://schemas.openxmlformats.org/drawingml/2006/main">
-            <a:pPr algn="ctr"/>
-            <a:r>
-              <a:rPr lang="en-US" sz="1800" b="1">
-                <a:solidFill>
-                  <a:srgbClr val="FFFFFF"/>
-                </a:solidFill>
-                <a:latin typeface="Arial"/>
-                <a:ea typeface="Arial"/>
-              </a:rPr>
-              <a:t>Ship</a:t>
-            </a:r>
-          </a:p>
-          <a:p xmlns:a="http://schemas.openxmlformats.org/drawingml/2006/main">
-            <a:pPr algn="ctr"/>
-            <a:r>
-              <a:rPr lang="en-US" sz="1800" b="1">
-                <a:solidFill>
-                  <a:srgbClr val="FFFFFF"/>
-                </a:solidFill>
-                <a:latin typeface="Arial"/>
-                <a:ea typeface="Arial"/>
-              </a:rPr>
-              <a:t>Human check</a:t>
+              <a:t>Ship  ·  8%</a:t>
             </a:r>
           </a:p>
         </p:txBody>
@@ -4084,7 +5212,7 @@
                                       <p:cBhvr>
                                         <p:cTn id="6" dur="500"/>
                                         <p:tgtEl>
-                                          <p:spTgt spid="100049"/>
+                                          <p:spTgt spid="100059"/>
                                         </p:tgtEl>
                                       </p:cBhvr>
                                     </p:animEffect>
@@ -4101,7 +5229,7 @@
                                       <p:cBhvr>
                                         <p:cTn id="8" dur="500"/>
                                         <p:tgtEl>
-                                          <p:spTgt spid="100050"/>
+                                          <p:spTgt spid="100060"/>
                                         </p:tgtEl>
                                       </p:cBhvr>
                                     </p:animEffect>
@@ -4118,7 +5246,7 @@
                                       <p:cBhvr>
                                         <p:cTn id="10" dur="500"/>
                                         <p:tgtEl>
-                                          <p:spTgt spid="100051"/>
+                                          <p:spTgt spid="100061"/>
                                         </p:tgtEl>
                                       </p:cBhvr>
                                     </p:animEffect>
@@ -4175,7 +5303,7 @@
       <p:grpSpPr/>
       <p:sp>
         <p:nvSpPr>
-          <p:cNvPr id="100055" name="CheckTitle"/>
+          <p:cNvPr id="100068" name="MatrixTitle"/>
           <p:cNvSpPr txBox="1"/>
           <p:nvPr/>
         </p:nvSpPr>
@@ -4201,21 +5329,21 @@
                 <a:latin typeface="Arial"/>
                 <a:ea typeface="Arial"/>
               </a:rPr>
-              <a:t>Hard rules</a:t>
-            </a:r>
-          </a:p>
-        </p:txBody>
-      </p:sp>
-      <p:sp>
-        <p:nvSpPr>
-          <p:cNvPr id="100056" name="CheckRow1"/>
+              <a:t>Where motifs play</a:t>
+            </a:r>
+          </a:p>
+        </p:txBody>
+      </p:sp>
+      <p:sp>
+        <p:nvSpPr>
+          <p:cNvPr id="100069" name="Quad1Bg"/>
           <p:cNvSpPr/>
           <p:nvPr/>
         </p:nvSpPr>
         <p:spPr>
           <a:xfrm xmlns:a="http://schemas.openxmlformats.org/drawingml/2006/main">
-            <a:off x="792000" y="1533600"/>
-            <a:ext cx="10609200" cy="651600"/>
+            <a:off x="792000" y="1404000"/>
+            <a:ext cx="5104800" cy="2160000"/>
           </a:xfrm>
           <a:prstGeom xmlns:a="http://schemas.openxmlformats.org/drawingml/2006/main" prst="roundRect">
             <a:avLst/>
@@ -4228,32 +5356,87 @@
           </a:ln>
         </p:spPr>
         <p:txBody>
-          <a:bodyPr xmlns:a="http://schemas.openxmlformats.org/drawingml/2006/main" anchor="ctr"/>
-          <a:lstStyle xmlns:a="http://schemas.openxmlformats.org/drawingml/2006/main"/>
-          <a:p xmlns:a="http://schemas.openxmlformats.org/drawingml/2006/main">
-            <a:r>
-              <a:rPr lang="en-US" sz="1800" b="0">
+          <a:bodyPr xmlns:a="http://schemas.openxmlformats.org/drawingml/2006/main"/>
+          <a:lstStyle xmlns:a="http://schemas.openxmlformats.org/drawingml/2006/main"/>
+          <a:p xmlns:a="http://schemas.openxmlformats.org/drawingml/2006/main"/>
+        </p:txBody>
+      </p:sp>
+      <p:sp>
+        <p:nvSpPr>
+          <p:cNvPr id="100070" name="Quad1Title"/>
+          <p:cNvSpPr txBox="1"/>
+          <p:nvPr/>
+        </p:nvSpPr>
+        <p:spPr>
+          <a:xfrm xmlns:a="http://schemas.openxmlformats.org/drawingml/2006/main">
+            <a:off x="1090800" y="1681200"/>
+            <a:ext cx="4514400" cy="471600"/>
+          </a:xfrm>
+          <a:prstGeom xmlns:a="http://schemas.openxmlformats.org/drawingml/2006/main" prst="rect">
+            <a:avLst/>
+          </a:prstGeom>
+          <a:noFill xmlns:a="http://schemas.openxmlformats.org/drawingml/2006/main"/>
+        </p:spPr>
+        <p:txBody>
+          <a:bodyPr xmlns:a="http://schemas.openxmlformats.org/drawingml/2006/main"/>
+          <a:lstStyle xmlns:a="http://schemas.openxmlformats.org/drawingml/2006/main"/>
+          <a:p xmlns:a="http://schemas.openxmlformats.org/drawingml/2006/main">
+            <a:r>
+              <a:rPr lang="en-US" sz="2400" b="1">
                 <a:solidFill>
                   <a:srgbClr val="F5F5F7"/>
                 </a:solidFill>
                 <a:latin typeface="Arial"/>
                 <a:ea typeface="Arial"/>
               </a:rPr>
-              <a:t>✓  Title ≥ 36pt · body ≥ 18pt</a:t>
-            </a:r>
-          </a:p>
-        </p:txBody>
-      </p:sp>
-      <p:sp>
-        <p:nvSpPr>
-          <p:cNvPr id="100057" name="CheckRow2"/>
+              <a:t>Hero</a:t>
+            </a:r>
+          </a:p>
+        </p:txBody>
+      </p:sp>
+      <p:sp>
+        <p:nvSpPr>
+          <p:cNvPr id="100071" name="Quad1Body"/>
+          <p:cNvSpPr txBox="1"/>
+          <p:nvPr/>
+        </p:nvSpPr>
+        <p:spPr>
+          <a:xfrm xmlns:a="http://schemas.openxmlformats.org/drawingml/2006/main">
+            <a:off x="1090800" y="2278800"/>
+            <a:ext cx="4514400" cy="432000"/>
+          </a:xfrm>
+          <a:prstGeom xmlns:a="http://schemas.openxmlformats.org/drawingml/2006/main" prst="rect">
+            <a:avLst/>
+          </a:prstGeom>
+          <a:noFill xmlns:a="http://schemas.openxmlformats.org/drawingml/2006/main"/>
+        </p:spPr>
+        <p:txBody>
+          <a:bodyPr xmlns:a="http://schemas.openxmlformats.org/drawingml/2006/main"/>
+          <a:lstStyle xmlns:a="http://schemas.openxmlformats.org/drawingml/2006/main"/>
+          <a:p xmlns:a="http://schemas.openxmlformats.org/drawingml/2006/main">
+            <a:r>
+              <a:rPr lang="en-US" sz="1800">
+                <a:solidFill>
+                  <a:srgbClr val="A0A6B0"/>
+                </a:solidFill>
+                <a:latin typeface="Arial"/>
+                <a:ea typeface="Arial"/>
+              </a:rPr>
+              <a:t>sparse_hero · kpi_hero</a:t>
+            </a:r>
+          </a:p>
+        </p:txBody>
+      </p:sp>
+      <p:sp>
+        <p:nvSpPr>
+          <p:cNvPr id="100072" name="Quad2Bg"/>
           <p:cNvSpPr/>
           <p:nvPr/>
         </p:nvSpPr>
         <p:spPr>
           <a:xfrm xmlns:a="http://schemas.openxmlformats.org/drawingml/2006/main">
-            <a:off x="792000" y="2250000"/>
-            <a:ext cx="10609200" cy="651600"/>
+            <a:off x="6292800" y="1404000"/>
+            <a:ext cx="5104800" cy="2160000"/>
           </a:xfrm>
           <a:prstGeom xmlns:a="http://schemas.openxmlformats.org/drawingml/2006/main" prst="roundRect">
             <a:avLst/>
@@ -4266,32 +5449,87 @@
           </a:ln>
         </p:spPr>
         <p:txBody>
-          <a:bodyPr xmlns:a="http://schemas.openxmlformats.org/drawingml/2006/main" anchor="ctr"/>
-          <a:lstStyle xmlns:a="http://schemas.openxmlformats.org/drawingml/2006/main"/>
-          <a:p xmlns:a="http://schemas.openxmlformats.org/drawingml/2006/main">
-            <a:r>
-              <a:rPr lang="en-US" sz="1800" b="0">
+          <a:bodyPr xmlns:a="http://schemas.openxmlformats.org/drawingml/2006/main"/>
+          <a:lstStyle xmlns:a="http://schemas.openxmlformats.org/drawingml/2006/main"/>
+          <a:p xmlns:a="http://schemas.openxmlformats.org/drawingml/2006/main"/>
+        </p:txBody>
+      </p:sp>
+      <p:sp>
+        <p:nvSpPr>
+          <p:cNvPr id="100073" name="Quad2Title"/>
+          <p:cNvSpPr txBox="1"/>
+          <p:nvPr/>
+        </p:nvSpPr>
+        <p:spPr>
+          <a:xfrm xmlns:a="http://schemas.openxmlformats.org/drawingml/2006/main">
+            <a:off x="6591600" y="1681200"/>
+            <a:ext cx="4514400" cy="471600"/>
+          </a:xfrm>
+          <a:prstGeom xmlns:a="http://schemas.openxmlformats.org/drawingml/2006/main" prst="rect">
+            <a:avLst/>
+          </a:prstGeom>
+          <a:noFill xmlns:a="http://schemas.openxmlformats.org/drawingml/2006/main"/>
+        </p:spPr>
+        <p:txBody>
+          <a:bodyPr xmlns:a="http://schemas.openxmlformats.org/drawingml/2006/main"/>
+          <a:lstStyle xmlns:a="http://schemas.openxmlformats.org/drawingml/2006/main"/>
+          <a:p xmlns:a="http://schemas.openxmlformats.org/drawingml/2006/main">
+            <a:r>
+              <a:rPr lang="en-US" sz="2400" b="1">
                 <a:solidFill>
                   <a:srgbClr val="F5F5F7"/>
                 </a:solidFill>
                 <a:latin typeface="Arial"/>
                 <a:ea typeface="Arial"/>
               </a:rPr>
-              <a:t>✓  Never shrink fonts to fit — split or cut</a:t>
-            </a:r>
-          </a:p>
-        </p:txBody>
-      </p:sp>
-      <p:sp>
-        <p:nvSpPr>
-          <p:cNvPr id="100058" name="CheckRow3"/>
+              <a:t>Compare</a:t>
+            </a:r>
+          </a:p>
+        </p:txBody>
+      </p:sp>
+      <p:sp>
+        <p:nvSpPr>
+          <p:cNvPr id="100074" name="Quad2Body"/>
+          <p:cNvSpPr txBox="1"/>
+          <p:nvPr/>
+        </p:nvSpPr>
+        <p:spPr>
+          <a:xfrm xmlns:a="http://schemas.openxmlformats.org/drawingml/2006/main">
+            <a:off x="6591600" y="2278800"/>
+            <a:ext cx="4514400" cy="432000"/>
+          </a:xfrm>
+          <a:prstGeom xmlns:a="http://schemas.openxmlformats.org/drawingml/2006/main" prst="rect">
+            <a:avLst/>
+          </a:prstGeom>
+          <a:noFill xmlns:a="http://schemas.openxmlformats.org/drawingml/2006/main"/>
+        </p:spPr>
+        <p:txBody>
+          <a:bodyPr xmlns:a="http://schemas.openxmlformats.org/drawingml/2006/main"/>
+          <a:lstStyle xmlns:a="http://schemas.openxmlformats.org/drawingml/2006/main"/>
+          <a:p xmlns:a="http://schemas.openxmlformats.org/drawingml/2006/main">
+            <a:r>
+              <a:rPr lang="en-US" sz="1800">
+                <a:solidFill>
+                  <a:srgbClr val="A0A6B0"/>
+                </a:solidFill>
+                <a:latin typeface="Arial"/>
+                <a:ea typeface="Arial"/>
+              </a:rPr>
+              <a:t>split_hero · matrix_quad</a:t>
+            </a:r>
+          </a:p>
+        </p:txBody>
+      </p:sp>
+      <p:sp>
+        <p:nvSpPr>
+          <p:cNvPr id="100075" name="Quad3Bg"/>
           <p:cNvSpPr/>
           <p:nvPr/>
         </p:nvSpPr>
         <p:spPr>
           <a:xfrm xmlns:a="http://schemas.openxmlformats.org/drawingml/2006/main">
-            <a:off x="792000" y="2962800"/>
-            <a:ext cx="10609200" cy="651600"/>
+            <a:off x="792000" y="3960000"/>
+            <a:ext cx="5104800" cy="2160000"/>
           </a:xfrm>
           <a:prstGeom xmlns:a="http://schemas.openxmlformats.org/drawingml/2006/main" prst="roundRect">
             <a:avLst/>
@@ -4304,32 +5542,87 @@
           </a:ln>
         </p:spPr>
         <p:txBody>
-          <a:bodyPr xmlns:a="http://schemas.openxmlformats.org/drawingml/2006/main" anchor="ctr"/>
-          <a:lstStyle xmlns:a="http://schemas.openxmlformats.org/drawingml/2006/main"/>
-          <a:p xmlns:a="http://schemas.openxmlformats.org/drawingml/2006/main">
-            <a:r>
-              <a:rPr lang="en-US" sz="1800" b="0">
+          <a:bodyPr xmlns:a="http://schemas.openxmlformats.org/drawingml/2006/main"/>
+          <a:lstStyle xmlns:a="http://schemas.openxmlformats.org/drawingml/2006/main"/>
+          <a:p xmlns:a="http://schemas.openxmlformats.org/drawingml/2006/main"/>
+        </p:txBody>
+      </p:sp>
+      <p:sp>
+        <p:nvSpPr>
+          <p:cNvPr id="100076" name="Quad3Title"/>
+          <p:cNvSpPr txBox="1"/>
+          <p:nvPr/>
+        </p:nvSpPr>
+        <p:spPr>
+          <a:xfrm xmlns:a="http://schemas.openxmlformats.org/drawingml/2006/main">
+            <a:off x="1090800" y="4237200"/>
+            <a:ext cx="4514400" cy="471600"/>
+          </a:xfrm>
+          <a:prstGeom xmlns:a="http://schemas.openxmlformats.org/drawingml/2006/main" prst="rect">
+            <a:avLst/>
+          </a:prstGeom>
+          <a:noFill xmlns:a="http://schemas.openxmlformats.org/drawingml/2006/main"/>
+        </p:spPr>
+        <p:txBody>
+          <a:bodyPr xmlns:a="http://schemas.openxmlformats.org/drawingml/2006/main"/>
+          <a:lstStyle xmlns:a="http://schemas.openxmlformats.org/drawingml/2006/main"/>
+          <a:p xmlns:a="http://schemas.openxmlformats.org/drawingml/2006/main">
+            <a:r>
+              <a:rPr lang="en-US" sz="2400" b="1">
                 <a:solidFill>
                   <a:srgbClr val="F5F5F7"/>
                 </a:solidFill>
                 <a:latin typeface="Arial"/>
                 <a:ea typeface="Arial"/>
               </a:rPr>
-              <a:t>✓  Body height follows content, not free space</a:t>
-            </a:r>
-          </a:p>
-        </p:txBody>
-      </p:sp>
-      <p:sp>
-        <p:nvSpPr>
-          <p:cNvPr id="100059" name="CheckRow4"/>
+              <a:t>Flow</a:t>
+            </a:r>
+          </a:p>
+        </p:txBody>
+      </p:sp>
+      <p:sp>
+        <p:nvSpPr>
+          <p:cNvPr id="100077" name="Quad3Body"/>
+          <p:cNvSpPr txBox="1"/>
+          <p:nvPr/>
+        </p:nvSpPr>
+        <p:spPr>
+          <a:xfrm xmlns:a="http://schemas.openxmlformats.org/drawingml/2006/main">
+            <a:off x="1090800" y="4834800"/>
+            <a:ext cx="4514400" cy="432000"/>
+          </a:xfrm>
+          <a:prstGeom xmlns:a="http://schemas.openxmlformats.org/drawingml/2006/main" prst="rect">
+            <a:avLst/>
+          </a:prstGeom>
+          <a:noFill xmlns:a="http://schemas.openxmlformats.org/drawingml/2006/main"/>
+        </p:spPr>
+        <p:txBody>
+          <a:bodyPr xmlns:a="http://schemas.openxmlformats.org/drawingml/2006/main"/>
+          <a:lstStyle xmlns:a="http://schemas.openxmlformats.org/drawingml/2006/main"/>
+          <a:p xmlns:a="http://schemas.openxmlformats.org/drawingml/2006/main">
+            <a:r>
+              <a:rPr lang="en-US" sz="1800">
+                <a:solidFill>
+                  <a:srgbClr val="A0A6B0"/>
+                </a:solidFill>
+                <a:latin typeface="Arial"/>
+                <a:ea typeface="Arial"/>
+              </a:rPr>
+              <a:t>step_rail · funnel_cascade</a:t>
+            </a:r>
+          </a:p>
+        </p:txBody>
+      </p:sp>
+      <p:sp>
+        <p:nvSpPr>
+          <p:cNvPr id="100078" name="Quad4Bg"/>
           <p:cNvSpPr/>
           <p:nvPr/>
         </p:nvSpPr>
         <p:spPr>
           <a:xfrm xmlns:a="http://schemas.openxmlformats.org/drawingml/2006/main">
-            <a:off x="792000" y="3679200"/>
-            <a:ext cx="10609200" cy="651600"/>
+            <a:off x="6292800" y="3960000"/>
+            <a:ext cx="5104800" cy="2160000"/>
           </a:xfrm>
           <a:prstGeom xmlns:a="http://schemas.openxmlformats.org/drawingml/2006/main" prst="roundRect">
             <a:avLst/>
@@ -4342,56 +5635,140 @@
           </a:ln>
         </p:spPr>
         <p:txBody>
-          <a:bodyPr xmlns:a="http://schemas.openxmlformats.org/drawingml/2006/main" anchor="ctr"/>
-          <a:lstStyle xmlns:a="http://schemas.openxmlformats.org/drawingml/2006/main"/>
-          <a:p xmlns:a="http://schemas.openxmlformats.org/drawingml/2006/main">
-            <a:r>
-              <a:rPr lang="en-US" sz="1800" b="0">
+          <a:bodyPr xmlns:a="http://schemas.openxmlformats.org/drawingml/2006/main"/>
+          <a:lstStyle xmlns:a="http://schemas.openxmlformats.org/drawingml/2006/main"/>
+          <a:p xmlns:a="http://schemas.openxmlformats.org/drawingml/2006/main"/>
+        </p:txBody>
+      </p:sp>
+      <p:sp>
+        <p:nvSpPr>
+          <p:cNvPr id="100079" name="Quad4Title"/>
+          <p:cNvSpPr txBox="1"/>
+          <p:nvPr/>
+        </p:nvSpPr>
+        <p:spPr>
+          <a:xfrm xmlns:a="http://schemas.openxmlformats.org/drawingml/2006/main">
+            <a:off x="6591600" y="4237200"/>
+            <a:ext cx="4514400" cy="471600"/>
+          </a:xfrm>
+          <a:prstGeom xmlns:a="http://schemas.openxmlformats.org/drawingml/2006/main" prst="rect">
+            <a:avLst/>
+          </a:prstGeom>
+          <a:noFill xmlns:a="http://schemas.openxmlformats.org/drawingml/2006/main"/>
+        </p:spPr>
+        <p:txBody>
+          <a:bodyPr xmlns:a="http://schemas.openxmlformats.org/drawingml/2006/main"/>
+          <a:lstStyle xmlns:a="http://schemas.openxmlformats.org/drawingml/2006/main"/>
+          <a:p xmlns:a="http://schemas.openxmlformats.org/drawingml/2006/main">
+            <a:r>
+              <a:rPr lang="en-US" sz="2400" b="1">
                 <a:solidFill>
                   <a:srgbClr val="F5F5F7"/>
                 </a:solidFill>
                 <a:latin typeface="Arial"/>
                 <a:ea typeface="Arial"/>
               </a:rPr>
-              <a:t>✓  Overwrite only with --force</a:t>
-            </a:r>
-          </a:p>
-        </p:txBody>
-      </p:sp>
-      <p:sp>
-        <p:nvSpPr>
-          <p:cNvPr id="100060" name="CheckRow5"/>
-          <p:cNvSpPr/>
-          <p:nvPr/>
-        </p:nvSpPr>
-        <p:spPr>
-          <a:xfrm xmlns:a="http://schemas.openxmlformats.org/drawingml/2006/main">
-            <a:off x="792000" y="4395600"/>
-            <a:ext cx="10609200" cy="651600"/>
-          </a:xfrm>
-          <a:prstGeom xmlns:a="http://schemas.openxmlformats.org/drawingml/2006/main" prst="roundRect">
-            <a:avLst/>
-          </a:prstGeom>
-          <a:solidFill xmlns:a="http://schemas.openxmlformats.org/drawingml/2006/main">
-            <a:srgbClr val="1C1C1E"/>
-          </a:solidFill>
-          <a:ln xmlns:a="http://schemas.openxmlformats.org/drawingml/2006/main">
-            <a:noFill/>
-          </a:ln>
-        </p:spPr>
-        <p:txBody>
-          <a:bodyPr xmlns:a="http://schemas.openxmlformats.org/drawingml/2006/main" anchor="ctr"/>
-          <a:lstStyle xmlns:a="http://schemas.openxmlformats.org/drawingml/2006/main"/>
-          <a:p xmlns:a="http://schemas.openxmlformats.org/drawingml/2006/main">
-            <a:r>
-              <a:rPr lang="en-US" sz="1800" b="0">
-                <a:solidFill>
-                  <a:srgbClr val="F5F5F7"/>
-                </a:solidFill>
-                <a:latin typeface="Arial"/>
-                <a:ea typeface="Arial"/>
-              </a:rPr>
-              <a:t>✓  Finish apply with --screenshot</a:t>
+              <a:t>Grid</a:t>
+            </a:r>
+          </a:p>
+        </p:txBody>
+      </p:sp>
+      <p:sp>
+        <p:nvSpPr>
+          <p:cNvPr id="100080" name="Quad4Body"/>
+          <p:cNvSpPr txBox="1"/>
+          <p:nvPr/>
+        </p:nvSpPr>
+        <p:spPr>
+          <a:xfrm xmlns:a="http://schemas.openxmlformats.org/drawingml/2006/main">
+            <a:off x="6591600" y="4834800"/>
+            <a:ext cx="4514400" cy="432000"/>
+          </a:xfrm>
+          <a:prstGeom xmlns:a="http://schemas.openxmlformats.org/drawingml/2006/main" prst="rect">
+            <a:avLst/>
+          </a:prstGeom>
+          <a:noFill xmlns:a="http://schemas.openxmlformats.org/drawingml/2006/main"/>
+        </p:spPr>
+        <p:txBody>
+          <a:bodyPr xmlns:a="http://schemas.openxmlformats.org/drawingml/2006/main"/>
+          <a:lstStyle xmlns:a="http://schemas.openxmlformats.org/drawingml/2006/main"/>
+          <a:p xmlns:a="http://schemas.openxmlformats.org/drawingml/2006/main">
+            <a:r>
+              <a:rPr lang="en-US" sz="1800">
+                <a:solidFill>
+                  <a:srgbClr val="A0A6B0"/>
+                </a:solidFill>
+                <a:latin typeface="Arial"/>
+                <a:ea typeface="Arial"/>
+              </a:rPr>
+              <a:t>card_row · kpi_band · tile_row</a:t>
+            </a:r>
+          </a:p>
+        </p:txBody>
+      </p:sp>
+      <p:sp>
+        <p:nvSpPr>
+          <p:cNvPr id="100081" name="AxisX"/>
+          <p:cNvSpPr txBox="1"/>
+          <p:nvPr/>
+        </p:nvSpPr>
+        <p:spPr>
+          <a:xfrm xmlns:a="http://schemas.openxmlformats.org/drawingml/2006/main">
+            <a:off x="792000" y="6300000"/>
+            <a:ext cx="10609200" cy="324000"/>
+          </a:xfrm>
+          <a:prstGeom xmlns:a="http://schemas.openxmlformats.org/drawingml/2006/main" prst="rect">
+            <a:avLst/>
+          </a:prstGeom>
+          <a:noFill xmlns:a="http://schemas.openxmlformats.org/drawingml/2006/main"/>
+        </p:spPr>
+        <p:txBody>
+          <a:bodyPr xmlns:a="http://schemas.openxmlformats.org/drawingml/2006/main"/>
+          <a:lstStyle xmlns:a="http://schemas.openxmlformats.org/drawingml/2006/main"/>
+          <a:p xmlns:a="http://schemas.openxmlformats.org/drawingml/2006/main">
+            <a:pPr algn="ctr"/>
+            <a:r>
+              <a:rPr lang="en-US" sz="1200">
+                <a:solidFill>
+                  <a:srgbClr val="A0A6B0"/>
+                </a:solidFill>
+                <a:latin typeface="Arial"/>
+                <a:ea typeface="Arial"/>
+              </a:rPr>
+              <a:t>→ Structure →</a:t>
+            </a:r>
+          </a:p>
+        </p:txBody>
+      </p:sp>
+      <p:sp>
+        <p:nvSpPr>
+          <p:cNvPr id="100082" name="AxisY"/>
+          <p:cNvSpPr txBox="1"/>
+          <p:nvPr/>
+        </p:nvSpPr>
+        <p:spPr>
+          <a:xfrm xmlns:a="http://schemas.openxmlformats.org/drawingml/2006/main">
+            <a:off x="792000" y="1080000"/>
+            <a:ext cx="4320000" cy="288000"/>
+          </a:xfrm>
+          <a:prstGeom xmlns:a="http://schemas.openxmlformats.org/drawingml/2006/main" prst="rect">
+            <a:avLst/>
+          </a:prstGeom>
+          <a:noFill xmlns:a="http://schemas.openxmlformats.org/drawingml/2006/main"/>
+        </p:spPr>
+        <p:txBody>
+          <a:bodyPr xmlns:a="http://schemas.openxmlformats.org/drawingml/2006/main"/>
+          <a:lstStyle xmlns:a="http://schemas.openxmlformats.org/drawingml/2006/main"/>
+          <a:p xmlns:a="http://schemas.openxmlformats.org/drawingml/2006/main">
+            <a:r>
+              <a:rPr lang="en-US" sz="1200">
+                <a:solidFill>
+                  <a:srgbClr val="A0A6B0"/>
+                </a:solidFill>
+                <a:latin typeface="Arial"/>
+                <a:ea typeface="Arial"/>
+              </a:rPr>
+              <a:t>↑ Narrative ↑</a:t>
             </a:r>
           </a:p>
         </p:txBody>
@@ -4431,7 +5808,7 @@
                                       <p:cBhvr>
                                         <p:cTn id="6" dur="500"/>
                                         <p:tgtEl>
-                                          <p:spTgt spid="100055"/>
+                                          <p:spTgt spid="100068"/>
                                         </p:tgtEl>
                                       </p:cBhvr>
                                     </p:animEffect>
@@ -4448,7 +5825,7 @@
                                       <p:cBhvr>
                                         <p:cTn id="8" dur="500"/>
                                         <p:tgtEl>
-                                          <p:spTgt spid="100056"/>
+                                          <p:spTgt spid="100069"/>
                                         </p:tgtEl>
                                       </p:cBhvr>
                                     </p:animEffect>
@@ -4465,7 +5842,7 @@
                                       <p:cBhvr>
                                         <p:cTn id="10" dur="500"/>
                                         <p:tgtEl>
-                                          <p:spTgt spid="100057"/>
+                                          <p:spTgt spid="100070"/>
                                         </p:tgtEl>
                                       </p:cBhvr>
                                     </p:animEffect>

--- a/demo/designmd-pptx-best-v2.1.2.pptx
+++ b/demo/designmd-pptx-best-v2.1.2.pptx
@@ -5,18 +5,18 @@
     <p:sldMasterId xmlns:r="http://schemas.openxmlformats.org/officeDocument/2006/relationships" id="2147483648" r:id="rId1"/>
   </p:sldMasterIdLst>
   <p:sldIdLst>
-    <p:sldId id="256" r:id="R8de47c23f4cd437f"/>
-    <p:sldId id="257" r:id="R4753ea1be7bf4830"/>
-    <p:sldId id="258" r:id="R2c742daa40674f2c"/>
-    <p:sldId id="259" r:id="R9c2f86182d6a4502"/>
-    <p:sldId id="260" r:id="R6f2d2bc561644c29"/>
-    <p:sldId id="261" r:id="R37934be00e2d4dbf"/>
-    <p:sldId id="262" r:id="R1e8d55fed5d54793"/>
-    <p:sldId id="263" r:id="Rc198e7811a8c44cf"/>
-    <p:sldId id="264" r:id="Ref0423f086cd4876"/>
-    <p:sldId id="265" r:id="Rc2541192e8844696"/>
-    <p:sldId id="266" r:id="R9bb0e96e7eee452b"/>
-    <p:sldId id="267" r:id="R13e9eff22d524f78"/>
+    <p:sldId id="256" r:id="Rd7c09b62344443ac"/>
+    <p:sldId id="257" r:id="R15c8823dac2546cf"/>
+    <p:sldId id="258" r:id="R818f59b6af904f4c"/>
+    <p:sldId id="259" r:id="Rc5cf20725dfa4b2e"/>
+    <p:sldId id="260" r:id="R1ef12b35d6ff446b"/>
+    <p:sldId id="261" r:id="R5561d25440e24b7c"/>
+    <p:sldId id="262" r:id="Rb1bffeb0e84e4c75"/>
+    <p:sldId id="263" r:id="Ra346319e9b7b4e99"/>
+    <p:sldId id="264" r:id="R05e1212d95c14571"/>
+    <p:sldId id="265" r:id="R2809a799792d494b"/>
+    <p:sldId id="266" r:id="R93929c4b0b5c4d8c"/>
+    <p:sldId id="267" r:id="R3568af78feef4cff"/>
   </p:sldIdLst>
   <p:sldSz cx="12192000" cy="6858000"/>
   <p:notesSz cx="6858000" cy="9144000"/>
@@ -2564,7 +2564,7 @@
                 <a:latin typeface="Arial"/>
                 <a:ea typeface="Arial"/>
               </a:rPr>
-              <a:t>12</a:t>
+              <a:t>14</a:t>
             </a:r>
           </a:p>
         </p:txBody>
@@ -2632,7 +2632,7 @@
                 <a:latin typeface="Arial"/>
                 <a:ea typeface="Arial"/>
               </a:rPr>
-              <a:t>v1</a:t>
+              <a:t>v1.2</a:t>
             </a:r>
           </a:p>
         </p:txBody>

--- a/demo/designmd-pptx-best-v2.1.2.pptx
+++ b/demo/designmd-pptx-best-v2.1.2.pptx
@@ -5,18 +5,18 @@
     <p:sldMasterId xmlns:r="http://schemas.openxmlformats.org/officeDocument/2006/relationships" id="2147483648" r:id="rId1"/>
   </p:sldMasterIdLst>
   <p:sldIdLst>
-    <p:sldId id="256" r:id="Rd7c09b62344443ac"/>
-    <p:sldId id="257" r:id="R15c8823dac2546cf"/>
-    <p:sldId id="258" r:id="R818f59b6af904f4c"/>
-    <p:sldId id="259" r:id="Rc5cf20725dfa4b2e"/>
-    <p:sldId id="260" r:id="R1ef12b35d6ff446b"/>
-    <p:sldId id="261" r:id="R5561d25440e24b7c"/>
-    <p:sldId id="262" r:id="Rb1bffeb0e84e4c75"/>
-    <p:sldId id="263" r:id="Ra346319e9b7b4e99"/>
-    <p:sldId id="264" r:id="R05e1212d95c14571"/>
-    <p:sldId id="265" r:id="R2809a799792d494b"/>
-    <p:sldId id="266" r:id="R93929c4b0b5c4d8c"/>
-    <p:sldId id="267" r:id="R3568af78feef4cff"/>
+    <p:sldId id="256" r:id="R3d13275379ab46c2"/>
+    <p:sldId id="257" r:id="R8f2cc21d29534b24"/>
+    <p:sldId id="258" r:id="Ra0d112ed1aea419d"/>
+    <p:sldId id="259" r:id="R5cff4d17a75146ee"/>
+    <p:sldId id="260" r:id="R5e3f7139cb834f33"/>
+    <p:sldId id="261" r:id="R034fc5b6262b4725"/>
+    <p:sldId id="262" r:id="R525a84c3569643bb"/>
+    <p:sldId id="263" r:id="R4010c85c50264c85"/>
+    <p:sldId id="264" r:id="Rd31a080058c94fd6"/>
+    <p:sldId id="265" r:id="R3a955052a8bf4201"/>
+    <p:sldId id="266" r:id="R5c14b74e64874c60"/>
+    <p:sldId id="267" r:id="R2909cd00091c47ef"/>
   </p:sldIdLst>
   <p:sldSz cx="12192000" cy="6858000"/>
   <p:notesSz cx="6858000" cy="9144000"/>
@@ -2564,7 +2564,7 @@
                 <a:latin typeface="Arial"/>
                 <a:ea typeface="Arial"/>
               </a:rPr>
-              <a:t>14</a:t>
+              <a:t>66</a:t>
             </a:r>
           </a:p>
         </p:txBody>
@@ -2632,7 +2632,7 @@
                 <a:latin typeface="Arial"/>
                 <a:ea typeface="Arial"/>
               </a:rPr>
-              <a:t>v1.2</a:t>
+              <a:t>v2</a:t>
             </a:r>
           </a:p>
         </p:txBody>
